--- a/_system/docs/System_Philosophy_Guide.pptx
+++ b/_system/docs/System_Philosophy_Guide.pptx
@@ -22,6 +22,19 @@
     <p:sldId id="270" r:id="rId16"/>
     <p:sldId id="271" r:id="rId17"/>
     <p:sldId id="272" r:id="rId18"/>
+    <p:sldId id="273" r:id="rId24"/>
+    <p:sldId id="274" r:id="rId25"/>
+    <p:sldId id="275" r:id="rId26"/>
+    <p:sldId id="276" r:id="rId27"/>
+    <p:sldId id="277" r:id="rId28"/>
+    <p:sldId id="278" r:id="rId29"/>
+    <p:sldId id="279" r:id="rId30"/>
+    <p:sldId id="280" r:id="rId31"/>
+    <p:sldId id="281" r:id="rId32"/>
+    <p:sldId id="282" r:id="rId33"/>
+    <p:sldId id="283" r:id="rId34"/>
+    <p:sldId id="284" r:id="rId35"/>
+    <p:sldId id="285" r:id="rId36"/>
   </p:sldIdLst>
   <p:notesMasterIdLst>
     <p:notesMasterId r:id="rId19"/>
@@ -9828,6 +9841,889 @@
 </p:sld>
 </file>
 
+<file path=ppt/slides/slide18.xml><?xml version="1.0" encoding="utf-8"?>
+<p:sld xmlns:a="http://schemas.openxmlformats.org/drawingml/2006/main" xmlns:p="http://schemas.openxmlformats.org/presentationml/2006/main" xmlns:r="http://schemas.openxmlformats.org/officeDocument/2006/relationships">
+  <p:cSld>
+    <p:spTree>
+      <p:nvGrpSpPr>
+        <p:cNvPr id="1" name=""/>
+        <p:cNvGrpSpPr/>
+        <p:nvPr/>
+      </p:nvGrpSpPr>
+      <p:grpSpPr/>
+      <p:sp>
+        <p:nvSpPr>
+          <p:cNvPr id="2" name="Rectangle 1"/>
+          <p:cNvSpPr/>
+          <p:nvPr/>
+        </p:nvSpPr>
+        <p:spPr>
+          <a:xfrm>
+            <a:off x="0" y="0"/>
+            <a:ext cx="12192000" cy="6858000"/>
+          </a:xfrm>
+          <a:prstGeom prst="rect">
+            <a:avLst/>
+          </a:prstGeom>
+          <a:solidFill>
+            <a:srgbClr val="F9FAFB"/>
+          </a:solidFill>
+          <a:ln>
+            <a:noFill/>
+          </a:ln>
+        </p:spPr>
+        <p:style>
+          <a:lnRef idx="1">
+            <a:schemeClr val="accent1"/>
+          </a:lnRef>
+          <a:fillRef idx="3">
+            <a:schemeClr val="accent1"/>
+          </a:fillRef>
+          <a:effectRef idx="2">
+            <a:schemeClr val="accent1"/>
+          </a:effectRef>
+          <a:fontRef idx="minor">
+            <a:schemeClr val="lt1"/>
+          </a:fontRef>
+        </p:style>
+        <p:txBody>
+          <a:bodyPr rtlCol="0" anchor="ctr"/>
+          <a:lstStyle/>
+          <a:p>
+            <a:pPr algn="ctr"/>
+          </a:p>
+        </p:txBody>
+      </p:sp>
+      <p:sp>
+        <p:nvSpPr>
+          <p:cNvPr id="3" name="Rectangle 2"/>
+          <p:cNvSpPr/>
+          <p:nvPr/>
+        </p:nvSpPr>
+        <p:spPr>
+          <a:xfrm>
+            <a:off x="0" y="0"/>
+            <a:ext cx="411480" cy="6858000"/>
+          </a:xfrm>
+          <a:prstGeom prst="rect">
+            <a:avLst/>
+          </a:prstGeom>
+          <a:solidFill>
+            <a:srgbClr val="0F766E"/>
+          </a:solidFill>
+          <a:ln>
+            <a:noFill/>
+          </a:ln>
+        </p:spPr>
+        <p:style>
+          <a:lnRef idx="1">
+            <a:schemeClr val="accent1"/>
+          </a:lnRef>
+          <a:fillRef idx="3">
+            <a:schemeClr val="accent1"/>
+          </a:fillRef>
+          <a:effectRef idx="2">
+            <a:schemeClr val="accent1"/>
+          </a:effectRef>
+          <a:fontRef idx="minor">
+            <a:schemeClr val="lt1"/>
+          </a:fontRef>
+        </p:style>
+        <p:txBody>
+          <a:bodyPr rtlCol="0" anchor="ctr"/>
+          <a:lstStyle/>
+          <a:p>
+            <a:pPr algn="ctr"/>
+          </a:p>
+        </p:txBody>
+      </p:sp>
+      <p:sp>
+        <p:nvSpPr>
+          <p:cNvPr id="4" name="TextBox 3"/>
+          <p:cNvSpPr txBox="1"/>
+          <p:nvPr/>
+        </p:nvSpPr>
+        <p:spPr>
+          <a:xfrm>
+            <a:off x="914400" y="2011680"/>
+            <a:ext cx="10058400" cy="365760"/>
+          </a:xfrm>
+          <a:prstGeom prst="rect">
+            <a:avLst/>
+          </a:prstGeom>
+          <a:noFill/>
+        </p:spPr>
+        <p:txBody>
+          <a:bodyPr wrap="square" lIns="0" rIns="0" tIns="0" bIns="0">
+            <a:spAutoFit/>
+          </a:bodyPr>
+          <a:lstStyle/>
+          <a:p>
+            <a:pPr algn="l"/>
+            <a:r>
+              <a:rPr sz="1400" b="1" i="0">
+                <a:solidFill>
+                  <a:srgbClr val="115E59"/>
+                </a:solidFill>
+                <a:latin typeface="Helvetica Neue"/>
+              </a:rPr>
+              <a:t>v2.3 release · 2026-05-15</a:t>
+            </a:r>
+          </a:p>
+        </p:txBody>
+      </p:sp>
+      <p:sp>
+        <p:nvSpPr>
+          <p:cNvPr id="5" name="TextBox 4"/>
+          <p:cNvSpPr txBox="1"/>
+          <p:nvPr/>
+        </p:nvSpPr>
+        <p:spPr>
+          <a:xfrm>
+            <a:off x="914400" y="2377440"/>
+            <a:ext cx="10058400" cy="1097280"/>
+          </a:xfrm>
+          <a:prstGeom prst="rect">
+            <a:avLst/>
+          </a:prstGeom>
+          <a:noFill/>
+        </p:spPr>
+        <p:txBody>
+          <a:bodyPr wrap="square" lIns="0" rIns="0" tIns="0" bIns="0">
+            <a:spAutoFit/>
+          </a:bodyPr>
+          <a:lstStyle/>
+          <a:p>
+            <a:pPr algn="l"/>
+            <a:r>
+              <a:rPr sz="4200" b="1" i="0">
+                <a:solidFill>
+                  <a:srgbClr val="1E2A4A"/>
+                </a:solidFill>
+                <a:latin typeface="Helvetica Neue"/>
+              </a:rPr>
+              <a:t>What's new in v2.3</a:t>
+            </a:r>
+          </a:p>
+        </p:txBody>
+      </p:sp>
+      <p:sp>
+        <p:nvSpPr>
+          <p:cNvPr id="6" name="TextBox 5"/>
+          <p:cNvSpPr txBox="1"/>
+          <p:nvPr/>
+        </p:nvSpPr>
+        <p:spPr>
+          <a:xfrm>
+            <a:off x="914400" y="3657600"/>
+            <a:ext cx="10058400" cy="1645920"/>
+          </a:xfrm>
+          <a:prstGeom prst="rect">
+            <a:avLst/>
+          </a:prstGeom>
+          <a:noFill/>
+        </p:spPr>
+        <p:txBody>
+          <a:bodyPr wrap="square" lIns="0" rIns="0" tIns="0" bIns="0">
+            <a:spAutoFit/>
+          </a:bodyPr>
+          <a:lstStyle/>
+          <a:p>
+            <a:pPr algn="l"/>
+            <a:r>
+              <a:rPr sz="1600" b="0" i="0">
+                <a:solidFill>
+                  <a:srgbClr val="1F2937"/>
+                </a:solidFill>
+                <a:latin typeface="Helvetica Neue"/>
+              </a:rPr>
+              <a:t>Project-level governance, confidential data tracking, and an LLM sync</a:t>
+            </a:r>
+          </a:p>
+          <a:p>
+            <a:pPr algn="l"/>
+            <a:r>
+              <a:rPr sz="1600" b="0" i="0">
+                <a:solidFill>
+                  <a:srgbClr val="1F2937"/>
+                </a:solidFill>
+                <a:latin typeface="Helvetica Neue"/>
+              </a:rPr>
+              <a:t>workflow that proposes — but never auto-applies — updates to project</a:t>
+            </a:r>
+          </a:p>
+          <a:p>
+            <a:pPr algn="l"/>
+            <a:r>
+              <a:rPr sz="1600" b="0" i="0">
+                <a:solidFill>
+                  <a:srgbClr val="1F2937"/>
+                </a:solidFill>
+                <a:latin typeface="Helvetica Neue"/>
+              </a:rPr>
+              <a:t>planning artifacts. Built on top of the existing wiki / project /</a:t>
+            </a:r>
+          </a:p>
+          <a:p>
+            <a:pPr algn="l"/>
+            <a:r>
+              <a:rPr sz="1600" b="0" i="0">
+                <a:solidFill>
+                  <a:srgbClr val="1F2937"/>
+                </a:solidFill>
+                <a:latin typeface="Helvetica Neue"/>
+              </a:rPr>
+              <a:t>exploration architecture.</a:t>
+            </a:r>
+          </a:p>
+        </p:txBody>
+      </p:sp>
+    </p:spTree>
+  </p:cSld>
+  <p:clrMapOvr>
+    <a:masterClrMapping/>
+  </p:clrMapOvr>
+</p:sld>
+</file>
+
+<file path=ppt/slides/slide19.xml><?xml version="1.0" encoding="utf-8"?>
+<p:sld xmlns:a="http://schemas.openxmlformats.org/drawingml/2006/main" xmlns:p="http://schemas.openxmlformats.org/presentationml/2006/main" xmlns:r="http://schemas.openxmlformats.org/officeDocument/2006/relationships">
+  <p:cSld>
+    <p:spTree>
+      <p:nvGrpSpPr>
+        <p:cNvPr id="1" name=""/>
+        <p:cNvGrpSpPr/>
+        <p:nvPr/>
+      </p:nvGrpSpPr>
+      <p:grpSpPr/>
+      <p:sp>
+        <p:nvSpPr>
+          <p:cNvPr id="2" name="Rectangle 1"/>
+          <p:cNvSpPr/>
+          <p:nvPr/>
+        </p:nvSpPr>
+        <p:spPr>
+          <a:xfrm>
+            <a:off x="457200" y="457200"/>
+            <a:ext cx="54864" cy="777240"/>
+          </a:xfrm>
+          <a:prstGeom prst="rect">
+            <a:avLst/>
+          </a:prstGeom>
+          <a:solidFill>
+            <a:srgbClr val="0F766E"/>
+          </a:solidFill>
+          <a:ln>
+            <a:noFill/>
+          </a:ln>
+        </p:spPr>
+        <p:style>
+          <a:lnRef idx="1">
+            <a:schemeClr val="accent1"/>
+          </a:lnRef>
+          <a:fillRef idx="3">
+            <a:schemeClr val="accent1"/>
+          </a:fillRef>
+          <a:effectRef idx="2">
+            <a:schemeClr val="accent1"/>
+          </a:effectRef>
+          <a:fontRef idx="minor">
+            <a:schemeClr val="lt1"/>
+          </a:fontRef>
+        </p:style>
+        <p:txBody>
+          <a:bodyPr rtlCol="0" anchor="ctr"/>
+          <a:lstStyle/>
+          <a:p>
+            <a:pPr algn="ctr"/>
+          </a:p>
+        </p:txBody>
+      </p:sp>
+      <p:sp>
+        <p:nvSpPr>
+          <p:cNvPr id="3" name="TextBox 2"/>
+          <p:cNvSpPr txBox="1"/>
+          <p:nvPr/>
+        </p:nvSpPr>
+        <p:spPr>
+          <a:xfrm>
+            <a:off x="640080" y="411480"/>
+            <a:ext cx="10058400" cy="292608"/>
+          </a:xfrm>
+          <a:prstGeom prst="rect">
+            <a:avLst/>
+          </a:prstGeom>
+          <a:noFill/>
+        </p:spPr>
+        <p:txBody>
+          <a:bodyPr wrap="square" lIns="0" rIns="0" tIns="0" bIns="0">
+            <a:spAutoFit/>
+          </a:bodyPr>
+          <a:lstStyle/>
+          <a:p>
+            <a:pPr algn="l"/>
+            <a:r>
+              <a:rPr sz="1100" b="1" i="0">
+                <a:solidFill>
+                  <a:srgbClr val="0F766E"/>
+                </a:solidFill>
+                <a:latin typeface="Helvetica Neue"/>
+              </a:rPr>
+              <a:t>01 · Dashboard layout</a:t>
+            </a:r>
+          </a:p>
+        </p:txBody>
+      </p:sp>
+      <p:sp>
+        <p:nvSpPr>
+          <p:cNvPr id="4" name="TextBox 3"/>
+          <p:cNvSpPr txBox="1"/>
+          <p:nvPr/>
+        </p:nvSpPr>
+        <p:spPr>
+          <a:xfrm>
+            <a:off x="640080" y="685800"/>
+            <a:ext cx="10058400" cy="640080"/>
+          </a:xfrm>
+          <a:prstGeom prst="rect">
+            <a:avLst/>
+          </a:prstGeom>
+          <a:noFill/>
+        </p:spPr>
+        <p:txBody>
+          <a:bodyPr wrap="square" lIns="0" rIns="0" tIns="0" bIns="0">
+            <a:spAutoFit/>
+          </a:bodyPr>
+          <a:lstStyle/>
+          <a:p>
+            <a:pPr algn="l"/>
+            <a:r>
+              <a:rPr sz="2800" b="1" i="0">
+                <a:solidFill>
+                  <a:srgbClr val="1E2A4A"/>
+                </a:solidFill>
+                <a:latin typeface="Helvetica Neue"/>
+              </a:rPr>
+              <a:t>Layout refresh</a:t>
+            </a:r>
+          </a:p>
+        </p:txBody>
+      </p:sp>
+      <p:sp>
+        <p:nvSpPr>
+          <p:cNvPr id="5" name="Rounded Rectangle 4"/>
+          <p:cNvSpPr/>
+          <p:nvPr/>
+        </p:nvSpPr>
+        <p:spPr>
+          <a:xfrm>
+            <a:off x="640080" y="1554480"/>
+            <a:ext cx="10515600" cy="731520"/>
+          </a:xfrm>
+          <a:prstGeom prst="roundRect">
+            <a:avLst>
+              <a:gd name="adj" fmla="val 8000"/>
+            </a:avLst>
+          </a:prstGeom>
+          <a:solidFill>
+            <a:srgbClr val="F9FAFB"/>
+          </a:solidFill>
+          <a:ln w="9525">
+            <a:solidFill>
+              <a:srgbClr val="E5E7EB"/>
+            </a:solidFill>
+          </a:ln>
+          <a:effectLst/>
+        </p:spPr>
+        <p:style>
+          <a:lnRef idx="1">
+            <a:schemeClr val="accent1"/>
+          </a:lnRef>
+          <a:fillRef idx="3">
+            <a:schemeClr val="accent1"/>
+          </a:fillRef>
+          <a:effectRef idx="2">
+            <a:schemeClr val="accent1"/>
+          </a:effectRef>
+          <a:fontRef idx="minor">
+            <a:schemeClr val="lt1"/>
+          </a:fontRef>
+        </p:style>
+        <p:txBody>
+          <a:bodyPr rtlCol="0" anchor="ctr"/>
+          <a:lstStyle/>
+          <a:p>
+            <a:pPr algn="ctr"/>
+          </a:p>
+        </p:txBody>
+      </p:sp>
+      <p:sp>
+        <p:nvSpPr>
+          <p:cNvPr id="6" name="TextBox 5"/>
+          <p:cNvSpPr txBox="1"/>
+          <p:nvPr/>
+        </p:nvSpPr>
+        <p:spPr>
+          <a:xfrm>
+            <a:off x="868680" y="1634480"/>
+            <a:ext cx="3657600" cy="365760"/>
+          </a:xfrm>
+          <a:prstGeom prst="rect">
+            <a:avLst/>
+          </a:prstGeom>
+          <a:noFill/>
+        </p:spPr>
+        <p:txBody>
+          <a:bodyPr wrap="square" lIns="0" rIns="0" tIns="0" bIns="0">
+            <a:spAutoFit/>
+          </a:bodyPr>
+          <a:lstStyle/>
+          <a:p>
+            <a:pPr algn="l"/>
+            <a:r>
+              <a:rPr sz="1500" b="1" i="0">
+                <a:solidFill>
+                  <a:srgbClr val="115E59"/>
+                </a:solidFill>
+                <a:latin typeface="Helvetica Neue"/>
+              </a:rPr>
+              <a:t>Snapshot row</a:t>
+            </a:r>
+          </a:p>
+        </p:txBody>
+      </p:sp>
+      <p:sp>
+        <p:nvSpPr>
+          <p:cNvPr id="7" name="TextBox 6"/>
+          <p:cNvSpPr txBox="1"/>
+          <p:nvPr/>
+        </p:nvSpPr>
+        <p:spPr>
+          <a:xfrm>
+            <a:off x="4572000" y="1634480"/>
+            <a:ext cx="6492240" cy="640080"/>
+          </a:xfrm>
+          <a:prstGeom prst="rect">
+            <a:avLst/>
+          </a:prstGeom>
+          <a:noFill/>
+        </p:spPr>
+        <p:txBody>
+          <a:bodyPr wrap="square" lIns="0" rIns="0" tIns="0" bIns="0">
+            <a:spAutoFit/>
+          </a:bodyPr>
+          <a:lstStyle/>
+          <a:p>
+            <a:pPr algn="l"/>
+            <a:r>
+              <a:rPr sz="1300" b="0" i="0">
+                <a:solidFill>
+                  <a:srgbClr val="1F2937"/>
+                </a:solidFill>
+                <a:latin typeface="Helvetica Neue"/>
+              </a:rPr>
+              <a:t>System health snapshot moved to the top, full-width row above the workspaces.</a:t>
+            </a:r>
+          </a:p>
+        </p:txBody>
+      </p:sp>
+      <p:sp>
+        <p:nvSpPr>
+          <p:cNvPr id="8" name="Rounded Rectangle 7"/>
+          <p:cNvSpPr/>
+          <p:nvPr/>
+        </p:nvSpPr>
+        <p:spPr>
+          <a:xfrm>
+            <a:off x="640080" y="2423160"/>
+            <a:ext cx="10515600" cy="731520"/>
+          </a:xfrm>
+          <a:prstGeom prst="roundRect">
+            <a:avLst>
+              <a:gd name="adj" fmla="val 8000"/>
+            </a:avLst>
+          </a:prstGeom>
+          <a:solidFill>
+            <a:srgbClr val="F9FAFB"/>
+          </a:solidFill>
+          <a:ln w="9525">
+            <a:solidFill>
+              <a:srgbClr val="E5E7EB"/>
+            </a:solidFill>
+          </a:ln>
+          <a:effectLst/>
+        </p:spPr>
+        <p:style>
+          <a:lnRef idx="1">
+            <a:schemeClr val="accent1"/>
+          </a:lnRef>
+          <a:fillRef idx="3">
+            <a:schemeClr val="accent1"/>
+          </a:fillRef>
+          <a:effectRef idx="2">
+            <a:schemeClr val="accent1"/>
+          </a:effectRef>
+          <a:fontRef idx="minor">
+            <a:schemeClr val="lt1"/>
+          </a:fontRef>
+        </p:style>
+        <p:txBody>
+          <a:bodyPr rtlCol="0" anchor="ctr"/>
+          <a:lstStyle/>
+          <a:p>
+            <a:pPr algn="ctr"/>
+          </a:p>
+        </p:txBody>
+      </p:sp>
+      <p:sp>
+        <p:nvSpPr>
+          <p:cNvPr id="9" name="TextBox 8"/>
+          <p:cNvSpPr txBox="1"/>
+          <p:nvPr/>
+        </p:nvSpPr>
+        <p:spPr>
+          <a:xfrm>
+            <a:off x="868680" y="2503160"/>
+            <a:ext cx="3657600" cy="365760"/>
+          </a:xfrm>
+          <a:prstGeom prst="rect">
+            <a:avLst/>
+          </a:prstGeom>
+          <a:noFill/>
+        </p:spPr>
+        <p:txBody>
+          <a:bodyPr wrap="square" lIns="0" rIns="0" tIns="0" bIns="0">
+            <a:spAutoFit/>
+          </a:bodyPr>
+          <a:lstStyle/>
+          <a:p>
+            <a:pPr algn="l"/>
+            <a:r>
+              <a:rPr sz="1500" b="1" i="0">
+                <a:solidFill>
+                  <a:srgbClr val="115E59"/>
+                </a:solidFill>
+                <a:latin typeface="Helvetica Neue"/>
+              </a:rPr>
+              <a:t>Workspaces</a:t>
+            </a:r>
+          </a:p>
+        </p:txBody>
+      </p:sp>
+      <p:sp>
+        <p:nvSpPr>
+          <p:cNvPr id="10" name="TextBox 9"/>
+          <p:cNvSpPr txBox="1"/>
+          <p:nvPr/>
+        </p:nvSpPr>
+        <p:spPr>
+          <a:xfrm>
+            <a:off x="4572000" y="2503160"/>
+            <a:ext cx="6492240" cy="640080"/>
+          </a:xfrm>
+          <a:prstGeom prst="rect">
+            <a:avLst/>
+          </a:prstGeom>
+          <a:noFill/>
+        </p:spPr>
+        <p:txBody>
+          <a:bodyPr wrap="square" lIns="0" rIns="0" tIns="0" bIns="0">
+            <a:spAutoFit/>
+          </a:bodyPr>
+          <a:lstStyle/>
+          <a:p>
+            <a:pPr algn="l"/>
+            <a:r>
+              <a:rPr sz="1300" b="0" i="0">
+                <a:solidFill>
+                  <a:srgbClr val="1F2937"/>
+                </a:solidFill>
+                <a:latin typeface="Helvetica Neue"/>
+              </a:rPr>
+              <a:t>Each project card now spans the full width — one card per row.</a:t>
+            </a:r>
+          </a:p>
+        </p:txBody>
+      </p:sp>
+      <p:sp>
+        <p:nvSpPr>
+          <p:cNvPr id="11" name="Rounded Rectangle 10"/>
+          <p:cNvSpPr/>
+          <p:nvPr/>
+        </p:nvSpPr>
+        <p:spPr>
+          <a:xfrm>
+            <a:off x="640080" y="3291840"/>
+            <a:ext cx="10515600" cy="731520"/>
+          </a:xfrm>
+          <a:prstGeom prst="roundRect">
+            <a:avLst>
+              <a:gd name="adj" fmla="val 8000"/>
+            </a:avLst>
+          </a:prstGeom>
+          <a:solidFill>
+            <a:srgbClr val="F9FAFB"/>
+          </a:solidFill>
+          <a:ln w="9525">
+            <a:solidFill>
+              <a:srgbClr val="E5E7EB"/>
+            </a:solidFill>
+          </a:ln>
+          <a:effectLst/>
+        </p:spPr>
+        <p:style>
+          <a:lnRef idx="1">
+            <a:schemeClr val="accent1"/>
+          </a:lnRef>
+          <a:fillRef idx="3">
+            <a:schemeClr val="accent1"/>
+          </a:fillRef>
+          <a:effectRef idx="2">
+            <a:schemeClr val="accent1"/>
+          </a:effectRef>
+          <a:fontRef idx="minor">
+            <a:schemeClr val="lt1"/>
+          </a:fontRef>
+        </p:style>
+        <p:txBody>
+          <a:bodyPr rtlCol="0" anchor="ctr"/>
+          <a:lstStyle/>
+          <a:p>
+            <a:pPr algn="ctr"/>
+          </a:p>
+        </p:txBody>
+      </p:sp>
+      <p:sp>
+        <p:nvSpPr>
+          <p:cNvPr id="12" name="TextBox 11"/>
+          <p:cNvSpPr txBox="1"/>
+          <p:nvPr/>
+        </p:nvSpPr>
+        <p:spPr>
+          <a:xfrm>
+            <a:off x="868680" y="3371840"/>
+            <a:ext cx="3657600" cy="365760"/>
+          </a:xfrm>
+          <a:prstGeom prst="rect">
+            <a:avLst/>
+          </a:prstGeom>
+          <a:noFill/>
+        </p:spPr>
+        <p:txBody>
+          <a:bodyPr wrap="square" lIns="0" rIns="0" tIns="0" bIns="0">
+            <a:spAutoFit/>
+          </a:bodyPr>
+          <a:lstStyle/>
+          <a:p>
+            <a:pPr algn="l"/>
+            <a:r>
+              <a:rPr sz="1500" b="1" i="0">
+                <a:solidFill>
+                  <a:srgbClr val="115E59"/>
+                </a:solidFill>
+                <a:latin typeface="Helvetica Neue"/>
+              </a:rPr>
+              <a:t>Count chips</a:t>
+            </a:r>
+          </a:p>
+        </p:txBody>
+      </p:sp>
+      <p:sp>
+        <p:nvSpPr>
+          <p:cNvPr id="13" name="TextBox 12"/>
+          <p:cNvSpPr txBox="1"/>
+          <p:nvPr/>
+        </p:nvSpPr>
+        <p:spPr>
+          <a:xfrm>
+            <a:off x="4572000" y="3371840"/>
+            <a:ext cx="6492240" cy="640080"/>
+          </a:xfrm>
+          <a:prstGeom prst="rect">
+            <a:avLst/>
+          </a:prstGeom>
+          <a:noFill/>
+        </p:spPr>
+        <p:txBody>
+          <a:bodyPr wrap="square" lIns="0" rIns="0" tIns="0" bIns="0">
+            <a:spAutoFit/>
+          </a:bodyPr>
+          <a:lstStyle/>
+          <a:p>
+            <a:pPr algn="l"/>
+            <a:r>
+              <a:rPr sz="1300" b="0" i="0">
+                <a:solidFill>
+                  <a:srgbClr val="1F2937"/>
+                </a:solidFill>
+                <a:latin typeface="Helvetica Neue"/>
+              </a:rPr>
+              <a:t>Project's 10 count chips render as a single horizontal flex row, sized to fit.</a:t>
+            </a:r>
+          </a:p>
+        </p:txBody>
+      </p:sp>
+      <p:sp>
+        <p:nvSpPr>
+          <p:cNvPr id="14" name="Rounded Rectangle 13"/>
+          <p:cNvSpPr/>
+          <p:nvPr/>
+        </p:nvSpPr>
+        <p:spPr>
+          <a:xfrm>
+            <a:off x="640080" y="4160520"/>
+            <a:ext cx="10515600" cy="731520"/>
+          </a:xfrm>
+          <a:prstGeom prst="roundRect">
+            <a:avLst>
+              <a:gd name="adj" fmla="val 8000"/>
+            </a:avLst>
+          </a:prstGeom>
+          <a:solidFill>
+            <a:srgbClr val="F9FAFB"/>
+          </a:solidFill>
+          <a:ln w="9525">
+            <a:solidFill>
+              <a:srgbClr val="E5E7EB"/>
+            </a:solidFill>
+          </a:ln>
+          <a:effectLst/>
+        </p:spPr>
+        <p:style>
+          <a:lnRef idx="1">
+            <a:schemeClr val="accent1"/>
+          </a:lnRef>
+          <a:fillRef idx="3">
+            <a:schemeClr val="accent1"/>
+          </a:fillRef>
+          <a:effectRef idx="2">
+            <a:schemeClr val="accent1"/>
+          </a:effectRef>
+          <a:fontRef idx="minor">
+            <a:schemeClr val="lt1"/>
+          </a:fontRef>
+        </p:style>
+        <p:txBody>
+          <a:bodyPr rtlCol="0" anchor="ctr"/>
+          <a:lstStyle/>
+          <a:p>
+            <a:pPr algn="ctr"/>
+          </a:p>
+        </p:txBody>
+      </p:sp>
+      <p:sp>
+        <p:nvSpPr>
+          <p:cNvPr id="15" name="TextBox 14"/>
+          <p:cNvSpPr txBox="1"/>
+          <p:nvPr/>
+        </p:nvSpPr>
+        <p:spPr>
+          <a:xfrm>
+            <a:off x="868680" y="4240520"/>
+            <a:ext cx="3657600" cy="365760"/>
+          </a:xfrm>
+          <a:prstGeom prst="rect">
+            <a:avLst/>
+          </a:prstGeom>
+          <a:noFill/>
+        </p:spPr>
+        <p:txBody>
+          <a:bodyPr wrap="square" lIns="0" rIns="0" tIns="0" bIns="0">
+            <a:spAutoFit/>
+          </a:bodyPr>
+          <a:lstStyle/>
+          <a:p>
+            <a:pPr algn="l"/>
+            <a:r>
+              <a:rPr sz="1500" b="1" i="0">
+                <a:solidFill>
+                  <a:srgbClr val="115E59"/>
+                </a:solidFill>
+                <a:latin typeface="Helvetica Neue"/>
+              </a:rPr>
+              <a:t>Why</a:t>
+            </a:r>
+          </a:p>
+        </p:txBody>
+      </p:sp>
+      <p:sp>
+        <p:nvSpPr>
+          <p:cNvPr id="16" name="TextBox 15"/>
+          <p:cNvSpPr txBox="1"/>
+          <p:nvPr/>
+        </p:nvSpPr>
+        <p:spPr>
+          <a:xfrm>
+            <a:off x="4572000" y="4240520"/>
+            <a:ext cx="6492240" cy="640080"/>
+          </a:xfrm>
+          <a:prstGeom prst="rect">
+            <a:avLst/>
+          </a:prstGeom>
+          <a:noFill/>
+        </p:spPr>
+        <p:txBody>
+          <a:bodyPr wrap="square" lIns="0" rIns="0" tIns="0" bIns="0">
+            <a:spAutoFit/>
+          </a:bodyPr>
+          <a:lstStyle/>
+          <a:p>
+            <a:pPr algn="l"/>
+            <a:r>
+              <a:rPr sz="1300" b="0" i="0">
+                <a:solidFill>
+                  <a:srgbClr val="1F2937"/>
+                </a:solidFill>
+                <a:latin typeface="Helvetica Neue"/>
+              </a:rPr>
+              <a:t>Eliminates excessive vertical scroll when many projects are active.</a:t>
+            </a:r>
+          </a:p>
+        </p:txBody>
+      </p:sp>
+      <p:sp>
+        <p:nvSpPr>
+          <p:cNvPr id="17" name="TextBox 16"/>
+          <p:cNvSpPr txBox="1"/>
+          <p:nvPr/>
+        </p:nvSpPr>
+        <p:spPr>
+          <a:xfrm>
+            <a:off x="640080" y="5943600"/>
+            <a:ext cx="10515600" cy="365760"/>
+          </a:xfrm>
+          <a:prstGeom prst="rect">
+            <a:avLst/>
+          </a:prstGeom>
+          <a:noFill/>
+        </p:spPr>
+        <p:txBody>
+          <a:bodyPr wrap="square" lIns="0" rIns="0" tIns="0" bIns="0">
+            <a:spAutoFit/>
+          </a:bodyPr>
+          <a:lstStyle/>
+          <a:p>
+            <a:pPr algn="l"/>
+            <a:r>
+              <a:rPr sz="1100" b="0" i="1">
+                <a:solidFill>
+                  <a:srgbClr val="6B7280"/>
+                </a:solidFill>
+                <a:latin typeface="Helvetica Neue"/>
+              </a:rPr>
+              <a:t>Pure UI change — no new API.</a:t>
+            </a:r>
+          </a:p>
+        </p:txBody>
+      </p:sp>
+    </p:spTree>
+  </p:cSld>
+  <p:clrMapOvr>
+    <a:masterClrMapping/>
+  </p:clrMapOvr>
+</p:sld>
+</file>
+
 <file path=ppt/slides/slide2.xml><?xml version="1.0" encoding="utf-8"?>
 <p:sld xmlns:a="http://schemas.openxmlformats.org/drawingml/2006/main" xmlns:r="http://schemas.openxmlformats.org/officeDocument/2006/relationships" xmlns:p="http://schemas.openxmlformats.org/presentationml/2006/main">
   <p:cSld name="Slide 2">
@@ -10711,6 +11607,6178 @@
               <a:t>Cross-paper synthesis lives in wiki/overviews/</a:t>
             </a:r>
             <a:endParaRPr lang="en-US" sz="1100" dirty="0"/>
+          </a:p>
+        </p:txBody>
+      </p:sp>
+    </p:spTree>
+  </p:cSld>
+  <p:clrMapOvr>
+    <a:masterClrMapping/>
+  </p:clrMapOvr>
+</p:sld>
+</file>
+
+<file path=ppt/slides/slide20.xml><?xml version="1.0" encoding="utf-8"?>
+<p:sld xmlns:a="http://schemas.openxmlformats.org/drawingml/2006/main" xmlns:p="http://schemas.openxmlformats.org/presentationml/2006/main" xmlns:r="http://schemas.openxmlformats.org/officeDocument/2006/relationships">
+  <p:cSld>
+    <p:spTree>
+      <p:nvGrpSpPr>
+        <p:cNvPr id="1" name=""/>
+        <p:cNvGrpSpPr/>
+        <p:nvPr/>
+      </p:nvGrpSpPr>
+      <p:grpSpPr/>
+      <p:sp>
+        <p:nvSpPr>
+          <p:cNvPr id="2" name="Rectangle 1"/>
+          <p:cNvSpPr/>
+          <p:nvPr/>
+        </p:nvSpPr>
+        <p:spPr>
+          <a:xfrm>
+            <a:off x="457200" y="457200"/>
+            <a:ext cx="54864" cy="777240"/>
+          </a:xfrm>
+          <a:prstGeom prst="rect">
+            <a:avLst/>
+          </a:prstGeom>
+          <a:solidFill>
+            <a:srgbClr val="0F766E"/>
+          </a:solidFill>
+          <a:ln>
+            <a:noFill/>
+          </a:ln>
+        </p:spPr>
+        <p:style>
+          <a:lnRef idx="1">
+            <a:schemeClr val="accent1"/>
+          </a:lnRef>
+          <a:fillRef idx="3">
+            <a:schemeClr val="accent1"/>
+          </a:fillRef>
+          <a:effectRef idx="2">
+            <a:schemeClr val="accent1"/>
+          </a:effectRef>
+          <a:fontRef idx="minor">
+            <a:schemeClr val="lt1"/>
+          </a:fontRef>
+        </p:style>
+        <p:txBody>
+          <a:bodyPr rtlCol="0" anchor="ctr"/>
+          <a:lstStyle/>
+          <a:p>
+            <a:pPr algn="ctr"/>
+          </a:p>
+        </p:txBody>
+      </p:sp>
+      <p:sp>
+        <p:nvSpPr>
+          <p:cNvPr id="3" name="TextBox 2"/>
+          <p:cNvSpPr txBox="1"/>
+          <p:nvPr/>
+        </p:nvSpPr>
+        <p:spPr>
+          <a:xfrm>
+            <a:off x="640080" y="411480"/>
+            <a:ext cx="10058400" cy="292608"/>
+          </a:xfrm>
+          <a:prstGeom prst="rect">
+            <a:avLst/>
+          </a:prstGeom>
+          <a:noFill/>
+        </p:spPr>
+        <p:txBody>
+          <a:bodyPr wrap="square" lIns="0" rIns="0" tIns="0" bIns="0">
+            <a:spAutoFit/>
+          </a:bodyPr>
+          <a:lstStyle/>
+          <a:p>
+            <a:pPr algn="l"/>
+            <a:r>
+              <a:rPr sz="1100" b="1" i="0">
+                <a:solidFill>
+                  <a:srgbClr val="0F766E"/>
+                </a:solidFill>
+                <a:latin typeface="Helvetica Neue"/>
+              </a:rPr>
+              <a:t>02 · People</a:t>
+            </a:r>
+          </a:p>
+        </p:txBody>
+      </p:sp>
+      <p:sp>
+        <p:nvSpPr>
+          <p:cNvPr id="4" name="TextBox 3"/>
+          <p:cNvSpPr txBox="1"/>
+          <p:nvPr/>
+        </p:nvSpPr>
+        <p:spPr>
+          <a:xfrm>
+            <a:off x="640080" y="685800"/>
+            <a:ext cx="10058400" cy="640080"/>
+          </a:xfrm>
+          <a:prstGeom prst="rect">
+            <a:avLst/>
+          </a:prstGeom>
+          <a:noFill/>
+        </p:spPr>
+        <p:txBody>
+          <a:bodyPr wrap="square" lIns="0" rIns="0" tIns="0" bIns="0">
+            <a:spAutoFit/>
+          </a:bodyPr>
+          <a:lstStyle/>
+          <a:p>
+            <a:pPr algn="l"/>
+            <a:r>
+              <a:rPr sz="2800" b="1" i="0">
+                <a:solidFill>
+                  <a:srgbClr val="1E2A4A"/>
+                </a:solidFill>
+                <a:latin typeface="Helvetica Neue"/>
+              </a:rPr>
+              <a:t>Project managers with mailto integration</a:t>
+            </a:r>
+          </a:p>
+        </p:txBody>
+      </p:sp>
+      <p:sp>
+        <p:nvSpPr>
+          <p:cNvPr id="5" name="Rounded Rectangle 4"/>
+          <p:cNvSpPr/>
+          <p:nvPr/>
+        </p:nvSpPr>
+        <p:spPr>
+          <a:xfrm>
+            <a:off x="705612" y="1691640"/>
+            <a:ext cx="3520440" cy="3657600"/>
+          </a:xfrm>
+          <a:prstGeom prst="roundRect">
+            <a:avLst>
+              <a:gd name="adj" fmla="val 8000"/>
+            </a:avLst>
+          </a:prstGeom>
+          <a:solidFill>
+            <a:srgbClr val="FFFFFF"/>
+          </a:solidFill>
+          <a:ln w="9525">
+            <a:solidFill>
+              <a:srgbClr val="E5E7EB"/>
+            </a:solidFill>
+          </a:ln>
+          <a:effectLst/>
+        </p:spPr>
+        <p:style>
+          <a:lnRef idx="1">
+            <a:schemeClr val="accent1"/>
+          </a:lnRef>
+          <a:fillRef idx="3">
+            <a:schemeClr val="accent1"/>
+          </a:fillRef>
+          <a:effectRef idx="2">
+            <a:schemeClr val="accent1"/>
+          </a:effectRef>
+          <a:fontRef idx="minor">
+            <a:schemeClr val="lt1"/>
+          </a:fontRef>
+        </p:style>
+        <p:txBody>
+          <a:bodyPr rtlCol="0" anchor="ctr"/>
+          <a:lstStyle/>
+          <a:p>
+            <a:pPr algn="ctr"/>
+          </a:p>
+        </p:txBody>
+      </p:sp>
+      <p:sp>
+        <p:nvSpPr>
+          <p:cNvPr id="6" name="Rounded Rectangle 5"/>
+          <p:cNvSpPr/>
+          <p:nvPr/>
+        </p:nvSpPr>
+        <p:spPr>
+          <a:xfrm>
+            <a:off x="870204" y="1856232"/>
+            <a:ext cx="1005840" cy="274320"/>
+          </a:xfrm>
+          <a:prstGeom prst="roundRect">
+            <a:avLst>
+              <a:gd name="adj" fmla="val 50000"/>
+            </a:avLst>
+          </a:prstGeom>
+          <a:solidFill>
+            <a:srgbClr val="0F766E"/>
+          </a:solidFill>
+          <a:ln>
+            <a:noFill/>
+          </a:ln>
+        </p:spPr>
+        <p:style>
+          <a:lnRef idx="1">
+            <a:schemeClr val="accent1"/>
+          </a:lnRef>
+          <a:fillRef idx="3">
+            <a:schemeClr val="accent1"/>
+          </a:fillRef>
+          <a:effectRef idx="2">
+            <a:schemeClr val="accent1"/>
+          </a:effectRef>
+          <a:fontRef idx="minor">
+            <a:schemeClr val="lt1"/>
+          </a:fontRef>
+        </p:style>
+        <p:txBody>
+          <a:bodyPr rtlCol="0" anchor="ctr" lIns="73152" rIns="73152" tIns="18288" bIns="18288"/>
+          <a:lstStyle/>
+          <a:p>
+            <a:pPr algn="ctr"/>
+            <a:r>
+              <a:rPr sz="1100" b="1">
+                <a:solidFill>
+                  <a:srgbClr val="FFFFFF"/>
+                </a:solidFill>
+                <a:latin typeface="Helvetica Neue"/>
+              </a:rPr>
+              <a:t>storage</a:t>
+            </a:r>
+          </a:p>
+        </p:txBody>
+      </p:sp>
+      <p:sp>
+        <p:nvSpPr>
+          <p:cNvPr id="7" name="TextBox 6"/>
+          <p:cNvSpPr txBox="1"/>
+          <p:nvPr/>
+        </p:nvSpPr>
+        <p:spPr>
+          <a:xfrm>
+            <a:off x="870204" y="2286000"/>
+            <a:ext cx="3191256" cy="457200"/>
+          </a:xfrm>
+          <a:prstGeom prst="rect">
+            <a:avLst/>
+          </a:prstGeom>
+          <a:noFill/>
+        </p:spPr>
+        <p:txBody>
+          <a:bodyPr wrap="square" lIns="0" rIns="0" tIns="0" bIns="0">
+            <a:spAutoFit/>
+          </a:bodyPr>
+          <a:lstStyle/>
+          <a:p>
+            <a:pPr algn="l"/>
+            <a:r>
+              <a:rPr sz="1600" b="1" i="0">
+                <a:solidFill>
+                  <a:srgbClr val="1E2A4A"/>
+                </a:solidFill>
+                <a:latin typeface="Helvetica Neue"/>
+              </a:rPr>
+              <a:t>Multiple managers / project</a:t>
+            </a:r>
+          </a:p>
+        </p:txBody>
+      </p:sp>
+      <p:sp>
+        <p:nvSpPr>
+          <p:cNvPr id="8" name="TextBox 7"/>
+          <p:cNvSpPr txBox="1"/>
+          <p:nvPr/>
+        </p:nvSpPr>
+        <p:spPr>
+          <a:xfrm>
+            <a:off x="870204" y="2770632"/>
+            <a:ext cx="3191256" cy="2377440"/>
+          </a:xfrm>
+          <a:prstGeom prst="rect">
+            <a:avLst/>
+          </a:prstGeom>
+          <a:noFill/>
+        </p:spPr>
+        <p:txBody>
+          <a:bodyPr wrap="square" lIns="0" rIns="0" tIns="0" bIns="0">
+            <a:spAutoFit/>
+          </a:bodyPr>
+          <a:lstStyle/>
+          <a:p>
+            <a:pPr algn="l"/>
+            <a:r>
+              <a:rPr sz="1100" b="0" i="0">
+                <a:solidFill>
+                  <a:srgbClr val="1F2937"/>
+                </a:solidFill>
+                <a:latin typeface="Helvetica Neue"/>
+              </a:rPr>
+              <a:t>Stored in Project_Brief.md frontmatter under `managers:` (name + email). Multiple managers per project supported.</a:t>
+            </a:r>
+          </a:p>
+        </p:txBody>
+      </p:sp>
+      <p:sp>
+        <p:nvSpPr>
+          <p:cNvPr id="9" name="Rounded Rectangle 8"/>
+          <p:cNvSpPr/>
+          <p:nvPr/>
+        </p:nvSpPr>
+        <p:spPr>
+          <a:xfrm>
+            <a:off x="4335780" y="1691640"/>
+            <a:ext cx="3520440" cy="3657600"/>
+          </a:xfrm>
+          <a:prstGeom prst="roundRect">
+            <a:avLst>
+              <a:gd name="adj" fmla="val 8000"/>
+            </a:avLst>
+          </a:prstGeom>
+          <a:solidFill>
+            <a:srgbClr val="FFFFFF"/>
+          </a:solidFill>
+          <a:ln w="9525">
+            <a:solidFill>
+              <a:srgbClr val="E5E7EB"/>
+            </a:solidFill>
+          </a:ln>
+          <a:effectLst/>
+        </p:spPr>
+        <p:style>
+          <a:lnRef idx="1">
+            <a:schemeClr val="accent1"/>
+          </a:lnRef>
+          <a:fillRef idx="3">
+            <a:schemeClr val="accent1"/>
+          </a:fillRef>
+          <a:effectRef idx="2">
+            <a:schemeClr val="accent1"/>
+          </a:effectRef>
+          <a:fontRef idx="minor">
+            <a:schemeClr val="lt1"/>
+          </a:fontRef>
+        </p:style>
+        <p:txBody>
+          <a:bodyPr rtlCol="0" anchor="ctr"/>
+          <a:lstStyle/>
+          <a:p>
+            <a:pPr algn="ctr"/>
+          </a:p>
+        </p:txBody>
+      </p:sp>
+      <p:sp>
+        <p:nvSpPr>
+          <p:cNvPr id="10" name="Rounded Rectangle 9"/>
+          <p:cNvSpPr/>
+          <p:nvPr/>
+        </p:nvSpPr>
+        <p:spPr>
+          <a:xfrm>
+            <a:off x="4500372" y="1856232"/>
+            <a:ext cx="1005840" cy="274320"/>
+          </a:xfrm>
+          <a:prstGeom prst="roundRect">
+            <a:avLst>
+              <a:gd name="adj" fmla="val 50000"/>
+            </a:avLst>
+          </a:prstGeom>
+          <a:solidFill>
+            <a:srgbClr val="0F766E"/>
+          </a:solidFill>
+          <a:ln>
+            <a:noFill/>
+          </a:ln>
+        </p:spPr>
+        <p:style>
+          <a:lnRef idx="1">
+            <a:schemeClr val="accent1"/>
+          </a:lnRef>
+          <a:fillRef idx="3">
+            <a:schemeClr val="accent1"/>
+          </a:fillRef>
+          <a:effectRef idx="2">
+            <a:schemeClr val="accent1"/>
+          </a:effectRef>
+          <a:fontRef idx="minor">
+            <a:schemeClr val="lt1"/>
+          </a:fontRef>
+        </p:style>
+        <p:txBody>
+          <a:bodyPr rtlCol="0" anchor="ctr" lIns="73152" rIns="73152" tIns="18288" bIns="18288"/>
+          <a:lstStyle/>
+          <a:p>
+            <a:pPr algn="ctr"/>
+            <a:r>
+              <a:rPr sz="1100" b="1">
+                <a:solidFill>
+                  <a:srgbClr val="FFFFFF"/>
+                </a:solidFill>
+                <a:latin typeface="Helvetica Neue"/>
+              </a:rPr>
+              <a:t>badge</a:t>
+            </a:r>
+          </a:p>
+        </p:txBody>
+      </p:sp>
+      <p:sp>
+        <p:nvSpPr>
+          <p:cNvPr id="11" name="TextBox 10"/>
+          <p:cNvSpPr txBox="1"/>
+          <p:nvPr/>
+        </p:nvSpPr>
+        <p:spPr>
+          <a:xfrm>
+            <a:off x="4500372" y="2286000"/>
+            <a:ext cx="3191256" cy="457200"/>
+          </a:xfrm>
+          <a:prstGeom prst="rect">
+            <a:avLst/>
+          </a:prstGeom>
+          <a:noFill/>
+        </p:spPr>
+        <p:txBody>
+          <a:bodyPr wrap="square" lIns="0" rIns="0" tIns="0" bIns="0">
+            <a:spAutoFit/>
+          </a:bodyPr>
+          <a:lstStyle/>
+          <a:p>
+            <a:pPr algn="l"/>
+            <a:r>
+              <a:rPr sz="1600" b="1" i="0">
+                <a:solidFill>
+                  <a:srgbClr val="1E2A4A"/>
+                </a:solidFill>
+                <a:latin typeface="Helvetica Neue"/>
+              </a:rPr>
+              <a:t>Bottom-right badge</a:t>
+            </a:r>
+          </a:p>
+        </p:txBody>
+      </p:sp>
+      <p:sp>
+        <p:nvSpPr>
+          <p:cNvPr id="12" name="TextBox 11"/>
+          <p:cNvSpPr txBox="1"/>
+          <p:nvPr/>
+        </p:nvSpPr>
+        <p:spPr>
+          <a:xfrm>
+            <a:off x="4500372" y="2770632"/>
+            <a:ext cx="3191256" cy="2377440"/>
+          </a:xfrm>
+          <a:prstGeom prst="rect">
+            <a:avLst/>
+          </a:prstGeom>
+          <a:noFill/>
+        </p:spPr>
+        <p:txBody>
+          <a:bodyPr wrap="square" lIns="0" rIns="0" tIns="0" bIns="0">
+            <a:spAutoFit/>
+          </a:bodyPr>
+          <a:lstStyle/>
+          <a:p>
+            <a:pPr algn="l"/>
+            <a:r>
+              <a:rPr sz="1100" b="0" i="0">
+                <a:solidFill>
+                  <a:srgbClr val="1F2937"/>
+                </a:solidFill>
+                <a:latin typeface="Helvetica Neue"/>
+              </a:rPr>
+              <a:t>Click the badge → popup with checkboxes, emails, Select-all toggle, and an 'Email selected managers' mailto button.</a:t>
+            </a:r>
+          </a:p>
+        </p:txBody>
+      </p:sp>
+      <p:sp>
+        <p:nvSpPr>
+          <p:cNvPr id="13" name="Rounded Rectangle 12"/>
+          <p:cNvSpPr/>
+          <p:nvPr/>
+        </p:nvSpPr>
+        <p:spPr>
+          <a:xfrm>
+            <a:off x="7965948" y="1691640"/>
+            <a:ext cx="3520440" cy="3657600"/>
+          </a:xfrm>
+          <a:prstGeom prst="roundRect">
+            <a:avLst>
+              <a:gd name="adj" fmla="val 8000"/>
+            </a:avLst>
+          </a:prstGeom>
+          <a:solidFill>
+            <a:srgbClr val="FFFFFF"/>
+          </a:solidFill>
+          <a:ln w="9525">
+            <a:solidFill>
+              <a:srgbClr val="E5E7EB"/>
+            </a:solidFill>
+          </a:ln>
+          <a:effectLst/>
+        </p:spPr>
+        <p:style>
+          <a:lnRef idx="1">
+            <a:schemeClr val="accent1"/>
+          </a:lnRef>
+          <a:fillRef idx="3">
+            <a:schemeClr val="accent1"/>
+          </a:fillRef>
+          <a:effectRef idx="2">
+            <a:schemeClr val="accent1"/>
+          </a:effectRef>
+          <a:fontRef idx="minor">
+            <a:schemeClr val="lt1"/>
+          </a:fontRef>
+        </p:style>
+        <p:txBody>
+          <a:bodyPr rtlCol="0" anchor="ctr"/>
+          <a:lstStyle/>
+          <a:p>
+            <a:pPr algn="ctr"/>
+          </a:p>
+        </p:txBody>
+      </p:sp>
+      <p:sp>
+        <p:nvSpPr>
+          <p:cNvPr id="14" name="Rounded Rectangle 13"/>
+          <p:cNvSpPr/>
+          <p:nvPr/>
+        </p:nvSpPr>
+        <p:spPr>
+          <a:xfrm>
+            <a:off x="8130540" y="1856232"/>
+            <a:ext cx="1005840" cy="274320"/>
+          </a:xfrm>
+          <a:prstGeom prst="roundRect">
+            <a:avLst>
+              <a:gd name="adj" fmla="val 50000"/>
+            </a:avLst>
+          </a:prstGeom>
+          <a:solidFill>
+            <a:srgbClr val="B45309"/>
+          </a:solidFill>
+          <a:ln>
+            <a:noFill/>
+          </a:ln>
+        </p:spPr>
+        <p:style>
+          <a:lnRef idx="1">
+            <a:schemeClr val="accent1"/>
+          </a:lnRef>
+          <a:fillRef idx="3">
+            <a:schemeClr val="accent1"/>
+          </a:fillRef>
+          <a:effectRef idx="2">
+            <a:schemeClr val="accent1"/>
+          </a:effectRef>
+          <a:fontRef idx="minor">
+            <a:schemeClr val="lt1"/>
+          </a:fontRef>
+        </p:style>
+        <p:txBody>
+          <a:bodyPr rtlCol="0" anchor="ctr" lIns="73152" rIns="73152" tIns="18288" bIns="18288"/>
+          <a:lstStyle/>
+          <a:p>
+            <a:pPr algn="ctr"/>
+            <a:r>
+              <a:rPr sz="1100" b="1">
+                <a:solidFill>
+                  <a:srgbClr val="FFFFFF"/>
+                </a:solidFill>
+                <a:latin typeface="Helvetica Neue"/>
+              </a:rPr>
+              <a:t>edit</a:t>
+            </a:r>
+          </a:p>
+        </p:txBody>
+      </p:sp>
+      <p:sp>
+        <p:nvSpPr>
+          <p:cNvPr id="15" name="TextBox 14"/>
+          <p:cNvSpPr txBox="1"/>
+          <p:nvPr/>
+        </p:nvSpPr>
+        <p:spPr>
+          <a:xfrm>
+            <a:off x="8130540" y="2286000"/>
+            <a:ext cx="3191256" cy="457200"/>
+          </a:xfrm>
+          <a:prstGeom prst="rect">
+            <a:avLst/>
+          </a:prstGeom>
+          <a:noFill/>
+        </p:spPr>
+        <p:txBody>
+          <a:bodyPr wrap="square" lIns="0" rIns="0" tIns="0" bIns="0">
+            <a:spAutoFit/>
+          </a:bodyPr>
+          <a:lstStyle/>
+          <a:p>
+            <a:pPr algn="l"/>
+            <a:r>
+              <a:rPr sz="1600" b="1" i="0">
+                <a:solidFill>
+                  <a:srgbClr val="1E2A4A"/>
+                </a:solidFill>
+                <a:latin typeface="Helvetica Neue"/>
+              </a:rPr>
+              <a:t>Admin-gated edit</a:t>
+            </a:r>
+          </a:p>
+        </p:txBody>
+      </p:sp>
+      <p:sp>
+        <p:nvSpPr>
+          <p:cNvPr id="16" name="TextBox 15"/>
+          <p:cNvSpPr txBox="1"/>
+          <p:nvPr/>
+        </p:nvSpPr>
+        <p:spPr>
+          <a:xfrm>
+            <a:off x="8130540" y="2770632"/>
+            <a:ext cx="3191256" cy="2377440"/>
+          </a:xfrm>
+          <a:prstGeom prst="rect">
+            <a:avLst/>
+          </a:prstGeom>
+          <a:noFill/>
+        </p:spPr>
+        <p:txBody>
+          <a:bodyPr wrap="square" lIns="0" rIns="0" tIns="0" bIns="0">
+            <a:spAutoFit/>
+          </a:bodyPr>
+          <a:lstStyle/>
+          <a:p>
+            <a:pPr algn="l"/>
+            <a:r>
+              <a:rPr sz="1100" b="0" i="0">
+                <a:solidFill>
+                  <a:srgbClr val="1F2937"/>
+                </a:solidFill>
+                <a:latin typeface="Helvetica Neue"/>
+              </a:rPr>
+              <a:t>An ✎ button appears only after admin unlock; the editor adds/removes name + email rows.</a:t>
+            </a:r>
+          </a:p>
+        </p:txBody>
+      </p:sp>
+      <p:sp>
+        <p:nvSpPr>
+          <p:cNvPr id="17" name="TextBox 16"/>
+          <p:cNvSpPr txBox="1"/>
+          <p:nvPr/>
+        </p:nvSpPr>
+        <p:spPr>
+          <a:xfrm>
+            <a:off x="640080" y="5897880"/>
+            <a:ext cx="10515600" cy="365760"/>
+          </a:xfrm>
+          <a:prstGeom prst="rect">
+            <a:avLst/>
+          </a:prstGeom>
+          <a:noFill/>
+        </p:spPr>
+        <p:txBody>
+          <a:bodyPr wrap="square" lIns="0" rIns="0" tIns="0" bIns="0">
+            <a:spAutoFit/>
+          </a:bodyPr>
+          <a:lstStyle/>
+          <a:p>
+            <a:pPr algn="l"/>
+            <a:r>
+              <a:rPr sz="1100" b="0" i="1">
+                <a:solidFill>
+                  <a:srgbClr val="6B7280"/>
+                </a:solidFill>
+                <a:latin typeface="Helvetica Neue"/>
+              </a:rPr>
+              <a:t>API: update-managers (PIN-required). UI: buildManagerBadge, openManagerPopover, openManagerEditor.</a:t>
+            </a:r>
+          </a:p>
+        </p:txBody>
+      </p:sp>
+    </p:spTree>
+  </p:cSld>
+  <p:clrMapOvr>
+    <a:masterClrMapping/>
+  </p:clrMapOvr>
+</p:sld>
+</file>
+
+<file path=ppt/slides/slide21.xml><?xml version="1.0" encoding="utf-8"?>
+<p:sld xmlns:a="http://schemas.openxmlformats.org/drawingml/2006/main" xmlns:p="http://schemas.openxmlformats.org/presentationml/2006/main" xmlns:r="http://schemas.openxmlformats.org/officeDocument/2006/relationships">
+  <p:cSld>
+    <p:spTree>
+      <p:nvGrpSpPr>
+        <p:cNvPr id="1" name=""/>
+        <p:cNvGrpSpPr/>
+        <p:nvPr/>
+      </p:nvGrpSpPr>
+      <p:grpSpPr/>
+      <p:sp>
+        <p:nvSpPr>
+          <p:cNvPr id="2" name="Rectangle 1"/>
+          <p:cNvSpPr/>
+          <p:nvPr/>
+        </p:nvSpPr>
+        <p:spPr>
+          <a:xfrm>
+            <a:off x="457200" y="457200"/>
+            <a:ext cx="54864" cy="777240"/>
+          </a:xfrm>
+          <a:prstGeom prst="rect">
+            <a:avLst/>
+          </a:prstGeom>
+          <a:solidFill>
+            <a:srgbClr val="0F766E"/>
+          </a:solidFill>
+          <a:ln>
+            <a:noFill/>
+          </a:ln>
+        </p:spPr>
+        <p:style>
+          <a:lnRef idx="1">
+            <a:schemeClr val="accent1"/>
+          </a:lnRef>
+          <a:fillRef idx="3">
+            <a:schemeClr val="accent1"/>
+          </a:fillRef>
+          <a:effectRef idx="2">
+            <a:schemeClr val="accent1"/>
+          </a:effectRef>
+          <a:fontRef idx="minor">
+            <a:schemeClr val="lt1"/>
+          </a:fontRef>
+        </p:style>
+        <p:txBody>
+          <a:bodyPr rtlCol="0" anchor="ctr"/>
+          <a:lstStyle/>
+          <a:p>
+            <a:pPr algn="ctr"/>
+          </a:p>
+        </p:txBody>
+      </p:sp>
+      <p:sp>
+        <p:nvSpPr>
+          <p:cNvPr id="3" name="TextBox 2"/>
+          <p:cNvSpPr txBox="1"/>
+          <p:nvPr/>
+        </p:nvSpPr>
+        <p:spPr>
+          <a:xfrm>
+            <a:off x="640080" y="411480"/>
+            <a:ext cx="10058400" cy="292608"/>
+          </a:xfrm>
+          <a:prstGeom prst="rect">
+            <a:avLst/>
+          </a:prstGeom>
+          <a:noFill/>
+        </p:spPr>
+        <p:txBody>
+          <a:bodyPr wrap="square" lIns="0" rIns="0" tIns="0" bIns="0">
+            <a:spAutoFit/>
+          </a:bodyPr>
+          <a:lstStyle/>
+          <a:p>
+            <a:pPr algn="l"/>
+            <a:r>
+              <a:rPr sz="1100" b="1" i="0">
+                <a:solidFill>
+                  <a:srgbClr val="0F766E"/>
+                </a:solidFill>
+                <a:latin typeface="Helvetica Neue"/>
+              </a:rPr>
+              <a:t>03 · Governance</a:t>
+            </a:r>
+          </a:p>
+        </p:txBody>
+      </p:sp>
+      <p:sp>
+        <p:nvSpPr>
+          <p:cNvPr id="4" name="TextBox 3"/>
+          <p:cNvSpPr txBox="1"/>
+          <p:nvPr/>
+        </p:nvSpPr>
+        <p:spPr>
+          <a:xfrm>
+            <a:off x="640080" y="685800"/>
+            <a:ext cx="10058400" cy="640080"/>
+          </a:xfrm>
+          <a:prstGeom prst="rect">
+            <a:avLst/>
+          </a:prstGeom>
+          <a:noFill/>
+        </p:spPr>
+        <p:txBody>
+          <a:bodyPr wrap="square" lIns="0" rIns="0" tIns="0" bIns="0">
+            <a:spAutoFit/>
+          </a:bodyPr>
+          <a:lstStyle/>
+          <a:p>
+            <a:pPr algn="l"/>
+            <a:r>
+              <a:rPr sz="2800" b="1" i="0">
+                <a:solidFill>
+                  <a:srgbClr val="1E2A4A"/>
+                </a:solidFill>
+                <a:latin typeface="Helvetica Neue"/>
+              </a:rPr>
+              <a:t>Admin mode (PIN-protected) with email recovery</a:t>
+            </a:r>
+          </a:p>
+        </p:txBody>
+      </p:sp>
+      <p:sp>
+        <p:nvSpPr>
+          <p:cNvPr id="5" name="Rounded Rectangle 4"/>
+          <p:cNvSpPr/>
+          <p:nvPr/>
+        </p:nvSpPr>
+        <p:spPr>
+          <a:xfrm>
+            <a:off x="640080" y="1554480"/>
+            <a:ext cx="10515600" cy="731520"/>
+          </a:xfrm>
+          <a:prstGeom prst="roundRect">
+            <a:avLst>
+              <a:gd name="adj" fmla="val 8000"/>
+            </a:avLst>
+          </a:prstGeom>
+          <a:solidFill>
+            <a:srgbClr val="F9FAFB"/>
+          </a:solidFill>
+          <a:ln w="9525">
+            <a:solidFill>
+              <a:srgbClr val="E5E7EB"/>
+            </a:solidFill>
+          </a:ln>
+          <a:effectLst/>
+        </p:spPr>
+        <p:style>
+          <a:lnRef idx="1">
+            <a:schemeClr val="accent1"/>
+          </a:lnRef>
+          <a:fillRef idx="3">
+            <a:schemeClr val="accent1"/>
+          </a:fillRef>
+          <a:effectRef idx="2">
+            <a:schemeClr val="accent1"/>
+          </a:effectRef>
+          <a:fontRef idx="minor">
+            <a:schemeClr val="lt1"/>
+          </a:fontRef>
+        </p:style>
+        <p:txBody>
+          <a:bodyPr rtlCol="0" anchor="ctr"/>
+          <a:lstStyle/>
+          <a:p>
+            <a:pPr algn="ctr"/>
+          </a:p>
+        </p:txBody>
+      </p:sp>
+      <p:sp>
+        <p:nvSpPr>
+          <p:cNvPr id="6" name="TextBox 5"/>
+          <p:cNvSpPr txBox="1"/>
+          <p:nvPr/>
+        </p:nvSpPr>
+        <p:spPr>
+          <a:xfrm>
+            <a:off x="868680" y="1634480"/>
+            <a:ext cx="3657600" cy="365760"/>
+          </a:xfrm>
+          <a:prstGeom prst="rect">
+            <a:avLst/>
+          </a:prstGeom>
+          <a:noFill/>
+        </p:spPr>
+        <p:txBody>
+          <a:bodyPr wrap="square" lIns="0" rIns="0" tIns="0" bIns="0">
+            <a:spAutoFit/>
+          </a:bodyPr>
+          <a:lstStyle/>
+          <a:p>
+            <a:pPr algn="l"/>
+            <a:r>
+              <a:rPr sz="1500" b="1" i="0">
+                <a:solidFill>
+                  <a:srgbClr val="115E59"/>
+                </a:solidFill>
+                <a:latin typeface="Helvetica Neue"/>
+              </a:rPr>
+              <a:t>Setup</a:t>
+            </a:r>
+          </a:p>
+        </p:txBody>
+      </p:sp>
+      <p:sp>
+        <p:nvSpPr>
+          <p:cNvPr id="7" name="TextBox 6"/>
+          <p:cNvSpPr txBox="1"/>
+          <p:nvPr/>
+        </p:nvSpPr>
+        <p:spPr>
+          <a:xfrm>
+            <a:off x="4572000" y="1634480"/>
+            <a:ext cx="6492240" cy="640080"/>
+          </a:xfrm>
+          <a:prstGeom prst="rect">
+            <a:avLst/>
+          </a:prstGeom>
+          <a:noFill/>
+        </p:spPr>
+        <p:txBody>
+          <a:bodyPr wrap="square" lIns="0" rIns="0" tIns="0" bIns="0">
+            <a:spAutoFit/>
+          </a:bodyPr>
+          <a:lstStyle/>
+          <a:p>
+            <a:pPr algn="l"/>
+            <a:r>
+              <a:rPr sz="1300" b="0" i="0">
+                <a:solidFill>
+                  <a:srgbClr val="1F2937"/>
+                </a:solidFill>
+                <a:latin typeface="Helvetica Neue"/>
+              </a:rPr>
+              <a:t>First click of the toggle: choose a 4–8 digit PIN + a recovery email.</a:t>
+            </a:r>
+          </a:p>
+        </p:txBody>
+      </p:sp>
+      <p:sp>
+        <p:nvSpPr>
+          <p:cNvPr id="8" name="Rounded Rectangle 7"/>
+          <p:cNvSpPr/>
+          <p:nvPr/>
+        </p:nvSpPr>
+        <p:spPr>
+          <a:xfrm>
+            <a:off x="640080" y="2423160"/>
+            <a:ext cx="10515600" cy="731520"/>
+          </a:xfrm>
+          <a:prstGeom prst="roundRect">
+            <a:avLst>
+              <a:gd name="adj" fmla="val 8000"/>
+            </a:avLst>
+          </a:prstGeom>
+          <a:solidFill>
+            <a:srgbClr val="F9FAFB"/>
+          </a:solidFill>
+          <a:ln w="9525">
+            <a:solidFill>
+              <a:srgbClr val="E5E7EB"/>
+            </a:solidFill>
+          </a:ln>
+          <a:effectLst/>
+        </p:spPr>
+        <p:style>
+          <a:lnRef idx="1">
+            <a:schemeClr val="accent1"/>
+          </a:lnRef>
+          <a:fillRef idx="3">
+            <a:schemeClr val="accent1"/>
+          </a:fillRef>
+          <a:effectRef idx="2">
+            <a:schemeClr val="accent1"/>
+          </a:effectRef>
+          <a:fontRef idx="minor">
+            <a:schemeClr val="lt1"/>
+          </a:fontRef>
+        </p:style>
+        <p:txBody>
+          <a:bodyPr rtlCol="0" anchor="ctr"/>
+          <a:lstStyle/>
+          <a:p>
+            <a:pPr algn="ctr"/>
+          </a:p>
+        </p:txBody>
+      </p:sp>
+      <p:sp>
+        <p:nvSpPr>
+          <p:cNvPr id="9" name="TextBox 8"/>
+          <p:cNvSpPr txBox="1"/>
+          <p:nvPr/>
+        </p:nvSpPr>
+        <p:spPr>
+          <a:xfrm>
+            <a:off x="868680" y="2503160"/>
+            <a:ext cx="3657600" cy="365760"/>
+          </a:xfrm>
+          <a:prstGeom prst="rect">
+            <a:avLst/>
+          </a:prstGeom>
+          <a:noFill/>
+        </p:spPr>
+        <p:txBody>
+          <a:bodyPr wrap="square" lIns="0" rIns="0" tIns="0" bIns="0">
+            <a:spAutoFit/>
+          </a:bodyPr>
+          <a:lstStyle/>
+          <a:p>
+            <a:pPr algn="l"/>
+            <a:r>
+              <a:rPr sz="1500" b="1" i="0">
+                <a:solidFill>
+                  <a:srgbClr val="115E59"/>
+                </a:solidFill>
+                <a:latin typeface="Helvetica Neue"/>
+              </a:rPr>
+              <a:t>Unlock</a:t>
+            </a:r>
+          </a:p>
+        </p:txBody>
+      </p:sp>
+      <p:sp>
+        <p:nvSpPr>
+          <p:cNvPr id="10" name="TextBox 9"/>
+          <p:cNvSpPr txBox="1"/>
+          <p:nvPr/>
+        </p:nvSpPr>
+        <p:spPr>
+          <a:xfrm>
+            <a:off x="4572000" y="2503160"/>
+            <a:ext cx="6492240" cy="640080"/>
+          </a:xfrm>
+          <a:prstGeom prst="rect">
+            <a:avLst/>
+          </a:prstGeom>
+          <a:noFill/>
+        </p:spPr>
+        <p:txBody>
+          <a:bodyPr wrap="square" lIns="0" rIns="0" tIns="0" bIns="0">
+            <a:spAutoFit/>
+          </a:bodyPr>
+          <a:lstStyle/>
+          <a:p>
+            <a:pPr algn="l"/>
+            <a:r>
+              <a:rPr sz="1300" b="0" i="0">
+                <a:solidFill>
+                  <a:srgbClr val="1F2937"/>
+                </a:solidFill>
+                <a:latin typeface="Helvetica Neue"/>
+              </a:rPr>
+              <a:t>Subsequent clicks: enter PIN → session-scoped admin mode (locks when tab closes).</a:t>
+            </a:r>
+          </a:p>
+        </p:txBody>
+      </p:sp>
+      <p:sp>
+        <p:nvSpPr>
+          <p:cNvPr id="11" name="Rounded Rectangle 10"/>
+          <p:cNvSpPr/>
+          <p:nvPr/>
+        </p:nvSpPr>
+        <p:spPr>
+          <a:xfrm>
+            <a:off x="640080" y="3291840"/>
+            <a:ext cx="10515600" cy="731520"/>
+          </a:xfrm>
+          <a:prstGeom prst="roundRect">
+            <a:avLst>
+              <a:gd name="adj" fmla="val 8000"/>
+            </a:avLst>
+          </a:prstGeom>
+          <a:solidFill>
+            <a:srgbClr val="F9FAFB"/>
+          </a:solidFill>
+          <a:ln w="9525">
+            <a:solidFill>
+              <a:srgbClr val="E5E7EB"/>
+            </a:solidFill>
+          </a:ln>
+          <a:effectLst/>
+        </p:spPr>
+        <p:style>
+          <a:lnRef idx="1">
+            <a:schemeClr val="accent1"/>
+          </a:lnRef>
+          <a:fillRef idx="3">
+            <a:schemeClr val="accent1"/>
+          </a:fillRef>
+          <a:effectRef idx="2">
+            <a:schemeClr val="accent1"/>
+          </a:effectRef>
+          <a:fontRef idx="minor">
+            <a:schemeClr val="lt1"/>
+          </a:fontRef>
+        </p:style>
+        <p:txBody>
+          <a:bodyPr rtlCol="0" anchor="ctr"/>
+          <a:lstStyle/>
+          <a:p>
+            <a:pPr algn="ctr"/>
+          </a:p>
+        </p:txBody>
+      </p:sp>
+      <p:sp>
+        <p:nvSpPr>
+          <p:cNvPr id="12" name="TextBox 11"/>
+          <p:cNvSpPr txBox="1"/>
+          <p:nvPr/>
+        </p:nvSpPr>
+        <p:spPr>
+          <a:xfrm>
+            <a:off x="868680" y="3371840"/>
+            <a:ext cx="3657600" cy="365760"/>
+          </a:xfrm>
+          <a:prstGeom prst="rect">
+            <a:avLst/>
+          </a:prstGeom>
+          <a:noFill/>
+        </p:spPr>
+        <p:txBody>
+          <a:bodyPr wrap="square" lIns="0" rIns="0" tIns="0" bIns="0">
+            <a:spAutoFit/>
+          </a:bodyPr>
+          <a:lstStyle/>
+          <a:p>
+            <a:pPr algn="l"/>
+            <a:r>
+              <a:rPr sz="1500" b="1" i="0">
+                <a:solidFill>
+                  <a:srgbClr val="115E59"/>
+                </a:solidFill>
+                <a:latin typeface="Helvetica Neue"/>
+              </a:rPr>
+              <a:t>Forgot PIN</a:t>
+            </a:r>
+          </a:p>
+        </p:txBody>
+      </p:sp>
+      <p:sp>
+        <p:nvSpPr>
+          <p:cNvPr id="13" name="TextBox 12"/>
+          <p:cNvSpPr txBox="1"/>
+          <p:nvPr/>
+        </p:nvSpPr>
+        <p:spPr>
+          <a:xfrm>
+            <a:off x="4572000" y="3371840"/>
+            <a:ext cx="6492240" cy="640080"/>
+          </a:xfrm>
+          <a:prstGeom prst="rect">
+            <a:avLst/>
+          </a:prstGeom>
+          <a:noFill/>
+        </p:spPr>
+        <p:txBody>
+          <a:bodyPr wrap="square" lIns="0" rIns="0" tIns="0" bIns="0">
+            <a:spAutoFit/>
+          </a:bodyPr>
+          <a:lstStyle/>
+          <a:p>
+            <a:pPr algn="l"/>
+            <a:r>
+              <a:rPr sz="1300" b="0" i="0">
+                <a:solidFill>
+                  <a:srgbClr val="1F2937"/>
+                </a:solidFill>
+                <a:latin typeface="Helvetica Neue"/>
+              </a:rPr>
+              <a:t>Confirm recovery email → 6-digit code emailed (or printed to terminal) → enter code + new PIN.</a:t>
+            </a:r>
+          </a:p>
+        </p:txBody>
+      </p:sp>
+      <p:sp>
+        <p:nvSpPr>
+          <p:cNvPr id="14" name="Rounded Rectangle 13"/>
+          <p:cNvSpPr/>
+          <p:nvPr/>
+        </p:nvSpPr>
+        <p:spPr>
+          <a:xfrm>
+            <a:off x="640080" y="4160520"/>
+            <a:ext cx="10515600" cy="731520"/>
+          </a:xfrm>
+          <a:prstGeom prst="roundRect">
+            <a:avLst>
+              <a:gd name="adj" fmla="val 8000"/>
+            </a:avLst>
+          </a:prstGeom>
+          <a:solidFill>
+            <a:srgbClr val="F9FAFB"/>
+          </a:solidFill>
+          <a:ln w="9525">
+            <a:solidFill>
+              <a:srgbClr val="E5E7EB"/>
+            </a:solidFill>
+          </a:ln>
+          <a:effectLst/>
+        </p:spPr>
+        <p:style>
+          <a:lnRef idx="1">
+            <a:schemeClr val="accent1"/>
+          </a:lnRef>
+          <a:fillRef idx="3">
+            <a:schemeClr val="accent1"/>
+          </a:fillRef>
+          <a:effectRef idx="2">
+            <a:schemeClr val="accent1"/>
+          </a:effectRef>
+          <a:fontRef idx="minor">
+            <a:schemeClr val="lt1"/>
+          </a:fontRef>
+        </p:style>
+        <p:txBody>
+          <a:bodyPr rtlCol="0" anchor="ctr"/>
+          <a:lstStyle/>
+          <a:p>
+            <a:pPr algn="ctr"/>
+          </a:p>
+        </p:txBody>
+      </p:sp>
+      <p:sp>
+        <p:nvSpPr>
+          <p:cNvPr id="15" name="TextBox 14"/>
+          <p:cNvSpPr txBox="1"/>
+          <p:nvPr/>
+        </p:nvSpPr>
+        <p:spPr>
+          <a:xfrm>
+            <a:off x="868680" y="4240520"/>
+            <a:ext cx="3657600" cy="365760"/>
+          </a:xfrm>
+          <a:prstGeom prst="rect">
+            <a:avLst/>
+          </a:prstGeom>
+          <a:noFill/>
+        </p:spPr>
+        <p:txBody>
+          <a:bodyPr wrap="square" lIns="0" rIns="0" tIns="0" bIns="0">
+            <a:spAutoFit/>
+          </a:bodyPr>
+          <a:lstStyle/>
+          <a:p>
+            <a:pPr algn="l"/>
+            <a:r>
+              <a:rPr sz="1500" b="1" i="0">
+                <a:solidFill>
+                  <a:srgbClr val="115E59"/>
+                </a:solidFill>
+                <a:latin typeface="Helvetica Neue"/>
+              </a:rPr>
+              <a:t>Hash</a:t>
+            </a:r>
+          </a:p>
+        </p:txBody>
+      </p:sp>
+      <p:sp>
+        <p:nvSpPr>
+          <p:cNvPr id="16" name="TextBox 15"/>
+          <p:cNvSpPr txBox="1"/>
+          <p:nvPr/>
+        </p:nvSpPr>
+        <p:spPr>
+          <a:xfrm>
+            <a:off x="4572000" y="4240520"/>
+            <a:ext cx="6492240" cy="640080"/>
+          </a:xfrm>
+          <a:prstGeom prst="rect">
+            <a:avLst/>
+          </a:prstGeom>
+          <a:noFill/>
+        </p:spPr>
+        <p:txBody>
+          <a:bodyPr wrap="square" lIns="0" rIns="0" tIns="0" bIns="0">
+            <a:spAutoFit/>
+          </a:bodyPr>
+          <a:lstStyle/>
+          <a:p>
+            <a:pPr algn="l"/>
+            <a:r>
+              <a:rPr sz="1300" b="0" i="0">
+                <a:solidFill>
+                  <a:srgbClr val="1F2937"/>
+                </a:solidFill>
+                <a:latin typeface="Helvetica Neue"/>
+              </a:rPr>
+              <a:t>PBKDF2-HMAC-SHA256 with 200,000 iterations + per-install salt.</a:t>
+            </a:r>
+          </a:p>
+        </p:txBody>
+      </p:sp>
+      <p:sp>
+        <p:nvSpPr>
+          <p:cNvPr id="17" name="Rounded Rectangle 16"/>
+          <p:cNvSpPr/>
+          <p:nvPr/>
+        </p:nvSpPr>
+        <p:spPr>
+          <a:xfrm>
+            <a:off x="640080" y="5029200"/>
+            <a:ext cx="10515600" cy="731520"/>
+          </a:xfrm>
+          <a:prstGeom prst="roundRect">
+            <a:avLst>
+              <a:gd name="adj" fmla="val 8000"/>
+            </a:avLst>
+          </a:prstGeom>
+          <a:solidFill>
+            <a:srgbClr val="F9FAFB"/>
+          </a:solidFill>
+          <a:ln w="9525">
+            <a:solidFill>
+              <a:srgbClr val="E5E7EB"/>
+            </a:solidFill>
+          </a:ln>
+          <a:effectLst/>
+        </p:spPr>
+        <p:style>
+          <a:lnRef idx="1">
+            <a:schemeClr val="accent1"/>
+          </a:lnRef>
+          <a:fillRef idx="3">
+            <a:schemeClr val="accent1"/>
+          </a:fillRef>
+          <a:effectRef idx="2">
+            <a:schemeClr val="accent1"/>
+          </a:effectRef>
+          <a:fontRef idx="minor">
+            <a:schemeClr val="lt1"/>
+          </a:fontRef>
+        </p:style>
+        <p:txBody>
+          <a:bodyPr rtlCol="0" anchor="ctr"/>
+          <a:lstStyle/>
+          <a:p>
+            <a:pPr algn="ctr"/>
+          </a:p>
+        </p:txBody>
+      </p:sp>
+      <p:sp>
+        <p:nvSpPr>
+          <p:cNvPr id="18" name="TextBox 17"/>
+          <p:cNvSpPr txBox="1"/>
+          <p:nvPr/>
+        </p:nvSpPr>
+        <p:spPr>
+          <a:xfrm>
+            <a:off x="868680" y="5109200"/>
+            <a:ext cx="3657600" cy="365760"/>
+          </a:xfrm>
+          <a:prstGeom prst="rect">
+            <a:avLst/>
+          </a:prstGeom>
+          <a:noFill/>
+        </p:spPr>
+        <p:txBody>
+          <a:bodyPr wrap="square" lIns="0" rIns="0" tIns="0" bIns="0">
+            <a:spAutoFit/>
+          </a:bodyPr>
+          <a:lstStyle/>
+          <a:p>
+            <a:pPr algn="l"/>
+            <a:r>
+              <a:rPr sz="1500" b="1" i="0">
+                <a:solidFill>
+                  <a:srgbClr val="115E59"/>
+                </a:solidFill>
+                <a:latin typeface="Helvetica Neue"/>
+              </a:rPr>
+              <a:t>Storage</a:t>
+            </a:r>
+          </a:p>
+        </p:txBody>
+      </p:sp>
+      <p:sp>
+        <p:nvSpPr>
+          <p:cNvPr id="19" name="TextBox 18"/>
+          <p:cNvSpPr txBox="1"/>
+          <p:nvPr/>
+        </p:nvSpPr>
+        <p:spPr>
+          <a:xfrm>
+            <a:off x="4572000" y="5109200"/>
+            <a:ext cx="6492240" cy="640080"/>
+          </a:xfrm>
+          <a:prstGeom prst="rect">
+            <a:avLst/>
+          </a:prstGeom>
+          <a:noFill/>
+        </p:spPr>
+        <p:txBody>
+          <a:bodyPr wrap="square" lIns="0" rIns="0" tIns="0" bIns="0">
+            <a:spAutoFit/>
+          </a:bodyPr>
+          <a:lstStyle/>
+          <a:p>
+            <a:pPr algn="l"/>
+            <a:r>
+              <a:rPr sz="1300" b="0" i="0">
+                <a:solidFill>
+                  <a:srgbClr val="1F2937"/>
+                </a:solidFill>
+                <a:latin typeface="Helvetica Neue"/>
+              </a:rPr>
+              <a:t>_system/admin/admin_config.json (gitignored, mode 0600). Server binds 127.0.0.1 only.</a:t>
+            </a:r>
+          </a:p>
+        </p:txBody>
+      </p:sp>
+      <p:sp>
+        <p:nvSpPr>
+          <p:cNvPr id="20" name="TextBox 19"/>
+          <p:cNvSpPr txBox="1"/>
+          <p:nvPr/>
+        </p:nvSpPr>
+        <p:spPr>
+          <a:xfrm>
+            <a:off x="640080" y="5943600"/>
+            <a:ext cx="10515600" cy="365760"/>
+          </a:xfrm>
+          <a:prstGeom prst="rect">
+            <a:avLst/>
+          </a:prstGeom>
+          <a:noFill/>
+        </p:spPr>
+        <p:txBody>
+          <a:bodyPr wrap="square" lIns="0" rIns="0" tIns="0" bIns="0">
+            <a:spAutoFit/>
+          </a:bodyPr>
+          <a:lstStyle/>
+          <a:p>
+            <a:pPr algn="l"/>
+            <a:r>
+              <a:rPr sz="1100" b="0" i="1">
+                <a:solidFill>
+                  <a:srgbClr val="6B7280"/>
+                </a:solidFill>
+                <a:latin typeface="Helvetica Neue"/>
+              </a:rPr>
+              <a:t>SMTP env vars: DASHBOARD_SMTP_HOST / _PORT / _USER / _PASSWORD / _FROM (Gmail needs App Password).</a:t>
+            </a:r>
+          </a:p>
+        </p:txBody>
+      </p:sp>
+    </p:spTree>
+  </p:cSld>
+  <p:clrMapOvr>
+    <a:masterClrMapping/>
+  </p:clrMapOvr>
+</p:sld>
+</file>
+
+<file path=ppt/slides/slide22.xml><?xml version="1.0" encoding="utf-8"?>
+<p:sld xmlns:a="http://schemas.openxmlformats.org/drawingml/2006/main" xmlns:p="http://schemas.openxmlformats.org/presentationml/2006/main" xmlns:r="http://schemas.openxmlformats.org/officeDocument/2006/relationships">
+  <p:cSld>
+    <p:spTree>
+      <p:nvGrpSpPr>
+        <p:cNvPr id="1" name=""/>
+        <p:cNvGrpSpPr/>
+        <p:nvPr/>
+      </p:nvGrpSpPr>
+      <p:grpSpPr/>
+      <p:sp>
+        <p:nvSpPr>
+          <p:cNvPr id="2" name="Rectangle 1"/>
+          <p:cNvSpPr/>
+          <p:nvPr/>
+        </p:nvSpPr>
+        <p:spPr>
+          <a:xfrm>
+            <a:off x="457200" y="457200"/>
+            <a:ext cx="54864" cy="777240"/>
+          </a:xfrm>
+          <a:prstGeom prst="rect">
+            <a:avLst/>
+          </a:prstGeom>
+          <a:solidFill>
+            <a:srgbClr val="0F766E"/>
+          </a:solidFill>
+          <a:ln>
+            <a:noFill/>
+          </a:ln>
+        </p:spPr>
+        <p:style>
+          <a:lnRef idx="1">
+            <a:schemeClr val="accent1"/>
+          </a:lnRef>
+          <a:fillRef idx="3">
+            <a:schemeClr val="accent1"/>
+          </a:fillRef>
+          <a:effectRef idx="2">
+            <a:schemeClr val="accent1"/>
+          </a:effectRef>
+          <a:fontRef idx="minor">
+            <a:schemeClr val="lt1"/>
+          </a:fontRef>
+        </p:style>
+        <p:txBody>
+          <a:bodyPr rtlCol="0" anchor="ctr"/>
+          <a:lstStyle/>
+          <a:p>
+            <a:pPr algn="ctr"/>
+          </a:p>
+        </p:txBody>
+      </p:sp>
+      <p:sp>
+        <p:nvSpPr>
+          <p:cNvPr id="3" name="TextBox 2"/>
+          <p:cNvSpPr txBox="1"/>
+          <p:nvPr/>
+        </p:nvSpPr>
+        <p:spPr>
+          <a:xfrm>
+            <a:off x="640080" y="411480"/>
+            <a:ext cx="10058400" cy="292608"/>
+          </a:xfrm>
+          <a:prstGeom prst="rect">
+            <a:avLst/>
+          </a:prstGeom>
+          <a:noFill/>
+        </p:spPr>
+        <p:txBody>
+          <a:bodyPr wrap="square" lIns="0" rIns="0" tIns="0" bIns="0">
+            <a:spAutoFit/>
+          </a:bodyPr>
+          <a:lstStyle/>
+          <a:p>
+            <a:pPr algn="l"/>
+            <a:r>
+              <a:rPr sz="1100" b="1" i="0">
+                <a:solidFill>
+                  <a:srgbClr val="0F766E"/>
+                </a:solidFill>
+                <a:latin typeface="Helvetica Neue"/>
+              </a:rPr>
+              <a:t>04 · Drill-down</a:t>
+            </a:r>
+          </a:p>
+        </p:txBody>
+      </p:sp>
+      <p:sp>
+        <p:nvSpPr>
+          <p:cNvPr id="4" name="TextBox 3"/>
+          <p:cNvSpPr txBox="1"/>
+          <p:nvPr/>
+        </p:nvSpPr>
+        <p:spPr>
+          <a:xfrm>
+            <a:off x="640080" y="685800"/>
+            <a:ext cx="10058400" cy="640080"/>
+          </a:xfrm>
+          <a:prstGeom prst="rect">
+            <a:avLst/>
+          </a:prstGeom>
+          <a:noFill/>
+        </p:spPr>
+        <p:txBody>
+          <a:bodyPr wrap="square" lIns="0" rIns="0" tIns="0" bIns="0">
+            <a:spAutoFit/>
+          </a:bodyPr>
+          <a:lstStyle/>
+          <a:p>
+            <a:pPr algn="l"/>
+            <a:r>
+              <a:rPr sz="2800" b="1" i="0">
+                <a:solidFill>
+                  <a:srgbClr val="1E2A4A"/>
+                </a:solidFill>
+                <a:latin typeface="Helvetica Neue"/>
+              </a:rPr>
+              <a:t>Count-chip file list popup</a:t>
+            </a:r>
+          </a:p>
+        </p:txBody>
+      </p:sp>
+      <p:sp>
+        <p:nvSpPr>
+          <p:cNvPr id="5" name="Rounded Rectangle 4"/>
+          <p:cNvSpPr/>
+          <p:nvPr/>
+        </p:nvSpPr>
+        <p:spPr>
+          <a:xfrm>
+            <a:off x="640080" y="1554480"/>
+            <a:ext cx="10515600" cy="731520"/>
+          </a:xfrm>
+          <a:prstGeom prst="roundRect">
+            <a:avLst>
+              <a:gd name="adj" fmla="val 8000"/>
+            </a:avLst>
+          </a:prstGeom>
+          <a:solidFill>
+            <a:srgbClr val="F9FAFB"/>
+          </a:solidFill>
+          <a:ln w="9525">
+            <a:solidFill>
+              <a:srgbClr val="E5E7EB"/>
+            </a:solidFill>
+          </a:ln>
+          <a:effectLst/>
+        </p:spPr>
+        <p:style>
+          <a:lnRef idx="1">
+            <a:schemeClr val="accent1"/>
+          </a:lnRef>
+          <a:fillRef idx="3">
+            <a:schemeClr val="accent1"/>
+          </a:fillRef>
+          <a:effectRef idx="2">
+            <a:schemeClr val="accent1"/>
+          </a:effectRef>
+          <a:fontRef idx="minor">
+            <a:schemeClr val="lt1"/>
+          </a:fontRef>
+        </p:style>
+        <p:txBody>
+          <a:bodyPr rtlCol="0" anchor="ctr"/>
+          <a:lstStyle/>
+          <a:p>
+            <a:pPr algn="ctr"/>
+          </a:p>
+        </p:txBody>
+      </p:sp>
+      <p:sp>
+        <p:nvSpPr>
+          <p:cNvPr id="6" name="TextBox 5"/>
+          <p:cNvSpPr txBox="1"/>
+          <p:nvPr/>
+        </p:nvSpPr>
+        <p:spPr>
+          <a:xfrm>
+            <a:off x="868680" y="1634480"/>
+            <a:ext cx="3657600" cy="365760"/>
+          </a:xfrm>
+          <a:prstGeom prst="rect">
+            <a:avLst/>
+          </a:prstGeom>
+          <a:noFill/>
+        </p:spPr>
+        <p:txBody>
+          <a:bodyPr wrap="square" lIns="0" rIns="0" tIns="0" bIns="0">
+            <a:spAutoFit/>
+          </a:bodyPr>
+          <a:lstStyle/>
+          <a:p>
+            <a:pPr algn="l"/>
+            <a:r>
+              <a:rPr sz="1500" b="1" i="0">
+                <a:solidFill>
+                  <a:srgbClr val="115E59"/>
+                </a:solidFill>
+                <a:latin typeface="Helvetica Neue"/>
+              </a:rPr>
+              <a:t>Click any chip</a:t>
+            </a:r>
+          </a:p>
+        </p:txBody>
+      </p:sp>
+      <p:sp>
+        <p:nvSpPr>
+          <p:cNvPr id="7" name="TextBox 6"/>
+          <p:cNvSpPr txBox="1"/>
+          <p:nvPr/>
+        </p:nvSpPr>
+        <p:spPr>
+          <a:xfrm>
+            <a:off x="4572000" y="1634480"/>
+            <a:ext cx="6492240" cy="640080"/>
+          </a:xfrm>
+          <a:prstGeom prst="rect">
+            <a:avLst/>
+          </a:prstGeom>
+          <a:noFill/>
+        </p:spPr>
+        <p:txBody>
+          <a:bodyPr wrap="square" lIns="0" rIns="0" tIns="0" bIns="0">
+            <a:spAutoFit/>
+          </a:bodyPr>
+          <a:lstStyle/>
+          <a:p>
+            <a:pPr algn="l"/>
+            <a:r>
+              <a:rPr sz="1300" b="0" i="0">
+                <a:solidFill>
+                  <a:srgbClr val="1F2937"/>
+                </a:solidFill>
+                <a:latin typeface="Helvetica Neue"/>
+              </a:rPr>
+              <a:t>Popup lists actual files in the corresponding folder (candidates, drafts, notes, …).</a:t>
+            </a:r>
+          </a:p>
+        </p:txBody>
+      </p:sp>
+      <p:sp>
+        <p:nvSpPr>
+          <p:cNvPr id="8" name="Rounded Rectangle 7"/>
+          <p:cNvSpPr/>
+          <p:nvPr/>
+        </p:nvSpPr>
+        <p:spPr>
+          <a:xfrm>
+            <a:off x="640080" y="2423160"/>
+            <a:ext cx="10515600" cy="731520"/>
+          </a:xfrm>
+          <a:prstGeom prst="roundRect">
+            <a:avLst>
+              <a:gd name="adj" fmla="val 8000"/>
+            </a:avLst>
+          </a:prstGeom>
+          <a:solidFill>
+            <a:srgbClr val="F9FAFB"/>
+          </a:solidFill>
+          <a:ln w="9525">
+            <a:solidFill>
+              <a:srgbClr val="E5E7EB"/>
+            </a:solidFill>
+          </a:ln>
+          <a:effectLst/>
+        </p:spPr>
+        <p:style>
+          <a:lnRef idx="1">
+            <a:schemeClr val="accent1"/>
+          </a:lnRef>
+          <a:fillRef idx="3">
+            <a:schemeClr val="accent1"/>
+          </a:fillRef>
+          <a:effectRef idx="2">
+            <a:schemeClr val="accent1"/>
+          </a:effectRef>
+          <a:fontRef idx="minor">
+            <a:schemeClr val="lt1"/>
+          </a:fontRef>
+        </p:style>
+        <p:txBody>
+          <a:bodyPr rtlCol="0" anchor="ctr"/>
+          <a:lstStyle/>
+          <a:p>
+            <a:pPr algn="ctr"/>
+          </a:p>
+        </p:txBody>
+      </p:sp>
+      <p:sp>
+        <p:nvSpPr>
+          <p:cNvPr id="9" name="TextBox 8"/>
+          <p:cNvSpPr txBox="1"/>
+          <p:nvPr/>
+        </p:nvSpPr>
+        <p:spPr>
+          <a:xfrm>
+            <a:off x="868680" y="2503160"/>
+            <a:ext cx="3657600" cy="365760"/>
+          </a:xfrm>
+          <a:prstGeom prst="rect">
+            <a:avLst/>
+          </a:prstGeom>
+          <a:noFill/>
+        </p:spPr>
+        <p:txBody>
+          <a:bodyPr wrap="square" lIns="0" rIns="0" tIns="0" bIns="0">
+            <a:spAutoFit/>
+          </a:bodyPr>
+          <a:lstStyle/>
+          <a:p>
+            <a:pPr algn="l"/>
+            <a:r>
+              <a:rPr sz="1500" b="1" i="0">
+                <a:solidFill>
+                  <a:srgbClr val="115E59"/>
+                </a:solidFill>
+                <a:latin typeface="Helvetica Neue"/>
+              </a:rPr>
+              <a:t>Open with one click</a:t>
+            </a:r>
+          </a:p>
+        </p:txBody>
+      </p:sp>
+      <p:sp>
+        <p:nvSpPr>
+          <p:cNvPr id="10" name="TextBox 9"/>
+          <p:cNvSpPr txBox="1"/>
+          <p:nvPr/>
+        </p:nvSpPr>
+        <p:spPr>
+          <a:xfrm>
+            <a:off x="4572000" y="2503160"/>
+            <a:ext cx="6492240" cy="640080"/>
+          </a:xfrm>
+          <a:prstGeom prst="rect">
+            <a:avLst/>
+          </a:prstGeom>
+          <a:noFill/>
+        </p:spPr>
+        <p:txBody>
+          <a:bodyPr wrap="square" lIns="0" rIns="0" tIns="0" bIns="0">
+            <a:spAutoFit/>
+          </a:bodyPr>
+          <a:lstStyle/>
+          <a:p>
+            <a:pPr algn="l"/>
+            <a:r>
+              <a:rPr sz="1300" b="0" i="0">
+                <a:solidFill>
+                  <a:srgbClr val="1F2937"/>
+                </a:solidFill>
+                <a:latin typeface="Helvetica Neue"/>
+              </a:rPr>
+              <a:t>Each row opens the file via macOS `open` in its default app.</a:t>
+            </a:r>
+          </a:p>
+        </p:txBody>
+      </p:sp>
+      <p:sp>
+        <p:nvSpPr>
+          <p:cNvPr id="11" name="Rounded Rectangle 10"/>
+          <p:cNvSpPr/>
+          <p:nvPr/>
+        </p:nvSpPr>
+        <p:spPr>
+          <a:xfrm>
+            <a:off x="640080" y="3291840"/>
+            <a:ext cx="10515600" cy="731520"/>
+          </a:xfrm>
+          <a:prstGeom prst="roundRect">
+            <a:avLst>
+              <a:gd name="adj" fmla="val 8000"/>
+            </a:avLst>
+          </a:prstGeom>
+          <a:solidFill>
+            <a:srgbClr val="F9FAFB"/>
+          </a:solidFill>
+          <a:ln w="9525">
+            <a:solidFill>
+              <a:srgbClr val="E5E7EB"/>
+            </a:solidFill>
+          </a:ln>
+          <a:effectLst/>
+        </p:spPr>
+        <p:style>
+          <a:lnRef idx="1">
+            <a:schemeClr val="accent1"/>
+          </a:lnRef>
+          <a:fillRef idx="3">
+            <a:schemeClr val="accent1"/>
+          </a:fillRef>
+          <a:effectRef idx="2">
+            <a:schemeClr val="accent1"/>
+          </a:effectRef>
+          <a:fontRef idx="minor">
+            <a:schemeClr val="lt1"/>
+          </a:fontRef>
+        </p:style>
+        <p:txBody>
+          <a:bodyPr rtlCol="0" anchor="ctr"/>
+          <a:lstStyle/>
+          <a:p>
+            <a:pPr algn="ctr"/>
+          </a:p>
+        </p:txBody>
+      </p:sp>
+      <p:sp>
+        <p:nvSpPr>
+          <p:cNvPr id="12" name="TextBox 11"/>
+          <p:cNvSpPr txBox="1"/>
+          <p:nvPr/>
+        </p:nvSpPr>
+        <p:spPr>
+          <a:xfrm>
+            <a:off x="868680" y="3371840"/>
+            <a:ext cx="3657600" cy="365760"/>
+          </a:xfrm>
+          <a:prstGeom prst="rect">
+            <a:avLst/>
+          </a:prstGeom>
+          <a:noFill/>
+        </p:spPr>
+        <p:txBody>
+          <a:bodyPr wrap="square" lIns="0" rIns="0" tIns="0" bIns="0">
+            <a:spAutoFit/>
+          </a:bodyPr>
+          <a:lstStyle/>
+          <a:p>
+            <a:pPr algn="l"/>
+            <a:r>
+              <a:rPr sz="1500" b="1" i="0">
+                <a:solidFill>
+                  <a:srgbClr val="115E59"/>
+                </a:solidFill>
+                <a:latin typeface="Helvetica Neue"/>
+              </a:rPr>
+              <a:t>Special cases</a:t>
+            </a:r>
+          </a:p>
+        </p:txBody>
+      </p:sp>
+      <p:sp>
+        <p:nvSpPr>
+          <p:cNvPr id="13" name="TextBox 12"/>
+          <p:cNvSpPr txBox="1"/>
+          <p:nvPr/>
+        </p:nvSpPr>
+        <p:spPr>
+          <a:xfrm>
+            <a:off x="4572000" y="3371840"/>
+            <a:ext cx="6492240" cy="640080"/>
+          </a:xfrm>
+          <a:prstGeom prst="rect">
+            <a:avLst/>
+          </a:prstGeom>
+          <a:noFill/>
+        </p:spPr>
+        <p:txBody>
+          <a:bodyPr wrap="square" lIns="0" rIns="0" tIns="0" bIns="0">
+            <a:spAutoFit/>
+          </a:bodyPr>
+          <a:lstStyle/>
+          <a:p>
+            <a:pPr algn="l"/>
+            <a:r>
+              <a:rPr sz="1300" b="0" i="0">
+                <a:solidFill>
+                  <a:srgbClr val="1F2937"/>
+                </a:solidFill>
+                <a:latin typeface="Helvetica Neue"/>
+              </a:rPr>
+              <a:t>Figure rows → opens figure-plan.md itself. Candidate batches → directory + file count.</a:t>
+            </a:r>
+          </a:p>
+        </p:txBody>
+      </p:sp>
+      <p:sp>
+        <p:nvSpPr>
+          <p:cNvPr id="14" name="Rounded Rectangle 13"/>
+          <p:cNvSpPr/>
+          <p:nvPr/>
+        </p:nvSpPr>
+        <p:spPr>
+          <a:xfrm>
+            <a:off x="640080" y="4160520"/>
+            <a:ext cx="10515600" cy="731520"/>
+          </a:xfrm>
+          <a:prstGeom prst="roundRect">
+            <a:avLst>
+              <a:gd name="adj" fmla="val 8000"/>
+            </a:avLst>
+          </a:prstGeom>
+          <a:solidFill>
+            <a:srgbClr val="F9FAFB"/>
+          </a:solidFill>
+          <a:ln w="9525">
+            <a:solidFill>
+              <a:srgbClr val="E5E7EB"/>
+            </a:solidFill>
+          </a:ln>
+          <a:effectLst/>
+        </p:spPr>
+        <p:style>
+          <a:lnRef idx="1">
+            <a:schemeClr val="accent1"/>
+          </a:lnRef>
+          <a:fillRef idx="3">
+            <a:schemeClr val="accent1"/>
+          </a:fillRef>
+          <a:effectRef idx="2">
+            <a:schemeClr val="accent1"/>
+          </a:effectRef>
+          <a:fontRef idx="minor">
+            <a:schemeClr val="lt1"/>
+          </a:fontRef>
+        </p:style>
+        <p:txBody>
+          <a:bodyPr rtlCol="0" anchor="ctr"/>
+          <a:lstStyle/>
+          <a:p>
+            <a:pPr algn="ctr"/>
+          </a:p>
+        </p:txBody>
+      </p:sp>
+      <p:sp>
+        <p:nvSpPr>
+          <p:cNvPr id="15" name="TextBox 14"/>
+          <p:cNvSpPr txBox="1"/>
+          <p:nvPr/>
+        </p:nvSpPr>
+        <p:spPr>
+          <a:xfrm>
+            <a:off x="868680" y="4240520"/>
+            <a:ext cx="3657600" cy="365760"/>
+          </a:xfrm>
+          <a:prstGeom prst="rect">
+            <a:avLst/>
+          </a:prstGeom>
+          <a:noFill/>
+        </p:spPr>
+        <p:txBody>
+          <a:bodyPr wrap="square" lIns="0" rIns="0" tIns="0" bIns="0">
+            <a:spAutoFit/>
+          </a:bodyPr>
+          <a:lstStyle/>
+          <a:p>
+            <a:pPr algn="l"/>
+            <a:r>
+              <a:rPr sz="1500" b="1" i="0">
+                <a:solidFill>
+                  <a:srgbClr val="115E59"/>
+                </a:solidFill>
+                <a:latin typeface="Helvetica Neue"/>
+              </a:rPr>
+              <a:t>Drill-down + Reassign</a:t>
+            </a:r>
+          </a:p>
+        </p:txBody>
+      </p:sp>
+      <p:sp>
+        <p:nvSpPr>
+          <p:cNvPr id="16" name="TextBox 15"/>
+          <p:cNvSpPr txBox="1"/>
+          <p:nvPr/>
+        </p:nvSpPr>
+        <p:spPr>
+          <a:xfrm>
+            <a:off x="4572000" y="4240520"/>
+            <a:ext cx="6492240" cy="640080"/>
+          </a:xfrm>
+          <a:prstGeom prst="rect">
+            <a:avLst/>
+          </a:prstGeom>
+          <a:noFill/>
+        </p:spPr>
+        <p:txBody>
+          <a:bodyPr wrap="square" lIns="0" rIns="0" tIns="0" bIns="0">
+            <a:spAutoFit/>
+          </a:bodyPr>
+          <a:lstStyle/>
+          <a:p>
+            <a:pPr algn="l"/>
+            <a:r>
+              <a:rPr sz="1300" b="0" i="0">
+                <a:solidFill>
+                  <a:srgbClr val="1F2937"/>
+                </a:solidFill>
+                <a:latin typeface="Helvetica Neue"/>
+              </a:rPr>
+              <a:t>data-update rows show an extra Reassign… button (see slide 6).</a:t>
+            </a:r>
+          </a:p>
+        </p:txBody>
+      </p:sp>
+      <p:sp>
+        <p:nvSpPr>
+          <p:cNvPr id="17" name="TextBox 16"/>
+          <p:cNvSpPr txBox="1"/>
+          <p:nvPr/>
+        </p:nvSpPr>
+        <p:spPr>
+          <a:xfrm>
+            <a:off x="640080" y="5943600"/>
+            <a:ext cx="10515600" cy="365760"/>
+          </a:xfrm>
+          <a:prstGeom prst="rect">
+            <a:avLst/>
+          </a:prstGeom>
+          <a:noFill/>
+        </p:spPr>
+        <p:txBody>
+          <a:bodyPr wrap="square" lIns="0" rIns="0" tIns="0" bIns="0">
+            <a:spAutoFit/>
+          </a:bodyPr>
+          <a:lstStyle/>
+          <a:p>
+            <a:pPr algn="l"/>
+            <a:r>
+              <a:rPr sz="1100" b="0" i="1">
+                <a:solidFill>
+                  <a:srgbClr val="6B7280"/>
+                </a:solidFill>
+                <a:latin typeface="Helvetica Neue"/>
+              </a:rPr>
+              <a:t>API: list-bucket-files, open-relative-path.</a:t>
+            </a:r>
+          </a:p>
+        </p:txBody>
+      </p:sp>
+    </p:spTree>
+  </p:cSld>
+  <p:clrMapOvr>
+    <a:masterClrMapping/>
+  </p:clrMapOvr>
+</p:sld>
+</file>
+
+<file path=ppt/slides/slide23.xml><?xml version="1.0" encoding="utf-8"?>
+<p:sld xmlns:a="http://schemas.openxmlformats.org/drawingml/2006/main" xmlns:p="http://schemas.openxmlformats.org/presentationml/2006/main" xmlns:r="http://schemas.openxmlformats.org/officeDocument/2006/relationships">
+  <p:cSld>
+    <p:spTree>
+      <p:nvGrpSpPr>
+        <p:cNvPr id="1" name=""/>
+        <p:cNvGrpSpPr/>
+        <p:nvPr/>
+      </p:nvGrpSpPr>
+      <p:grpSpPr/>
+      <p:sp>
+        <p:nvSpPr>
+          <p:cNvPr id="2" name="Rectangle 1"/>
+          <p:cNvSpPr/>
+          <p:nvPr/>
+        </p:nvSpPr>
+        <p:spPr>
+          <a:xfrm>
+            <a:off x="457200" y="457200"/>
+            <a:ext cx="54864" cy="777240"/>
+          </a:xfrm>
+          <a:prstGeom prst="rect">
+            <a:avLst/>
+          </a:prstGeom>
+          <a:solidFill>
+            <a:srgbClr val="0F766E"/>
+          </a:solidFill>
+          <a:ln>
+            <a:noFill/>
+          </a:ln>
+        </p:spPr>
+        <p:style>
+          <a:lnRef idx="1">
+            <a:schemeClr val="accent1"/>
+          </a:lnRef>
+          <a:fillRef idx="3">
+            <a:schemeClr val="accent1"/>
+          </a:fillRef>
+          <a:effectRef idx="2">
+            <a:schemeClr val="accent1"/>
+          </a:effectRef>
+          <a:fontRef idx="minor">
+            <a:schemeClr val="lt1"/>
+          </a:fontRef>
+        </p:style>
+        <p:txBody>
+          <a:bodyPr rtlCol="0" anchor="ctr"/>
+          <a:lstStyle/>
+          <a:p>
+            <a:pPr algn="ctr"/>
+          </a:p>
+        </p:txBody>
+      </p:sp>
+      <p:sp>
+        <p:nvSpPr>
+          <p:cNvPr id="3" name="TextBox 2"/>
+          <p:cNvSpPr txBox="1"/>
+          <p:nvPr/>
+        </p:nvSpPr>
+        <p:spPr>
+          <a:xfrm>
+            <a:off x="640080" y="411480"/>
+            <a:ext cx="10058400" cy="292608"/>
+          </a:xfrm>
+          <a:prstGeom prst="rect">
+            <a:avLst/>
+          </a:prstGeom>
+          <a:noFill/>
+        </p:spPr>
+        <p:txBody>
+          <a:bodyPr wrap="square" lIns="0" rIns="0" tIns="0" bIns="0">
+            <a:spAutoFit/>
+          </a:bodyPr>
+          <a:lstStyle/>
+          <a:p>
+            <a:pPr algn="l"/>
+            <a:r>
+              <a:rPr sz="1100" b="1" i="0">
+                <a:solidFill>
+                  <a:srgbClr val="0F766E"/>
+                </a:solidFill>
+                <a:latin typeface="Helvetica Neue"/>
+              </a:rPr>
+              <a:t>05 · Confidential data tracking</a:t>
+            </a:r>
+          </a:p>
+        </p:txBody>
+      </p:sp>
+      <p:sp>
+        <p:nvSpPr>
+          <p:cNvPr id="4" name="TextBox 3"/>
+          <p:cNvSpPr txBox="1"/>
+          <p:nvPr/>
+        </p:nvSpPr>
+        <p:spPr>
+          <a:xfrm>
+            <a:off x="640080" y="685800"/>
+            <a:ext cx="10058400" cy="640080"/>
+          </a:xfrm>
+          <a:prstGeom prst="rect">
+            <a:avLst/>
+          </a:prstGeom>
+          <a:noFill/>
+        </p:spPr>
+        <p:txBody>
+          <a:bodyPr wrap="square" lIns="0" rIns="0" tIns="0" bIns="0">
+            <a:spAutoFit/>
+          </a:bodyPr>
+          <a:lstStyle/>
+          <a:p>
+            <a:pPr algn="l"/>
+            <a:r>
+              <a:rPr sz="2800" b="1" i="0">
+                <a:solidFill>
+                  <a:srgbClr val="1E2A4A"/>
+                </a:solidFill>
+                <a:latin typeface="Helvetica Neue"/>
+              </a:rPr>
+              <a:t>Data updates with Google Drive integration</a:t>
+            </a:r>
+          </a:p>
+        </p:txBody>
+      </p:sp>
+      <p:sp>
+        <p:nvSpPr>
+          <p:cNvPr id="5" name="Rounded Rectangle 4"/>
+          <p:cNvSpPr/>
+          <p:nvPr/>
+        </p:nvSpPr>
+        <p:spPr>
+          <a:xfrm>
+            <a:off x="705612" y="1691640"/>
+            <a:ext cx="3520440" cy="3657600"/>
+          </a:xfrm>
+          <a:prstGeom prst="roundRect">
+            <a:avLst>
+              <a:gd name="adj" fmla="val 8000"/>
+            </a:avLst>
+          </a:prstGeom>
+          <a:solidFill>
+            <a:srgbClr val="FFFFFF"/>
+          </a:solidFill>
+          <a:ln w="9525">
+            <a:solidFill>
+              <a:srgbClr val="E5E7EB"/>
+            </a:solidFill>
+          </a:ln>
+          <a:effectLst/>
+        </p:spPr>
+        <p:style>
+          <a:lnRef idx="1">
+            <a:schemeClr val="accent1"/>
+          </a:lnRef>
+          <a:fillRef idx="3">
+            <a:schemeClr val="accent1"/>
+          </a:fillRef>
+          <a:effectRef idx="2">
+            <a:schemeClr val="accent1"/>
+          </a:effectRef>
+          <a:fontRef idx="minor">
+            <a:schemeClr val="lt1"/>
+          </a:fontRef>
+        </p:style>
+        <p:txBody>
+          <a:bodyPr rtlCol="0" anchor="ctr"/>
+          <a:lstStyle/>
+          <a:p>
+            <a:pPr algn="ctr"/>
+          </a:p>
+        </p:txBody>
+      </p:sp>
+      <p:sp>
+        <p:nvSpPr>
+          <p:cNvPr id="6" name="Rounded Rectangle 5"/>
+          <p:cNvSpPr/>
+          <p:nvPr/>
+        </p:nvSpPr>
+        <p:spPr>
+          <a:xfrm>
+            <a:off x="870204" y="1856232"/>
+            <a:ext cx="1005840" cy="274320"/>
+          </a:xfrm>
+          <a:prstGeom prst="roundRect">
+            <a:avLst>
+              <a:gd name="adj" fmla="val 50000"/>
+            </a:avLst>
+          </a:prstGeom>
+          <a:solidFill>
+            <a:srgbClr val="0F766E"/>
+          </a:solidFill>
+          <a:ln>
+            <a:noFill/>
+          </a:ln>
+        </p:spPr>
+        <p:style>
+          <a:lnRef idx="1">
+            <a:schemeClr val="accent1"/>
+          </a:lnRef>
+          <a:fillRef idx="3">
+            <a:schemeClr val="accent1"/>
+          </a:fillRef>
+          <a:effectRef idx="2">
+            <a:schemeClr val="accent1"/>
+          </a:effectRef>
+          <a:fontRef idx="minor">
+            <a:schemeClr val="lt1"/>
+          </a:fontRef>
+        </p:style>
+        <p:txBody>
+          <a:bodyPr rtlCol="0" anchor="ctr" lIns="73152" rIns="73152" tIns="18288" bIns="18288"/>
+          <a:lstStyle/>
+          <a:p>
+            <a:pPr algn="ctr"/>
+            <a:r>
+              <a:rPr sz="1100" b="1">
+                <a:solidFill>
+                  <a:srgbClr val="FFFFFF"/>
+                </a:solidFill>
+                <a:latin typeface="Helvetica Neue"/>
+              </a:rPr>
+              <a:t>filename</a:t>
+            </a:r>
+          </a:p>
+        </p:txBody>
+      </p:sp>
+      <p:sp>
+        <p:nvSpPr>
+          <p:cNvPr id="7" name="TextBox 6"/>
+          <p:cNvSpPr txBox="1"/>
+          <p:nvPr/>
+        </p:nvSpPr>
+        <p:spPr>
+          <a:xfrm>
+            <a:off x="870204" y="2286000"/>
+            <a:ext cx="3191256" cy="457200"/>
+          </a:xfrm>
+          <a:prstGeom prst="rect">
+            <a:avLst/>
+          </a:prstGeom>
+          <a:noFill/>
+        </p:spPr>
+        <p:txBody>
+          <a:bodyPr wrap="square" lIns="0" rIns="0" tIns="0" bIns="0">
+            <a:spAutoFit/>
+          </a:bodyPr>
+          <a:lstStyle/>
+          <a:p>
+            <a:pPr algn="l"/>
+            <a:r>
+              <a:rPr sz="1600" b="1" i="0">
+                <a:solidFill>
+                  <a:srgbClr val="1E2A4A"/>
+                </a:solidFill>
+                <a:latin typeface="Helvetica Neue"/>
+              </a:rPr>
+              <a:t>Canonical naming</a:t>
+            </a:r>
+          </a:p>
+        </p:txBody>
+      </p:sp>
+      <p:sp>
+        <p:nvSpPr>
+          <p:cNvPr id="8" name="TextBox 7"/>
+          <p:cNvSpPr txBox="1"/>
+          <p:nvPr/>
+        </p:nvSpPr>
+        <p:spPr>
+          <a:xfrm>
+            <a:off x="870204" y="2770632"/>
+            <a:ext cx="3191256" cy="2377440"/>
+          </a:xfrm>
+          <a:prstGeom prst="rect">
+            <a:avLst/>
+          </a:prstGeom>
+          <a:noFill/>
+        </p:spPr>
+        <p:txBody>
+          <a:bodyPr wrap="square" lIns="0" rIns="0" tIns="0" bIns="0">
+            <a:spAutoFit/>
+          </a:bodyPr>
+          <a:lstStyle/>
+          <a:p>
+            <a:pPr algn="l"/>
+            <a:r>
+              <a:rPr sz="1100" b="0" i="0">
+                <a:solidFill>
+                  <a:srgbClr val="1F2937"/>
+                </a:solidFill>
+                <a:latin typeface="Helvetica Neue"/>
+              </a:rPr>
+              <a:t>fig-1A_brief-slug.ext · prelim_xxx · unspecified_xxx. Brief description (3–6 words) is required.</a:t>
+            </a:r>
+          </a:p>
+        </p:txBody>
+      </p:sp>
+      <p:sp>
+        <p:nvSpPr>
+          <p:cNvPr id="9" name="Rounded Rectangle 8"/>
+          <p:cNvSpPr/>
+          <p:nvPr/>
+        </p:nvSpPr>
+        <p:spPr>
+          <a:xfrm>
+            <a:off x="4335780" y="1691640"/>
+            <a:ext cx="3520440" cy="3657600"/>
+          </a:xfrm>
+          <a:prstGeom prst="roundRect">
+            <a:avLst>
+              <a:gd name="adj" fmla="val 8000"/>
+            </a:avLst>
+          </a:prstGeom>
+          <a:solidFill>
+            <a:srgbClr val="FFFFFF"/>
+          </a:solidFill>
+          <a:ln w="9525">
+            <a:solidFill>
+              <a:srgbClr val="E5E7EB"/>
+            </a:solidFill>
+          </a:ln>
+          <a:effectLst/>
+        </p:spPr>
+        <p:style>
+          <a:lnRef idx="1">
+            <a:schemeClr val="accent1"/>
+          </a:lnRef>
+          <a:fillRef idx="3">
+            <a:schemeClr val="accent1"/>
+          </a:fillRef>
+          <a:effectRef idx="2">
+            <a:schemeClr val="accent1"/>
+          </a:effectRef>
+          <a:fontRef idx="minor">
+            <a:schemeClr val="lt1"/>
+          </a:fontRef>
+        </p:style>
+        <p:txBody>
+          <a:bodyPr rtlCol="0" anchor="ctr"/>
+          <a:lstStyle/>
+          <a:p>
+            <a:pPr algn="ctr"/>
+          </a:p>
+        </p:txBody>
+      </p:sp>
+      <p:sp>
+        <p:nvSpPr>
+          <p:cNvPr id="10" name="Rounded Rectangle 9"/>
+          <p:cNvSpPr/>
+          <p:nvPr/>
+        </p:nvSpPr>
+        <p:spPr>
+          <a:xfrm>
+            <a:off x="4500372" y="1856232"/>
+            <a:ext cx="1005840" cy="274320"/>
+          </a:xfrm>
+          <a:prstGeom prst="roundRect">
+            <a:avLst>
+              <a:gd name="adj" fmla="val 50000"/>
+            </a:avLst>
+          </a:prstGeom>
+          <a:solidFill>
+            <a:srgbClr val="0F766E"/>
+          </a:solidFill>
+          <a:ln>
+            <a:noFill/>
+          </a:ln>
+        </p:spPr>
+        <p:style>
+          <a:lnRef idx="1">
+            <a:schemeClr val="accent1"/>
+          </a:lnRef>
+          <a:fillRef idx="3">
+            <a:schemeClr val="accent1"/>
+          </a:fillRef>
+          <a:effectRef idx="2">
+            <a:schemeClr val="accent1"/>
+          </a:effectRef>
+          <a:fontRef idx="minor">
+            <a:schemeClr val="lt1"/>
+          </a:fontRef>
+        </p:style>
+        <p:txBody>
+          <a:bodyPr rtlCol="0" anchor="ctr" lIns="73152" rIns="73152" tIns="18288" bIns="18288"/>
+          <a:lstStyle/>
+          <a:p>
+            <a:pPr algn="ctr"/>
+            <a:r>
+              <a:rPr sz="1100" b="1">
+                <a:solidFill>
+                  <a:srgbClr val="FFFFFF"/>
+                </a:solidFill>
+                <a:latin typeface="Helvetica Neue"/>
+              </a:rPr>
+              <a:t>modes</a:t>
+            </a:r>
+          </a:p>
+        </p:txBody>
+      </p:sp>
+      <p:sp>
+        <p:nvSpPr>
+          <p:cNvPr id="11" name="TextBox 10"/>
+          <p:cNvSpPr txBox="1"/>
+          <p:nvPr/>
+        </p:nvSpPr>
+        <p:spPr>
+          <a:xfrm>
+            <a:off x="4500372" y="2286000"/>
+            <a:ext cx="3191256" cy="457200"/>
+          </a:xfrm>
+          <a:prstGeom prst="rect">
+            <a:avLst/>
+          </a:prstGeom>
+          <a:noFill/>
+        </p:spPr>
+        <p:txBody>
+          <a:bodyPr wrap="square" lIns="0" rIns="0" tIns="0" bIns="0">
+            <a:spAutoFit/>
+          </a:bodyPr>
+          <a:lstStyle/>
+          <a:p>
+            <a:pPr algn="l"/>
+            <a:r>
+              <a:rPr sz="1600" b="1" i="0">
+                <a:solidFill>
+                  <a:srgbClr val="1E2A4A"/>
+                </a:solidFill>
+                <a:latin typeface="Helvetica Neue"/>
+              </a:rPr>
+              <a:t>Two modes</a:t>
+            </a:r>
+          </a:p>
+        </p:txBody>
+      </p:sp>
+      <p:sp>
+        <p:nvSpPr>
+          <p:cNvPr id="12" name="TextBox 11"/>
+          <p:cNvSpPr txBox="1"/>
+          <p:nvPr/>
+        </p:nvSpPr>
+        <p:spPr>
+          <a:xfrm>
+            <a:off x="4500372" y="2770632"/>
+            <a:ext cx="3191256" cy="2377440"/>
+          </a:xfrm>
+          <a:prstGeom prst="rect">
+            <a:avLst/>
+          </a:prstGeom>
+          <a:noFill/>
+        </p:spPr>
+        <p:txBody>
+          <a:bodyPr wrap="square" lIns="0" rIns="0" tIns="0" bIns="0">
+            <a:spAutoFit/>
+          </a:bodyPr>
+          <a:lstStyle/>
+          <a:p>
+            <a:pPr algn="l"/>
+            <a:r>
+              <a:rPr sz="1100" b="0" i="0">
+                <a:solidFill>
+                  <a:srgbClr val="1F2937"/>
+                </a:solidFill>
+                <a:latin typeface="Helvetica Neue"/>
+              </a:rPr>
+              <a:t>New data → moves file + creates .md. Adding to existing → archives old file (zip) + replaces canonical name.</a:t>
+            </a:r>
+          </a:p>
+        </p:txBody>
+      </p:sp>
+      <p:sp>
+        <p:nvSpPr>
+          <p:cNvPr id="13" name="Rounded Rectangle 12"/>
+          <p:cNvSpPr/>
+          <p:nvPr/>
+        </p:nvSpPr>
+        <p:spPr>
+          <a:xfrm>
+            <a:off x="7965948" y="1691640"/>
+            <a:ext cx="3520440" cy="3657600"/>
+          </a:xfrm>
+          <a:prstGeom prst="roundRect">
+            <a:avLst>
+              <a:gd name="adj" fmla="val 8000"/>
+            </a:avLst>
+          </a:prstGeom>
+          <a:solidFill>
+            <a:srgbClr val="FFFFFF"/>
+          </a:solidFill>
+          <a:ln w="9525">
+            <a:solidFill>
+              <a:srgbClr val="E5E7EB"/>
+            </a:solidFill>
+          </a:ln>
+          <a:effectLst/>
+        </p:spPr>
+        <p:style>
+          <a:lnRef idx="1">
+            <a:schemeClr val="accent1"/>
+          </a:lnRef>
+          <a:fillRef idx="3">
+            <a:schemeClr val="accent1"/>
+          </a:fillRef>
+          <a:effectRef idx="2">
+            <a:schemeClr val="accent1"/>
+          </a:effectRef>
+          <a:fontRef idx="minor">
+            <a:schemeClr val="lt1"/>
+          </a:fontRef>
+        </p:style>
+        <p:txBody>
+          <a:bodyPr rtlCol="0" anchor="ctr"/>
+          <a:lstStyle/>
+          <a:p>
+            <a:pPr algn="ctr"/>
+          </a:p>
+        </p:txBody>
+      </p:sp>
+      <p:sp>
+        <p:nvSpPr>
+          <p:cNvPr id="14" name="Rounded Rectangle 13"/>
+          <p:cNvSpPr/>
+          <p:nvPr/>
+        </p:nvSpPr>
+        <p:spPr>
+          <a:xfrm>
+            <a:off x="8130540" y="1856232"/>
+            <a:ext cx="1005840" cy="274320"/>
+          </a:xfrm>
+          <a:prstGeom prst="roundRect">
+            <a:avLst>
+              <a:gd name="adj" fmla="val 50000"/>
+            </a:avLst>
+          </a:prstGeom>
+          <a:solidFill>
+            <a:srgbClr val="B45309"/>
+          </a:solidFill>
+          <a:ln>
+            <a:noFill/>
+          </a:ln>
+        </p:spPr>
+        <p:style>
+          <a:lnRef idx="1">
+            <a:schemeClr val="accent1"/>
+          </a:lnRef>
+          <a:fillRef idx="3">
+            <a:schemeClr val="accent1"/>
+          </a:fillRef>
+          <a:effectRef idx="2">
+            <a:schemeClr val="accent1"/>
+          </a:effectRef>
+          <a:fontRef idx="minor">
+            <a:schemeClr val="lt1"/>
+          </a:fontRef>
+        </p:style>
+        <p:txBody>
+          <a:bodyPr rtlCol="0" anchor="ctr" lIns="73152" rIns="73152" tIns="18288" bIns="18288"/>
+          <a:lstStyle/>
+          <a:p>
+            <a:pPr algn="ctr"/>
+            <a:r>
+              <a:rPr sz="1100" b="1">
+                <a:solidFill>
+                  <a:srgbClr val="FFFFFF"/>
+                </a:solidFill>
+                <a:latin typeface="Helvetica Neue"/>
+              </a:rPr>
+              <a:t>audit</a:t>
+            </a:r>
+          </a:p>
+        </p:txBody>
+      </p:sp>
+      <p:sp>
+        <p:nvSpPr>
+          <p:cNvPr id="15" name="TextBox 14"/>
+          <p:cNvSpPr txBox="1"/>
+          <p:nvPr/>
+        </p:nvSpPr>
+        <p:spPr>
+          <a:xfrm>
+            <a:off x="8130540" y="2286000"/>
+            <a:ext cx="3191256" cy="457200"/>
+          </a:xfrm>
+          <a:prstGeom prst="rect">
+            <a:avLst/>
+          </a:prstGeom>
+          <a:noFill/>
+        </p:spPr>
+        <p:txBody>
+          <a:bodyPr wrap="square" lIns="0" rIns="0" tIns="0" bIns="0">
+            <a:spAutoFit/>
+          </a:bodyPr>
+          <a:lstStyle/>
+          <a:p>
+            <a:pPr algn="l"/>
+            <a:r>
+              <a:rPr sz="1600" b="1" i="0">
+                <a:solidFill>
+                  <a:srgbClr val="1E2A4A"/>
+                </a:solidFill>
+                <a:latin typeface="Helvetica Neue"/>
+              </a:rPr>
+              <a:t>CHANGELOG.md</a:t>
+            </a:r>
+          </a:p>
+        </p:txBody>
+      </p:sp>
+      <p:sp>
+        <p:nvSpPr>
+          <p:cNvPr id="16" name="TextBox 15"/>
+          <p:cNvSpPr txBox="1"/>
+          <p:nvPr/>
+        </p:nvSpPr>
+        <p:spPr>
+          <a:xfrm>
+            <a:off x="8130540" y="2770632"/>
+            <a:ext cx="3191256" cy="2377440"/>
+          </a:xfrm>
+          <a:prstGeom prst="rect">
+            <a:avLst/>
+          </a:prstGeom>
+          <a:noFill/>
+        </p:spPr>
+        <p:txBody>
+          <a:bodyPr wrap="square" lIns="0" rIns="0" tIns="0" bIns="0">
+            <a:spAutoFit/>
+          </a:bodyPr>
+          <a:lstStyle/>
+          <a:p>
+            <a:pPr algn="l"/>
+            <a:r>
+              <a:rPr sz="1100" b="0" i="0">
+                <a:solidFill>
+                  <a:srgbClr val="1F2937"/>
+                </a:solidFill>
+                <a:latin typeface="Helvetica Neue"/>
+              </a:rPr>
+              <a:t>Append-only history of every CREATE / UPDATE / REASSIGN / RENUMBER / RESTORE inside LLM_project_manager/.</a:t>
+            </a:r>
+          </a:p>
+        </p:txBody>
+      </p:sp>
+      <p:sp>
+        <p:nvSpPr>
+          <p:cNvPr id="17" name="TextBox 16"/>
+          <p:cNvSpPr txBox="1"/>
+          <p:nvPr/>
+        </p:nvSpPr>
+        <p:spPr>
+          <a:xfrm>
+            <a:off x="640080" y="5897880"/>
+            <a:ext cx="10515600" cy="365760"/>
+          </a:xfrm>
+          <a:prstGeom prst="rect">
+            <a:avLst/>
+          </a:prstGeom>
+          <a:noFill/>
+        </p:spPr>
+        <p:txBody>
+          <a:bodyPr wrap="square" lIns="0" rIns="0" tIns="0" bIns="0">
+            <a:spAutoFit/>
+          </a:bodyPr>
+          <a:lstStyle/>
+          <a:p>
+            <a:pPr algn="l"/>
+            <a:r>
+              <a:rPr sz="1100" b="0" i="1">
+                <a:solidFill>
+                  <a:srgbClr val="6B7280"/>
+                </a:solidFill>
+                <a:latin typeface="Helvetica Neue"/>
+              </a:rPr>
+              <a:t>If gdrive_path is missing, the modal offers an inline 'Set Google Drive path…' folder picker.</a:t>
+            </a:r>
+          </a:p>
+        </p:txBody>
+      </p:sp>
+    </p:spTree>
+  </p:cSld>
+  <p:clrMapOvr>
+    <a:masterClrMapping/>
+  </p:clrMapOvr>
+</p:sld>
+</file>
+
+<file path=ppt/slides/slide24.xml><?xml version="1.0" encoding="utf-8"?>
+<p:sld xmlns:a="http://schemas.openxmlformats.org/drawingml/2006/main" xmlns:p="http://schemas.openxmlformats.org/presentationml/2006/main" xmlns:r="http://schemas.openxmlformats.org/officeDocument/2006/relationships">
+  <p:cSld>
+    <p:spTree>
+      <p:nvGrpSpPr>
+        <p:cNvPr id="1" name=""/>
+        <p:cNvGrpSpPr/>
+        <p:nvPr/>
+      </p:nvGrpSpPr>
+      <p:grpSpPr/>
+      <p:sp>
+        <p:nvSpPr>
+          <p:cNvPr id="2" name="Rectangle 1"/>
+          <p:cNvSpPr/>
+          <p:nvPr/>
+        </p:nvSpPr>
+        <p:spPr>
+          <a:xfrm>
+            <a:off x="457200" y="457200"/>
+            <a:ext cx="54864" cy="777240"/>
+          </a:xfrm>
+          <a:prstGeom prst="rect">
+            <a:avLst/>
+          </a:prstGeom>
+          <a:solidFill>
+            <a:srgbClr val="0F766E"/>
+          </a:solidFill>
+          <a:ln>
+            <a:noFill/>
+          </a:ln>
+        </p:spPr>
+        <p:style>
+          <a:lnRef idx="1">
+            <a:schemeClr val="accent1"/>
+          </a:lnRef>
+          <a:fillRef idx="3">
+            <a:schemeClr val="accent1"/>
+          </a:fillRef>
+          <a:effectRef idx="2">
+            <a:schemeClr val="accent1"/>
+          </a:effectRef>
+          <a:fontRef idx="minor">
+            <a:schemeClr val="lt1"/>
+          </a:fontRef>
+        </p:style>
+        <p:txBody>
+          <a:bodyPr rtlCol="0" anchor="ctr"/>
+          <a:lstStyle/>
+          <a:p>
+            <a:pPr algn="ctr"/>
+          </a:p>
+        </p:txBody>
+      </p:sp>
+      <p:sp>
+        <p:nvSpPr>
+          <p:cNvPr id="3" name="TextBox 2"/>
+          <p:cNvSpPr txBox="1"/>
+          <p:nvPr/>
+        </p:nvSpPr>
+        <p:spPr>
+          <a:xfrm>
+            <a:off x="640080" y="411480"/>
+            <a:ext cx="10058400" cy="292608"/>
+          </a:xfrm>
+          <a:prstGeom prst="rect">
+            <a:avLst/>
+          </a:prstGeom>
+          <a:noFill/>
+        </p:spPr>
+        <p:txBody>
+          <a:bodyPr wrap="square" lIns="0" rIns="0" tIns="0" bIns="0">
+            <a:spAutoFit/>
+          </a:bodyPr>
+          <a:lstStyle/>
+          <a:p>
+            <a:pPr algn="l"/>
+            <a:r>
+              <a:rPr sz="1100" b="1" i="0">
+                <a:solidFill>
+                  <a:srgbClr val="0F766E"/>
+                </a:solidFill>
+                <a:latin typeface="Helvetica Neue"/>
+              </a:rPr>
+              <a:t>05 · File layout</a:t>
+            </a:r>
+          </a:p>
+        </p:txBody>
+      </p:sp>
+      <p:sp>
+        <p:nvSpPr>
+          <p:cNvPr id="4" name="TextBox 3"/>
+          <p:cNvSpPr txBox="1"/>
+          <p:nvPr/>
+        </p:nvSpPr>
+        <p:spPr>
+          <a:xfrm>
+            <a:off x="640080" y="685800"/>
+            <a:ext cx="10058400" cy="640080"/>
+          </a:xfrm>
+          <a:prstGeom prst="rect">
+            <a:avLst/>
+          </a:prstGeom>
+          <a:noFill/>
+        </p:spPr>
+        <p:txBody>
+          <a:bodyPr wrap="square" lIns="0" rIns="0" tIns="0" bIns="0">
+            <a:spAutoFit/>
+          </a:bodyPr>
+          <a:lstStyle/>
+          <a:p>
+            <a:pPr algn="l"/>
+            <a:r>
+              <a:rPr sz="2800" b="1" i="0">
+                <a:solidFill>
+                  <a:srgbClr val="1E2A4A"/>
+                </a:solidFill>
+                <a:latin typeface="Helvetica Neue"/>
+              </a:rPr>
+              <a:t>LLM_project_manager/ folder convention</a:t>
+            </a:r>
+          </a:p>
+        </p:txBody>
+      </p:sp>
+      <p:sp>
+        <p:nvSpPr>
+          <p:cNvPr id="5" name="TextBox 4"/>
+          <p:cNvSpPr txBox="1"/>
+          <p:nvPr/>
+        </p:nvSpPr>
+        <p:spPr>
+          <a:xfrm>
+            <a:off x="640080" y="1554480"/>
+            <a:ext cx="10515600" cy="640080"/>
+          </a:xfrm>
+          <a:prstGeom prst="rect">
+            <a:avLst/>
+          </a:prstGeom>
+          <a:noFill/>
+        </p:spPr>
+        <p:txBody>
+          <a:bodyPr wrap="square" lIns="0" rIns="0" tIns="0" bIns="0">
+            <a:spAutoFit/>
+          </a:bodyPr>
+          <a:lstStyle/>
+          <a:p>
+            <a:pPr algn="l"/>
+            <a:r>
+              <a:rPr sz="1400" b="0" i="0">
+                <a:solidFill>
+                  <a:srgbClr val="1F2937"/>
+                </a:solidFill>
+                <a:latin typeface="Helvetica Neue"/>
+              </a:rPr>
+              <a:t>Flat folder — figure organization is metadata-driven, not filesystem-driven.</a:t>
+            </a:r>
+          </a:p>
+        </p:txBody>
+      </p:sp>
+      <p:sp>
+        <p:nvSpPr>
+          <p:cNvPr id="6" name="Rounded Rectangle 5"/>
+          <p:cNvSpPr/>
+          <p:nvPr/>
+        </p:nvSpPr>
+        <p:spPr>
+          <a:xfrm>
+            <a:off x="640080" y="2286000"/>
+            <a:ext cx="10515600" cy="3840480"/>
+          </a:xfrm>
+          <a:prstGeom prst="roundRect">
+            <a:avLst>
+              <a:gd name="adj" fmla="val 8000"/>
+            </a:avLst>
+          </a:prstGeom>
+          <a:solidFill>
+            <a:srgbClr val="F3F4F6"/>
+          </a:solidFill>
+          <a:ln w="9525">
+            <a:solidFill>
+              <a:srgbClr val="E5E7EB"/>
+            </a:solidFill>
+          </a:ln>
+          <a:effectLst/>
+        </p:spPr>
+        <p:style>
+          <a:lnRef idx="1">
+            <a:schemeClr val="accent1"/>
+          </a:lnRef>
+          <a:fillRef idx="3">
+            <a:schemeClr val="accent1"/>
+          </a:fillRef>
+          <a:effectRef idx="2">
+            <a:schemeClr val="accent1"/>
+          </a:effectRef>
+          <a:fontRef idx="minor">
+            <a:schemeClr val="lt1"/>
+          </a:fontRef>
+        </p:style>
+        <p:txBody>
+          <a:bodyPr rtlCol="0" anchor="ctr"/>
+          <a:lstStyle/>
+          <a:p>
+            <a:pPr algn="ctr"/>
+          </a:p>
+        </p:txBody>
+      </p:sp>
+      <p:sp>
+        <p:nvSpPr>
+          <p:cNvPr id="7" name="TextBox 6"/>
+          <p:cNvSpPr txBox="1"/>
+          <p:nvPr/>
+        </p:nvSpPr>
+        <p:spPr>
+          <a:xfrm>
+            <a:off x="868680" y="2423160"/>
+            <a:ext cx="10058400" cy="3566160"/>
+          </a:xfrm>
+          <a:prstGeom prst="rect">
+            <a:avLst/>
+          </a:prstGeom>
+          <a:noFill/>
+        </p:spPr>
+        <p:txBody>
+          <a:bodyPr wrap="square">
+            <a:spAutoFit/>
+          </a:bodyPr>
+          <a:lstStyle/>
+          <a:p>
+            <a:pPr algn="l"/>
+            <a:r>
+              <a:rPr sz="1100">
+                <a:solidFill>
+                  <a:srgbClr val="1F2937"/>
+                </a:solidFill>
+                <a:latin typeface="Menlo"/>
+              </a:rPr>
+              <a:t>{gdrive_path}/LLM_project_manager/</a:t>
+            </a:r>
+          </a:p>
+          <a:p>
+            <a:pPr algn="l"/>
+            <a:r>
+              <a:rPr sz="1100">
+                <a:solidFill>
+                  <a:srgbClr val="1F2937"/>
+                </a:solidFill>
+                <a:latin typeface="Menlo"/>
+              </a:rPr>
+              <a:t>├── fig-1A_wt-vs-ko-baseline.csv         ← canonical (current)</a:t>
+            </a:r>
+          </a:p>
+          <a:p>
+            <a:pPr algn="l"/>
+            <a:r>
+              <a:rPr sz="1100">
+                <a:solidFill>
+                  <a:srgbClr val="1F2937"/>
+                </a:solidFill>
+                <a:latin typeface="Menlo"/>
+              </a:rPr>
+              <a:t>├── prelim_pilot-trace.png</a:t>
+            </a:r>
+          </a:p>
+          <a:p>
+            <a:pPr algn="l"/>
+            <a:r>
+              <a:rPr sz="1100">
+                <a:solidFill>
+                  <a:srgbClr val="1F2937"/>
+                </a:solidFill>
+                <a:latin typeface="Menlo"/>
+              </a:rPr>
+              <a:t>├── unspecified_misc.csv</a:t>
+            </a:r>
+          </a:p>
+          <a:p>
+            <a:pPr algn="l"/>
+            <a:r>
+              <a:rPr sz="1100">
+                <a:solidFill>
+                  <a:srgbClr val="1F2937"/>
+                </a:solidFill>
+                <a:latin typeface="Menlo"/>
+              </a:rPr>
+              <a:t>├── archive/</a:t>
+            </a:r>
+          </a:p>
+          <a:p>
+            <a:pPr algn="l"/>
+            <a:r>
+              <a:rPr sz="1100">
+                <a:solidFill>
+                  <a:srgbClr val="1F2937"/>
+                </a:solidFill>
+                <a:latin typeface="Menlo"/>
+              </a:rPr>
+              <a:t>│   ├── fig-1A_wt-vs-ko-baseline_20260512-101522.zip   ← previous version</a:t>
+            </a:r>
+          </a:p>
+          <a:p>
+            <a:pPr algn="l"/>
+            <a:r>
+              <a:rPr sz="1100">
+                <a:solidFill>
+                  <a:srgbClr val="1F2937"/>
+                </a:solidFill>
+                <a:latin typeface="Menlo"/>
+              </a:rPr>
+              <a:t>│   └── …</a:t>
+            </a:r>
+          </a:p>
+          <a:p>
+            <a:pPr algn="l"/>
+            <a:r>
+              <a:rPr sz="1100">
+                <a:solidFill>
+                  <a:srgbClr val="1F2937"/>
+                </a:solidFill>
+                <a:latin typeface="Menlo"/>
+              </a:rPr>
+              <a:t>└── CHANGELOG.md                          ← append-only history</a:t>
+            </a:r>
+          </a:p>
+          <a:p>
+            <a:pPr algn="l"/>
+            <a:r>
+              <a:rPr sz="1100">
+                <a:solidFill>
+                  <a:srgbClr val="1F2937"/>
+                </a:solidFill>
+                <a:latin typeface="Menlo"/>
+              </a:rPr>
+              <a:t/>
+            </a:r>
+          </a:p>
+          <a:p>
+            <a:pPr algn="l"/>
+            <a:r>
+              <a:rPr sz="1100">
+                <a:solidFill>
+                  <a:srgbClr val="1F2937"/>
+                </a:solidFill>
+                <a:latin typeface="Menlo"/>
+              </a:rPr>
+              <a:t>projects/{slug}/data-updates/</a:t>
+            </a:r>
+          </a:p>
+          <a:p>
+            <a:pPr algn="l"/>
+            <a:r>
+              <a:rPr sz="1100">
+                <a:solidFill>
+                  <a:srgbClr val="1F2937"/>
+                </a:solidFill>
+                <a:latin typeface="Menlo"/>
+              </a:rPr>
+              <a:t>└── 2026-05-15-fig-1a_wt-vs-ko-baseline.md  ← structured record</a:t>
+            </a:r>
+          </a:p>
+        </p:txBody>
+      </p:sp>
+    </p:spTree>
+  </p:cSld>
+  <p:clrMapOvr>
+    <a:masterClrMapping/>
+  </p:clrMapOvr>
+</p:sld>
+</file>
+
+<file path=ppt/slides/slide25.xml><?xml version="1.0" encoding="utf-8"?>
+<p:sld xmlns:a="http://schemas.openxmlformats.org/drawingml/2006/main" xmlns:p="http://schemas.openxmlformats.org/presentationml/2006/main" xmlns:r="http://schemas.openxmlformats.org/officeDocument/2006/relationships">
+  <p:cSld>
+    <p:spTree>
+      <p:nvGrpSpPr>
+        <p:cNvPr id="1" name=""/>
+        <p:cNvGrpSpPr/>
+        <p:nvPr/>
+      </p:nvGrpSpPr>
+      <p:grpSpPr/>
+      <p:sp>
+        <p:nvSpPr>
+          <p:cNvPr id="2" name="Rectangle 1"/>
+          <p:cNvSpPr/>
+          <p:nvPr/>
+        </p:nvSpPr>
+        <p:spPr>
+          <a:xfrm>
+            <a:off x="457200" y="457200"/>
+            <a:ext cx="54864" cy="777240"/>
+          </a:xfrm>
+          <a:prstGeom prst="rect">
+            <a:avLst/>
+          </a:prstGeom>
+          <a:solidFill>
+            <a:srgbClr val="0F766E"/>
+          </a:solidFill>
+          <a:ln>
+            <a:noFill/>
+          </a:ln>
+        </p:spPr>
+        <p:style>
+          <a:lnRef idx="1">
+            <a:schemeClr val="accent1"/>
+          </a:lnRef>
+          <a:fillRef idx="3">
+            <a:schemeClr val="accent1"/>
+          </a:fillRef>
+          <a:effectRef idx="2">
+            <a:schemeClr val="accent1"/>
+          </a:effectRef>
+          <a:fontRef idx="minor">
+            <a:schemeClr val="lt1"/>
+          </a:fontRef>
+        </p:style>
+        <p:txBody>
+          <a:bodyPr rtlCol="0" anchor="ctr"/>
+          <a:lstStyle/>
+          <a:p>
+            <a:pPr algn="ctr"/>
+          </a:p>
+        </p:txBody>
+      </p:sp>
+      <p:sp>
+        <p:nvSpPr>
+          <p:cNvPr id="3" name="TextBox 2"/>
+          <p:cNvSpPr txBox="1"/>
+          <p:nvPr/>
+        </p:nvSpPr>
+        <p:spPr>
+          <a:xfrm>
+            <a:off x="640080" y="411480"/>
+            <a:ext cx="10058400" cy="292608"/>
+          </a:xfrm>
+          <a:prstGeom prst="rect">
+            <a:avLst/>
+          </a:prstGeom>
+          <a:noFill/>
+        </p:spPr>
+        <p:txBody>
+          <a:bodyPr wrap="square" lIns="0" rIns="0" tIns="0" bIns="0">
+            <a:spAutoFit/>
+          </a:bodyPr>
+          <a:lstStyle/>
+          <a:p>
+            <a:pPr algn="l"/>
+            <a:r>
+              <a:rPr sz="1100" b="1" i="0">
+                <a:solidFill>
+                  <a:srgbClr val="0F766E"/>
+                </a:solidFill>
+                <a:latin typeface="Helvetica Neue"/>
+              </a:rPr>
+              <a:t>06 · Figure organization</a:t>
+            </a:r>
+          </a:p>
+        </p:txBody>
+      </p:sp>
+      <p:sp>
+        <p:nvSpPr>
+          <p:cNvPr id="4" name="TextBox 3"/>
+          <p:cNvSpPr txBox="1"/>
+          <p:nvPr/>
+        </p:nvSpPr>
+        <p:spPr>
+          <a:xfrm>
+            <a:off x="640080" y="685800"/>
+            <a:ext cx="10058400" cy="640080"/>
+          </a:xfrm>
+          <a:prstGeom prst="rect">
+            <a:avLst/>
+          </a:prstGeom>
+          <a:noFill/>
+        </p:spPr>
+        <p:txBody>
+          <a:bodyPr wrap="square" lIns="0" rIns="0" tIns="0" bIns="0">
+            <a:spAutoFit/>
+          </a:bodyPr>
+          <a:lstStyle/>
+          <a:p>
+            <a:pPr algn="l"/>
+            <a:r>
+              <a:rPr sz="2800" b="1" i="0">
+                <a:solidFill>
+                  <a:srgbClr val="1E2A4A"/>
+                </a:solidFill>
+                <a:latin typeface="Helvetica Neue"/>
+              </a:rPr>
+              <a:t>Reassign &amp; bulk renumber</a:t>
+            </a:r>
+          </a:p>
+        </p:txBody>
+      </p:sp>
+      <p:sp>
+        <p:nvSpPr>
+          <p:cNvPr id="5" name="Rounded Rectangle 4"/>
+          <p:cNvSpPr/>
+          <p:nvPr/>
+        </p:nvSpPr>
+        <p:spPr>
+          <a:xfrm>
+            <a:off x="640080" y="1554480"/>
+            <a:ext cx="10515600" cy="731520"/>
+          </a:xfrm>
+          <a:prstGeom prst="roundRect">
+            <a:avLst>
+              <a:gd name="adj" fmla="val 8000"/>
+            </a:avLst>
+          </a:prstGeom>
+          <a:solidFill>
+            <a:srgbClr val="F9FAFB"/>
+          </a:solidFill>
+          <a:ln w="9525">
+            <a:solidFill>
+              <a:srgbClr val="E5E7EB"/>
+            </a:solidFill>
+          </a:ln>
+          <a:effectLst/>
+        </p:spPr>
+        <p:style>
+          <a:lnRef idx="1">
+            <a:schemeClr val="accent1"/>
+          </a:lnRef>
+          <a:fillRef idx="3">
+            <a:schemeClr val="accent1"/>
+          </a:fillRef>
+          <a:effectRef idx="2">
+            <a:schemeClr val="accent1"/>
+          </a:effectRef>
+          <a:fontRef idx="minor">
+            <a:schemeClr val="lt1"/>
+          </a:fontRef>
+        </p:style>
+        <p:txBody>
+          <a:bodyPr rtlCol="0" anchor="ctr"/>
+          <a:lstStyle/>
+          <a:p>
+            <a:pPr algn="ctr"/>
+          </a:p>
+        </p:txBody>
+      </p:sp>
+      <p:sp>
+        <p:nvSpPr>
+          <p:cNvPr id="6" name="TextBox 5"/>
+          <p:cNvSpPr txBox="1"/>
+          <p:nvPr/>
+        </p:nvSpPr>
+        <p:spPr>
+          <a:xfrm>
+            <a:off x="868680" y="1634480"/>
+            <a:ext cx="3657600" cy="365760"/>
+          </a:xfrm>
+          <a:prstGeom prst="rect">
+            <a:avLst/>
+          </a:prstGeom>
+          <a:noFill/>
+        </p:spPr>
+        <p:txBody>
+          <a:bodyPr wrap="square" lIns="0" rIns="0" tIns="0" bIns="0">
+            <a:spAutoFit/>
+          </a:bodyPr>
+          <a:lstStyle/>
+          <a:p>
+            <a:pPr algn="l"/>
+            <a:r>
+              <a:rPr sz="1500" b="1" i="0">
+                <a:solidFill>
+                  <a:srgbClr val="115E59"/>
+                </a:solidFill>
+                <a:latin typeface="Helvetica Neue"/>
+              </a:rPr>
+              <a:t>Source of truth</a:t>
+            </a:r>
+          </a:p>
+        </p:txBody>
+      </p:sp>
+      <p:sp>
+        <p:nvSpPr>
+          <p:cNvPr id="7" name="TextBox 6"/>
+          <p:cNvSpPr txBox="1"/>
+          <p:nvPr/>
+        </p:nvSpPr>
+        <p:spPr>
+          <a:xfrm>
+            <a:off x="4572000" y="1634480"/>
+            <a:ext cx="6492240" cy="640080"/>
+          </a:xfrm>
+          <a:prstGeom prst="rect">
+            <a:avLst/>
+          </a:prstGeom>
+          <a:noFill/>
+        </p:spPr>
+        <p:txBody>
+          <a:bodyPr wrap="square" lIns="0" rIns="0" tIns="0" bIns="0">
+            <a:spAutoFit/>
+          </a:bodyPr>
+          <a:lstStyle/>
+          <a:p>
+            <a:pPr algn="l"/>
+            <a:r>
+              <a:rPr sz="1300" b="0" i="0">
+                <a:solidFill>
+                  <a:srgbClr val="1F2937"/>
+                </a:solidFill>
+                <a:latin typeface="Helvetica Neue"/>
+              </a:rPr>
+              <a:t>The `figure` field in each data-update's frontmatter. Filenames mirror it but are display-only.</a:t>
+            </a:r>
+          </a:p>
+        </p:txBody>
+      </p:sp>
+      <p:sp>
+        <p:nvSpPr>
+          <p:cNvPr id="8" name="Rounded Rectangle 7"/>
+          <p:cNvSpPr/>
+          <p:nvPr/>
+        </p:nvSpPr>
+        <p:spPr>
+          <a:xfrm>
+            <a:off x="640080" y="2423160"/>
+            <a:ext cx="10515600" cy="731520"/>
+          </a:xfrm>
+          <a:prstGeom prst="roundRect">
+            <a:avLst>
+              <a:gd name="adj" fmla="val 8000"/>
+            </a:avLst>
+          </a:prstGeom>
+          <a:solidFill>
+            <a:srgbClr val="F9FAFB"/>
+          </a:solidFill>
+          <a:ln w="9525">
+            <a:solidFill>
+              <a:srgbClr val="E5E7EB"/>
+            </a:solidFill>
+          </a:ln>
+          <a:effectLst/>
+        </p:spPr>
+        <p:style>
+          <a:lnRef idx="1">
+            <a:schemeClr val="accent1"/>
+          </a:lnRef>
+          <a:fillRef idx="3">
+            <a:schemeClr val="accent1"/>
+          </a:fillRef>
+          <a:effectRef idx="2">
+            <a:schemeClr val="accent1"/>
+          </a:effectRef>
+          <a:fontRef idx="minor">
+            <a:schemeClr val="lt1"/>
+          </a:fontRef>
+        </p:style>
+        <p:txBody>
+          <a:bodyPr rtlCol="0" anchor="ctr"/>
+          <a:lstStyle/>
+          <a:p>
+            <a:pPr algn="ctr"/>
+          </a:p>
+        </p:txBody>
+      </p:sp>
+      <p:sp>
+        <p:nvSpPr>
+          <p:cNvPr id="9" name="TextBox 8"/>
+          <p:cNvSpPr txBox="1"/>
+          <p:nvPr/>
+        </p:nvSpPr>
+        <p:spPr>
+          <a:xfrm>
+            <a:off x="868680" y="2503160"/>
+            <a:ext cx="3657600" cy="365760"/>
+          </a:xfrm>
+          <a:prstGeom prst="rect">
+            <a:avLst/>
+          </a:prstGeom>
+          <a:noFill/>
+        </p:spPr>
+        <p:txBody>
+          <a:bodyPr wrap="square" lIns="0" rIns="0" tIns="0" bIns="0">
+            <a:spAutoFit/>
+          </a:bodyPr>
+          <a:lstStyle/>
+          <a:p>
+            <a:pPr algn="l"/>
+            <a:r>
+              <a:rPr sz="1500" b="1" i="0">
+                <a:solidFill>
+                  <a:srgbClr val="115E59"/>
+                </a:solidFill>
+                <a:latin typeface="Helvetica Neue"/>
+              </a:rPr>
+              <a:t>Reassign (single)</a:t>
+            </a:r>
+          </a:p>
+        </p:txBody>
+      </p:sp>
+      <p:sp>
+        <p:nvSpPr>
+          <p:cNvPr id="10" name="TextBox 9"/>
+          <p:cNvSpPr txBox="1"/>
+          <p:nvPr/>
+        </p:nvSpPr>
+        <p:spPr>
+          <a:xfrm>
+            <a:off x="4572000" y="2503160"/>
+            <a:ext cx="6492240" cy="640080"/>
+          </a:xfrm>
+          <a:prstGeom prst="rect">
+            <a:avLst/>
+          </a:prstGeom>
+          <a:noFill/>
+        </p:spPr>
+        <p:txBody>
+          <a:bodyPr wrap="square" lIns="0" rIns="0" tIns="0" bIns="0">
+            <a:spAutoFit/>
+          </a:bodyPr>
+          <a:lstStyle/>
+          <a:p>
+            <a:pPr algn="l"/>
+            <a:r>
+              <a:rPr sz="1300" b="0" i="0">
+                <a:solidFill>
+                  <a:srgbClr val="1F2937"/>
+                </a:solidFill>
+                <a:latin typeface="Helvetica Neue"/>
+              </a:rPr>
+              <a:t>Change figure/panel for one data-update → frontmatter rewritten + file renamed + CHANGELOG line.</a:t>
+            </a:r>
+          </a:p>
+        </p:txBody>
+      </p:sp>
+      <p:sp>
+        <p:nvSpPr>
+          <p:cNvPr id="11" name="Rounded Rectangle 10"/>
+          <p:cNvSpPr/>
+          <p:nvPr/>
+        </p:nvSpPr>
+        <p:spPr>
+          <a:xfrm>
+            <a:off x="640080" y="3291840"/>
+            <a:ext cx="10515600" cy="731520"/>
+          </a:xfrm>
+          <a:prstGeom prst="roundRect">
+            <a:avLst>
+              <a:gd name="adj" fmla="val 8000"/>
+            </a:avLst>
+          </a:prstGeom>
+          <a:solidFill>
+            <a:srgbClr val="F9FAFB"/>
+          </a:solidFill>
+          <a:ln w="9525">
+            <a:solidFill>
+              <a:srgbClr val="E5E7EB"/>
+            </a:solidFill>
+          </a:ln>
+          <a:effectLst/>
+        </p:spPr>
+        <p:style>
+          <a:lnRef idx="1">
+            <a:schemeClr val="accent1"/>
+          </a:lnRef>
+          <a:fillRef idx="3">
+            <a:schemeClr val="accent1"/>
+          </a:fillRef>
+          <a:effectRef idx="2">
+            <a:schemeClr val="accent1"/>
+          </a:effectRef>
+          <a:fontRef idx="minor">
+            <a:schemeClr val="lt1"/>
+          </a:fontRef>
+        </p:style>
+        <p:txBody>
+          <a:bodyPr rtlCol="0" anchor="ctr"/>
+          <a:lstStyle/>
+          <a:p>
+            <a:pPr algn="ctr"/>
+          </a:p>
+        </p:txBody>
+      </p:sp>
+      <p:sp>
+        <p:nvSpPr>
+          <p:cNvPr id="12" name="TextBox 11"/>
+          <p:cNvSpPr txBox="1"/>
+          <p:nvPr/>
+        </p:nvSpPr>
+        <p:spPr>
+          <a:xfrm>
+            <a:off x="868680" y="3371840"/>
+            <a:ext cx="3657600" cy="365760"/>
+          </a:xfrm>
+          <a:prstGeom prst="rect">
+            <a:avLst/>
+          </a:prstGeom>
+          <a:noFill/>
+        </p:spPr>
+        <p:txBody>
+          <a:bodyPr wrap="square" lIns="0" rIns="0" tIns="0" bIns="0">
+            <a:spAutoFit/>
+          </a:bodyPr>
+          <a:lstStyle/>
+          <a:p>
+            <a:pPr algn="l"/>
+            <a:r>
+              <a:rPr sz="1500" b="1" i="0">
+                <a:solidFill>
+                  <a:srgbClr val="115E59"/>
+                </a:solidFill>
+                <a:latin typeface="Helvetica Neue"/>
+              </a:rPr>
+              <a:t>Renumber (bulk)</a:t>
+            </a:r>
+          </a:p>
+        </p:txBody>
+      </p:sp>
+      <p:sp>
+        <p:nvSpPr>
+          <p:cNvPr id="13" name="TextBox 12"/>
+          <p:cNvSpPr txBox="1"/>
+          <p:nvPr/>
+        </p:nvSpPr>
+        <p:spPr>
+          <a:xfrm>
+            <a:off x="4572000" y="3371840"/>
+            <a:ext cx="6492240" cy="640080"/>
+          </a:xfrm>
+          <a:prstGeom prst="rect">
+            <a:avLst/>
+          </a:prstGeom>
+          <a:noFill/>
+        </p:spPr>
+        <p:txBody>
+          <a:bodyPr wrap="square" lIns="0" rIns="0" tIns="0" bIns="0">
+            <a:spAutoFit/>
+          </a:bodyPr>
+          <a:lstStyle/>
+          <a:p>
+            <a:pPr algn="l"/>
+            <a:r>
+              <a:rPr sz="1300" b="0" i="0">
+                <a:solidFill>
+                  <a:srgbClr val="1F2937"/>
+                </a:solidFill>
+                <a:latin typeface="Helvetica Neue"/>
+              </a:rPr>
+              <a:t>Mapping table (Fig 1 → Fig 2, etc.). 2-pass rename handles swap-style cases safely.</a:t>
+            </a:r>
+          </a:p>
+        </p:txBody>
+      </p:sp>
+      <p:sp>
+        <p:nvSpPr>
+          <p:cNvPr id="14" name="Rounded Rectangle 13"/>
+          <p:cNvSpPr/>
+          <p:nvPr/>
+        </p:nvSpPr>
+        <p:spPr>
+          <a:xfrm>
+            <a:off x="640080" y="4160520"/>
+            <a:ext cx="10515600" cy="731520"/>
+          </a:xfrm>
+          <a:prstGeom prst="roundRect">
+            <a:avLst>
+              <a:gd name="adj" fmla="val 8000"/>
+            </a:avLst>
+          </a:prstGeom>
+          <a:solidFill>
+            <a:srgbClr val="F9FAFB"/>
+          </a:solidFill>
+          <a:ln w="9525">
+            <a:solidFill>
+              <a:srgbClr val="E5E7EB"/>
+            </a:solidFill>
+          </a:ln>
+          <a:effectLst/>
+        </p:spPr>
+        <p:style>
+          <a:lnRef idx="1">
+            <a:schemeClr val="accent1"/>
+          </a:lnRef>
+          <a:fillRef idx="3">
+            <a:schemeClr val="accent1"/>
+          </a:fillRef>
+          <a:effectRef idx="2">
+            <a:schemeClr val="accent1"/>
+          </a:effectRef>
+          <a:fontRef idx="minor">
+            <a:schemeClr val="lt1"/>
+          </a:fontRef>
+        </p:style>
+        <p:txBody>
+          <a:bodyPr rtlCol="0" anchor="ctr"/>
+          <a:lstStyle/>
+          <a:p>
+            <a:pPr algn="ctr"/>
+          </a:p>
+        </p:txBody>
+      </p:sp>
+      <p:sp>
+        <p:nvSpPr>
+          <p:cNvPr id="15" name="TextBox 14"/>
+          <p:cNvSpPr txBox="1"/>
+          <p:nvPr/>
+        </p:nvSpPr>
+        <p:spPr>
+          <a:xfrm>
+            <a:off x="868680" y="4240520"/>
+            <a:ext cx="3657600" cy="365760"/>
+          </a:xfrm>
+          <a:prstGeom prst="rect">
+            <a:avLst/>
+          </a:prstGeom>
+          <a:noFill/>
+        </p:spPr>
+        <p:txBody>
+          <a:bodyPr wrap="square" lIns="0" rIns="0" tIns="0" bIns="0">
+            <a:spAutoFit/>
+          </a:bodyPr>
+          <a:lstStyle/>
+          <a:p>
+            <a:pPr algn="l"/>
+            <a:r>
+              <a:rPr sz="1500" b="1" i="0">
+                <a:solidFill>
+                  <a:srgbClr val="115E59"/>
+                </a:solidFill>
+                <a:latin typeface="Helvetica Neue"/>
+              </a:rPr>
+              <a:t>Affects</a:t>
+            </a:r>
+          </a:p>
+        </p:txBody>
+      </p:sp>
+      <p:sp>
+        <p:nvSpPr>
+          <p:cNvPr id="16" name="TextBox 15"/>
+          <p:cNvSpPr txBox="1"/>
+          <p:nvPr/>
+        </p:nvSpPr>
+        <p:spPr>
+          <a:xfrm>
+            <a:off x="4572000" y="4240520"/>
+            <a:ext cx="6492240" cy="640080"/>
+          </a:xfrm>
+          <a:prstGeom prst="rect">
+            <a:avLst/>
+          </a:prstGeom>
+          <a:noFill/>
+        </p:spPr>
+        <p:txBody>
+          <a:bodyPr wrap="square" lIns="0" rIns="0" tIns="0" bIns="0">
+            <a:spAutoFit/>
+          </a:bodyPr>
+          <a:lstStyle/>
+          <a:p>
+            <a:pPr algn="l"/>
+            <a:r>
+              <a:rPr sz="1300" b="0" i="0">
+                <a:solidFill>
+                  <a:srgbClr val="1F2937"/>
+                </a:solidFill>
+                <a:latin typeface="Helvetica Neue"/>
+              </a:rPr>
+              <a:t>All matching data-updates + their canonical files + figure-plan.md rows.</a:t>
+            </a:r>
+          </a:p>
+        </p:txBody>
+      </p:sp>
+      <p:sp>
+        <p:nvSpPr>
+          <p:cNvPr id="17" name="TextBox 16"/>
+          <p:cNvSpPr txBox="1"/>
+          <p:nvPr/>
+        </p:nvSpPr>
+        <p:spPr>
+          <a:xfrm>
+            <a:off x="640080" y="5943600"/>
+            <a:ext cx="10515600" cy="365760"/>
+          </a:xfrm>
+          <a:prstGeom prst="rect">
+            <a:avLst/>
+          </a:prstGeom>
+          <a:noFill/>
+        </p:spPr>
+        <p:txBody>
+          <a:bodyPr wrap="square" lIns="0" rIns="0" tIns="0" bIns="0">
+            <a:spAutoFit/>
+          </a:bodyPr>
+          <a:lstStyle/>
+          <a:p>
+            <a:pPr algn="l"/>
+            <a:r>
+              <a:rPr sz="1100" b="0" i="1">
+                <a:solidFill>
+                  <a:srgbClr val="6B7280"/>
+                </a:solidFill>
+                <a:latin typeface="Helvetica Neue"/>
+              </a:rPr>
+              <a:t>API: reassign-data-update, renumber-figures.</a:t>
+            </a:r>
+          </a:p>
+        </p:txBody>
+      </p:sp>
+    </p:spTree>
+  </p:cSld>
+  <p:clrMapOvr>
+    <a:masterClrMapping/>
+  </p:clrMapOvr>
+</p:sld>
+</file>
+
+<file path=ppt/slides/slide26.xml><?xml version="1.0" encoding="utf-8"?>
+<p:sld xmlns:a="http://schemas.openxmlformats.org/drawingml/2006/main" xmlns:p="http://schemas.openxmlformats.org/presentationml/2006/main" xmlns:r="http://schemas.openxmlformats.org/officeDocument/2006/relationships">
+  <p:cSld>
+    <p:spTree>
+      <p:nvGrpSpPr>
+        <p:cNvPr id="1" name=""/>
+        <p:cNvGrpSpPr/>
+        <p:nvPr/>
+      </p:nvGrpSpPr>
+      <p:grpSpPr/>
+      <p:sp>
+        <p:nvSpPr>
+          <p:cNvPr id="2" name="Rectangle 1"/>
+          <p:cNvSpPr/>
+          <p:nvPr/>
+        </p:nvSpPr>
+        <p:spPr>
+          <a:xfrm>
+            <a:off x="457200" y="457200"/>
+            <a:ext cx="54864" cy="777240"/>
+          </a:xfrm>
+          <a:prstGeom prst="rect">
+            <a:avLst/>
+          </a:prstGeom>
+          <a:solidFill>
+            <a:srgbClr val="0F766E"/>
+          </a:solidFill>
+          <a:ln>
+            <a:noFill/>
+          </a:ln>
+        </p:spPr>
+        <p:style>
+          <a:lnRef idx="1">
+            <a:schemeClr val="accent1"/>
+          </a:lnRef>
+          <a:fillRef idx="3">
+            <a:schemeClr val="accent1"/>
+          </a:fillRef>
+          <a:effectRef idx="2">
+            <a:schemeClr val="accent1"/>
+          </a:effectRef>
+          <a:fontRef idx="minor">
+            <a:schemeClr val="lt1"/>
+          </a:fontRef>
+        </p:style>
+        <p:txBody>
+          <a:bodyPr rtlCol="0" anchor="ctr"/>
+          <a:lstStyle/>
+          <a:p>
+            <a:pPr algn="ctr"/>
+          </a:p>
+        </p:txBody>
+      </p:sp>
+      <p:sp>
+        <p:nvSpPr>
+          <p:cNvPr id="3" name="TextBox 2"/>
+          <p:cNvSpPr txBox="1"/>
+          <p:nvPr/>
+        </p:nvSpPr>
+        <p:spPr>
+          <a:xfrm>
+            <a:off x="640080" y="411480"/>
+            <a:ext cx="10058400" cy="292608"/>
+          </a:xfrm>
+          <a:prstGeom prst="rect">
+            <a:avLst/>
+          </a:prstGeom>
+          <a:noFill/>
+        </p:spPr>
+        <p:txBody>
+          <a:bodyPr wrap="square" lIns="0" rIns="0" tIns="0" bIns="0">
+            <a:spAutoFit/>
+          </a:bodyPr>
+          <a:lstStyle/>
+          <a:p>
+            <a:pPr algn="l"/>
+            <a:r>
+              <a:rPr sz="1100" b="1" i="0">
+                <a:solidFill>
+                  <a:srgbClr val="0F766E"/>
+                </a:solidFill>
+                <a:latin typeface="Helvetica Neue"/>
+              </a:rPr>
+              <a:t>07 · Rollback</a:t>
+            </a:r>
+          </a:p>
+        </p:txBody>
+      </p:sp>
+      <p:sp>
+        <p:nvSpPr>
+          <p:cNvPr id="4" name="TextBox 3"/>
+          <p:cNvSpPr txBox="1"/>
+          <p:nvPr/>
+        </p:nvSpPr>
+        <p:spPr>
+          <a:xfrm>
+            <a:off x="640080" y="685800"/>
+            <a:ext cx="10058400" cy="640080"/>
+          </a:xfrm>
+          <a:prstGeom prst="rect">
+            <a:avLst/>
+          </a:prstGeom>
+          <a:noFill/>
+        </p:spPr>
+        <p:txBody>
+          <a:bodyPr wrap="square" lIns="0" rIns="0" tIns="0" bIns="0">
+            <a:spAutoFit/>
+          </a:bodyPr>
+          <a:lstStyle/>
+          <a:p>
+            <a:pPr algn="l"/>
+            <a:r>
+              <a:rPr sz="2800" b="1" i="0">
+                <a:solidFill>
+                  <a:srgbClr val="1E2A4A"/>
+                </a:solidFill>
+                <a:latin typeface="Helvetica Neue"/>
+              </a:rPr>
+              <a:t>Archive viewer &amp; restore</a:t>
+            </a:r>
+          </a:p>
+        </p:txBody>
+      </p:sp>
+      <p:sp>
+        <p:nvSpPr>
+          <p:cNvPr id="5" name="Rounded Rectangle 4"/>
+          <p:cNvSpPr/>
+          <p:nvPr/>
+        </p:nvSpPr>
+        <p:spPr>
+          <a:xfrm>
+            <a:off x="640080" y="1554480"/>
+            <a:ext cx="10515600" cy="731520"/>
+          </a:xfrm>
+          <a:prstGeom prst="roundRect">
+            <a:avLst>
+              <a:gd name="adj" fmla="val 8000"/>
+            </a:avLst>
+          </a:prstGeom>
+          <a:solidFill>
+            <a:srgbClr val="F9FAFB"/>
+          </a:solidFill>
+          <a:ln w="9525">
+            <a:solidFill>
+              <a:srgbClr val="E5E7EB"/>
+            </a:solidFill>
+          </a:ln>
+          <a:effectLst/>
+        </p:spPr>
+        <p:style>
+          <a:lnRef idx="1">
+            <a:schemeClr val="accent1"/>
+          </a:lnRef>
+          <a:fillRef idx="3">
+            <a:schemeClr val="accent1"/>
+          </a:fillRef>
+          <a:effectRef idx="2">
+            <a:schemeClr val="accent1"/>
+          </a:effectRef>
+          <a:fontRef idx="minor">
+            <a:schemeClr val="lt1"/>
+          </a:fontRef>
+        </p:style>
+        <p:txBody>
+          <a:bodyPr rtlCol="0" anchor="ctr"/>
+          <a:lstStyle/>
+          <a:p>
+            <a:pPr algn="ctr"/>
+          </a:p>
+        </p:txBody>
+      </p:sp>
+      <p:sp>
+        <p:nvSpPr>
+          <p:cNvPr id="6" name="TextBox 5"/>
+          <p:cNvSpPr txBox="1"/>
+          <p:nvPr/>
+        </p:nvSpPr>
+        <p:spPr>
+          <a:xfrm>
+            <a:off x="868680" y="1634480"/>
+            <a:ext cx="3657600" cy="365760"/>
+          </a:xfrm>
+          <a:prstGeom prst="rect">
+            <a:avLst/>
+          </a:prstGeom>
+          <a:noFill/>
+        </p:spPr>
+        <p:txBody>
+          <a:bodyPr wrap="square" lIns="0" rIns="0" tIns="0" bIns="0">
+            <a:spAutoFit/>
+          </a:bodyPr>
+          <a:lstStyle/>
+          <a:p>
+            <a:pPr algn="l"/>
+            <a:r>
+              <a:rPr sz="1500" b="1" i="0">
+                <a:solidFill>
+                  <a:srgbClr val="115E59"/>
+                </a:solidFill>
+                <a:latin typeface="Helvetica Neue"/>
+              </a:rPr>
+              <a:t>📦 Archive button</a:t>
+            </a:r>
+          </a:p>
+        </p:txBody>
+      </p:sp>
+      <p:sp>
+        <p:nvSpPr>
+          <p:cNvPr id="7" name="TextBox 6"/>
+          <p:cNvSpPr txBox="1"/>
+          <p:nvPr/>
+        </p:nvSpPr>
+        <p:spPr>
+          <a:xfrm>
+            <a:off x="4572000" y="1634480"/>
+            <a:ext cx="6492240" cy="640080"/>
+          </a:xfrm>
+          <a:prstGeom prst="rect">
+            <a:avLst/>
+          </a:prstGeom>
+          <a:noFill/>
+        </p:spPr>
+        <p:txBody>
+          <a:bodyPr wrap="square" lIns="0" rIns="0" tIns="0" bIns="0">
+            <a:spAutoFit/>
+          </a:bodyPr>
+          <a:lstStyle/>
+          <a:p>
+            <a:pPr algn="l"/>
+            <a:r>
+              <a:rPr sz="1300" b="0" i="0">
+                <a:solidFill>
+                  <a:srgbClr val="1F2937"/>
+                </a:solidFill>
+                <a:latin typeface="Helvetica Neue"/>
+              </a:rPr>
+              <a:t>Lists every zip in LLM_project_manager/archive/, newest first.</a:t>
+            </a:r>
+          </a:p>
+        </p:txBody>
+      </p:sp>
+      <p:sp>
+        <p:nvSpPr>
+          <p:cNvPr id="8" name="Rounded Rectangle 7"/>
+          <p:cNvSpPr/>
+          <p:nvPr/>
+        </p:nvSpPr>
+        <p:spPr>
+          <a:xfrm>
+            <a:off x="640080" y="2423160"/>
+            <a:ext cx="10515600" cy="731520"/>
+          </a:xfrm>
+          <a:prstGeom prst="roundRect">
+            <a:avLst>
+              <a:gd name="adj" fmla="val 8000"/>
+            </a:avLst>
+          </a:prstGeom>
+          <a:solidFill>
+            <a:srgbClr val="F9FAFB"/>
+          </a:solidFill>
+          <a:ln w="9525">
+            <a:solidFill>
+              <a:srgbClr val="E5E7EB"/>
+            </a:solidFill>
+          </a:ln>
+          <a:effectLst/>
+        </p:spPr>
+        <p:style>
+          <a:lnRef idx="1">
+            <a:schemeClr val="accent1"/>
+          </a:lnRef>
+          <a:fillRef idx="3">
+            <a:schemeClr val="accent1"/>
+          </a:fillRef>
+          <a:effectRef idx="2">
+            <a:schemeClr val="accent1"/>
+          </a:effectRef>
+          <a:fontRef idx="minor">
+            <a:schemeClr val="lt1"/>
+          </a:fontRef>
+        </p:style>
+        <p:txBody>
+          <a:bodyPr rtlCol="0" anchor="ctr"/>
+          <a:lstStyle/>
+          <a:p>
+            <a:pPr algn="ctr"/>
+          </a:p>
+        </p:txBody>
+      </p:sp>
+      <p:sp>
+        <p:nvSpPr>
+          <p:cNvPr id="9" name="TextBox 8"/>
+          <p:cNvSpPr txBox="1"/>
+          <p:nvPr/>
+        </p:nvSpPr>
+        <p:spPr>
+          <a:xfrm>
+            <a:off x="868680" y="2503160"/>
+            <a:ext cx="3657600" cy="365760"/>
+          </a:xfrm>
+          <a:prstGeom prst="rect">
+            <a:avLst/>
+          </a:prstGeom>
+          <a:noFill/>
+        </p:spPr>
+        <p:txBody>
+          <a:bodyPr wrap="square" lIns="0" rIns="0" tIns="0" bIns="0">
+            <a:spAutoFit/>
+          </a:bodyPr>
+          <a:lstStyle/>
+          <a:p>
+            <a:pPr algn="l"/>
+            <a:r>
+              <a:rPr sz="1500" b="1" i="0">
+                <a:solidFill>
+                  <a:srgbClr val="115E59"/>
+                </a:solidFill>
+                <a:latin typeface="Helvetica Neue"/>
+              </a:rPr>
+              <a:t>Per-row Restore</a:t>
+            </a:r>
+          </a:p>
+        </p:txBody>
+      </p:sp>
+      <p:sp>
+        <p:nvSpPr>
+          <p:cNvPr id="10" name="TextBox 9"/>
+          <p:cNvSpPr txBox="1"/>
+          <p:nvPr/>
+        </p:nvSpPr>
+        <p:spPr>
+          <a:xfrm>
+            <a:off x="4572000" y="2503160"/>
+            <a:ext cx="6492240" cy="640080"/>
+          </a:xfrm>
+          <a:prstGeom prst="rect">
+            <a:avLst/>
+          </a:prstGeom>
+          <a:noFill/>
+        </p:spPr>
+        <p:txBody>
+          <a:bodyPr wrap="square" lIns="0" rIns="0" tIns="0" bIns="0">
+            <a:spAutoFit/>
+          </a:bodyPr>
+          <a:lstStyle/>
+          <a:p>
+            <a:pPr algn="l"/>
+            <a:r>
+              <a:rPr sz="1300" b="0" i="0">
+                <a:solidFill>
+                  <a:srgbClr val="1F2937"/>
+                </a:solidFill>
+                <a:latin typeface="Helvetica Neue"/>
+              </a:rPr>
+              <a:t>Extracts the zip back to LLM_project_manager/.</a:t>
+            </a:r>
+          </a:p>
+        </p:txBody>
+      </p:sp>
+      <p:sp>
+        <p:nvSpPr>
+          <p:cNvPr id="11" name="Rounded Rectangle 10"/>
+          <p:cNvSpPr/>
+          <p:nvPr/>
+        </p:nvSpPr>
+        <p:spPr>
+          <a:xfrm>
+            <a:off x="640080" y="3291840"/>
+            <a:ext cx="10515600" cy="731520"/>
+          </a:xfrm>
+          <a:prstGeom prst="roundRect">
+            <a:avLst>
+              <a:gd name="adj" fmla="val 8000"/>
+            </a:avLst>
+          </a:prstGeom>
+          <a:solidFill>
+            <a:srgbClr val="F9FAFB"/>
+          </a:solidFill>
+          <a:ln w="9525">
+            <a:solidFill>
+              <a:srgbClr val="E5E7EB"/>
+            </a:solidFill>
+          </a:ln>
+          <a:effectLst/>
+        </p:spPr>
+        <p:style>
+          <a:lnRef idx="1">
+            <a:schemeClr val="accent1"/>
+          </a:lnRef>
+          <a:fillRef idx="3">
+            <a:schemeClr val="accent1"/>
+          </a:fillRef>
+          <a:effectRef idx="2">
+            <a:schemeClr val="accent1"/>
+          </a:effectRef>
+          <a:fontRef idx="minor">
+            <a:schemeClr val="lt1"/>
+          </a:fontRef>
+        </p:style>
+        <p:txBody>
+          <a:bodyPr rtlCol="0" anchor="ctr"/>
+          <a:lstStyle/>
+          <a:p>
+            <a:pPr algn="ctr"/>
+          </a:p>
+        </p:txBody>
+      </p:sp>
+      <p:sp>
+        <p:nvSpPr>
+          <p:cNvPr id="12" name="TextBox 11"/>
+          <p:cNvSpPr txBox="1"/>
+          <p:nvPr/>
+        </p:nvSpPr>
+        <p:spPr>
+          <a:xfrm>
+            <a:off x="868680" y="3371840"/>
+            <a:ext cx="3657600" cy="365760"/>
+          </a:xfrm>
+          <a:prstGeom prst="rect">
+            <a:avLst/>
+          </a:prstGeom>
+          <a:noFill/>
+        </p:spPr>
+        <p:txBody>
+          <a:bodyPr wrap="square" lIns="0" rIns="0" tIns="0" bIns="0">
+            <a:spAutoFit/>
+          </a:bodyPr>
+          <a:lstStyle/>
+          <a:p>
+            <a:pPr algn="l"/>
+            <a:r>
+              <a:rPr sz="1500" b="1" i="0">
+                <a:solidFill>
+                  <a:srgbClr val="115E59"/>
+                </a:solidFill>
+                <a:latin typeface="Helvetica Neue"/>
+              </a:rPr>
+              <a:t>Conflict handling</a:t>
+            </a:r>
+          </a:p>
+        </p:txBody>
+      </p:sp>
+      <p:sp>
+        <p:nvSpPr>
+          <p:cNvPr id="13" name="TextBox 12"/>
+          <p:cNvSpPr txBox="1"/>
+          <p:nvPr/>
+        </p:nvSpPr>
+        <p:spPr>
+          <a:xfrm>
+            <a:off x="4572000" y="3371840"/>
+            <a:ext cx="6492240" cy="640080"/>
+          </a:xfrm>
+          <a:prstGeom prst="rect">
+            <a:avLst/>
+          </a:prstGeom>
+          <a:noFill/>
+        </p:spPr>
+        <p:txBody>
+          <a:bodyPr wrap="square" lIns="0" rIns="0" tIns="0" bIns="0">
+            <a:spAutoFit/>
+          </a:bodyPr>
+          <a:lstStyle/>
+          <a:p>
+            <a:pPr algn="l"/>
+            <a:r>
+              <a:rPr sz="1300" b="0" i="0">
+                <a:solidFill>
+                  <a:srgbClr val="1F2937"/>
+                </a:solidFill>
+                <a:latin typeface="Helvetica Neue"/>
+              </a:rPr>
+              <a:t>If a file with the original name exists, restored file gets _restored_{timestamp} suffix.</a:t>
+            </a:r>
+          </a:p>
+        </p:txBody>
+      </p:sp>
+      <p:sp>
+        <p:nvSpPr>
+          <p:cNvPr id="14" name="Rounded Rectangle 13"/>
+          <p:cNvSpPr/>
+          <p:nvPr/>
+        </p:nvSpPr>
+        <p:spPr>
+          <a:xfrm>
+            <a:off x="640080" y="4160520"/>
+            <a:ext cx="10515600" cy="731520"/>
+          </a:xfrm>
+          <a:prstGeom prst="roundRect">
+            <a:avLst>
+              <a:gd name="adj" fmla="val 8000"/>
+            </a:avLst>
+          </a:prstGeom>
+          <a:solidFill>
+            <a:srgbClr val="F9FAFB"/>
+          </a:solidFill>
+          <a:ln w="9525">
+            <a:solidFill>
+              <a:srgbClr val="E5E7EB"/>
+            </a:solidFill>
+          </a:ln>
+          <a:effectLst/>
+        </p:spPr>
+        <p:style>
+          <a:lnRef idx="1">
+            <a:schemeClr val="accent1"/>
+          </a:lnRef>
+          <a:fillRef idx="3">
+            <a:schemeClr val="accent1"/>
+          </a:fillRef>
+          <a:effectRef idx="2">
+            <a:schemeClr val="accent1"/>
+          </a:effectRef>
+          <a:fontRef idx="minor">
+            <a:schemeClr val="lt1"/>
+          </a:fontRef>
+        </p:style>
+        <p:txBody>
+          <a:bodyPr rtlCol="0" anchor="ctr"/>
+          <a:lstStyle/>
+          <a:p>
+            <a:pPr algn="ctr"/>
+          </a:p>
+        </p:txBody>
+      </p:sp>
+      <p:sp>
+        <p:nvSpPr>
+          <p:cNvPr id="15" name="TextBox 14"/>
+          <p:cNvSpPr txBox="1"/>
+          <p:nvPr/>
+        </p:nvSpPr>
+        <p:spPr>
+          <a:xfrm>
+            <a:off x="868680" y="4240520"/>
+            <a:ext cx="3657600" cy="365760"/>
+          </a:xfrm>
+          <a:prstGeom prst="rect">
+            <a:avLst/>
+          </a:prstGeom>
+          <a:noFill/>
+        </p:spPr>
+        <p:txBody>
+          <a:bodyPr wrap="square" lIns="0" rIns="0" tIns="0" bIns="0">
+            <a:spAutoFit/>
+          </a:bodyPr>
+          <a:lstStyle/>
+          <a:p>
+            <a:pPr algn="l"/>
+            <a:r>
+              <a:rPr sz="1500" b="1" i="0">
+                <a:solidFill>
+                  <a:srgbClr val="115E59"/>
+                </a:solidFill>
+                <a:latin typeface="Helvetica Neue"/>
+              </a:rPr>
+              <a:t>Audit</a:t>
+            </a:r>
+          </a:p>
+        </p:txBody>
+      </p:sp>
+      <p:sp>
+        <p:nvSpPr>
+          <p:cNvPr id="16" name="TextBox 15"/>
+          <p:cNvSpPr txBox="1"/>
+          <p:nvPr/>
+        </p:nvSpPr>
+        <p:spPr>
+          <a:xfrm>
+            <a:off x="4572000" y="4240520"/>
+            <a:ext cx="6492240" cy="640080"/>
+          </a:xfrm>
+          <a:prstGeom prst="rect">
+            <a:avLst/>
+          </a:prstGeom>
+          <a:noFill/>
+        </p:spPr>
+        <p:txBody>
+          <a:bodyPr wrap="square" lIns="0" rIns="0" tIns="0" bIns="0">
+            <a:spAutoFit/>
+          </a:bodyPr>
+          <a:lstStyle/>
+          <a:p>
+            <a:pPr algn="l"/>
+            <a:r>
+              <a:rPr sz="1300" b="0" i="0">
+                <a:solidFill>
+                  <a:srgbClr val="1F2937"/>
+                </a:solidFill>
+                <a:latin typeface="Helvetica Neue"/>
+              </a:rPr>
+              <a:t>CHANGELOG appends a RESTORE line.</a:t>
+            </a:r>
+          </a:p>
+        </p:txBody>
+      </p:sp>
+      <p:sp>
+        <p:nvSpPr>
+          <p:cNvPr id="17" name="TextBox 16"/>
+          <p:cNvSpPr txBox="1"/>
+          <p:nvPr/>
+        </p:nvSpPr>
+        <p:spPr>
+          <a:xfrm>
+            <a:off x="640080" y="5943600"/>
+            <a:ext cx="10515600" cy="365760"/>
+          </a:xfrm>
+          <a:prstGeom prst="rect">
+            <a:avLst/>
+          </a:prstGeom>
+          <a:noFill/>
+        </p:spPr>
+        <p:txBody>
+          <a:bodyPr wrap="square" lIns="0" rIns="0" tIns="0" bIns="0">
+            <a:spAutoFit/>
+          </a:bodyPr>
+          <a:lstStyle/>
+          <a:p>
+            <a:pPr algn="l"/>
+            <a:r>
+              <a:rPr sz="1100" b="0" i="1">
+                <a:solidFill>
+                  <a:srgbClr val="6B7280"/>
+                </a:solidFill>
+                <a:latin typeface="Helvetica Neue"/>
+              </a:rPr>
+              <a:t>Each zip also contains _archive_meta.txt (original name, reason, archived_at).</a:t>
+            </a:r>
+          </a:p>
+        </p:txBody>
+      </p:sp>
+    </p:spTree>
+  </p:cSld>
+  <p:clrMapOvr>
+    <a:masterClrMapping/>
+  </p:clrMapOvr>
+</p:sld>
+</file>
+
+<file path=ppt/slides/slide27.xml><?xml version="1.0" encoding="utf-8"?>
+<p:sld xmlns:a="http://schemas.openxmlformats.org/drawingml/2006/main" xmlns:p="http://schemas.openxmlformats.org/presentationml/2006/main" xmlns:r="http://schemas.openxmlformats.org/officeDocument/2006/relationships">
+  <p:cSld>
+    <p:spTree>
+      <p:nvGrpSpPr>
+        <p:cNvPr id="1" name=""/>
+        <p:cNvGrpSpPr/>
+        <p:nvPr/>
+      </p:nvGrpSpPr>
+      <p:grpSpPr/>
+      <p:sp>
+        <p:nvSpPr>
+          <p:cNvPr id="2" name="Rectangle 1"/>
+          <p:cNvSpPr/>
+          <p:nvPr/>
+        </p:nvSpPr>
+        <p:spPr>
+          <a:xfrm>
+            <a:off x="457200" y="457200"/>
+            <a:ext cx="54864" cy="777240"/>
+          </a:xfrm>
+          <a:prstGeom prst="rect">
+            <a:avLst/>
+          </a:prstGeom>
+          <a:solidFill>
+            <a:srgbClr val="0F766E"/>
+          </a:solidFill>
+          <a:ln>
+            <a:noFill/>
+          </a:ln>
+        </p:spPr>
+        <p:style>
+          <a:lnRef idx="1">
+            <a:schemeClr val="accent1"/>
+          </a:lnRef>
+          <a:fillRef idx="3">
+            <a:schemeClr val="accent1"/>
+          </a:fillRef>
+          <a:effectRef idx="2">
+            <a:schemeClr val="accent1"/>
+          </a:effectRef>
+          <a:fontRef idx="minor">
+            <a:schemeClr val="lt1"/>
+          </a:fontRef>
+        </p:style>
+        <p:txBody>
+          <a:bodyPr rtlCol="0" anchor="ctr"/>
+          <a:lstStyle/>
+          <a:p>
+            <a:pPr algn="ctr"/>
+          </a:p>
+        </p:txBody>
+      </p:sp>
+      <p:sp>
+        <p:nvSpPr>
+          <p:cNvPr id="3" name="TextBox 2"/>
+          <p:cNvSpPr txBox="1"/>
+          <p:nvPr/>
+        </p:nvSpPr>
+        <p:spPr>
+          <a:xfrm>
+            <a:off x="640080" y="411480"/>
+            <a:ext cx="10058400" cy="292608"/>
+          </a:xfrm>
+          <a:prstGeom prst="rect">
+            <a:avLst/>
+          </a:prstGeom>
+          <a:noFill/>
+        </p:spPr>
+        <p:txBody>
+          <a:bodyPr wrap="square" lIns="0" rIns="0" tIns="0" bIns="0">
+            <a:spAutoFit/>
+          </a:bodyPr>
+          <a:lstStyle/>
+          <a:p>
+            <a:pPr algn="l"/>
+            <a:r>
+              <a:rPr sz="1100" b="1" i="0">
+                <a:solidFill>
+                  <a:srgbClr val="0F766E"/>
+                </a:solidFill>
+                <a:latin typeface="Helvetica Neue"/>
+              </a:rPr>
+              <a:t>08 · Meetings</a:t>
+            </a:r>
+          </a:p>
+        </p:txBody>
+      </p:sp>
+      <p:sp>
+        <p:nvSpPr>
+          <p:cNvPr id="4" name="TextBox 3"/>
+          <p:cNvSpPr txBox="1"/>
+          <p:nvPr/>
+        </p:nvSpPr>
+        <p:spPr>
+          <a:xfrm>
+            <a:off x="640080" y="685800"/>
+            <a:ext cx="10058400" cy="640080"/>
+          </a:xfrm>
+          <a:prstGeom prst="rect">
+            <a:avLst/>
+          </a:prstGeom>
+          <a:noFill/>
+        </p:spPr>
+        <p:txBody>
+          <a:bodyPr wrap="square" lIns="0" rIns="0" tIns="0" bIns="0">
+            <a:spAutoFit/>
+          </a:bodyPr>
+          <a:lstStyle/>
+          <a:p>
+            <a:pPr algn="l"/>
+            <a:r>
+              <a:rPr sz="2800" b="1" i="0">
+                <a:solidFill>
+                  <a:srgbClr val="1E2A4A"/>
+                </a:solidFill>
+                <a:latin typeface="Helvetica Neue"/>
+              </a:rPr>
+              <a:t>Meeting system</a:t>
+            </a:r>
+          </a:p>
+        </p:txBody>
+      </p:sp>
+      <p:sp>
+        <p:nvSpPr>
+          <p:cNvPr id="5" name="Rounded Rectangle 4"/>
+          <p:cNvSpPr/>
+          <p:nvPr/>
+        </p:nvSpPr>
+        <p:spPr>
+          <a:xfrm>
+            <a:off x="705612" y="1691640"/>
+            <a:ext cx="3520440" cy="3657600"/>
+          </a:xfrm>
+          <a:prstGeom prst="roundRect">
+            <a:avLst>
+              <a:gd name="adj" fmla="val 8000"/>
+            </a:avLst>
+          </a:prstGeom>
+          <a:solidFill>
+            <a:srgbClr val="FFFFFF"/>
+          </a:solidFill>
+          <a:ln w="9525">
+            <a:solidFill>
+              <a:srgbClr val="E5E7EB"/>
+            </a:solidFill>
+          </a:ln>
+          <a:effectLst/>
+        </p:spPr>
+        <p:style>
+          <a:lnRef idx="1">
+            <a:schemeClr val="accent1"/>
+          </a:lnRef>
+          <a:fillRef idx="3">
+            <a:schemeClr val="accent1"/>
+          </a:fillRef>
+          <a:effectRef idx="2">
+            <a:schemeClr val="accent1"/>
+          </a:effectRef>
+          <a:fontRef idx="minor">
+            <a:schemeClr val="lt1"/>
+          </a:fontRef>
+        </p:style>
+        <p:txBody>
+          <a:bodyPr rtlCol="0" anchor="ctr"/>
+          <a:lstStyle/>
+          <a:p>
+            <a:pPr algn="ctr"/>
+          </a:p>
+        </p:txBody>
+      </p:sp>
+      <p:sp>
+        <p:nvSpPr>
+          <p:cNvPr id="6" name="Rounded Rectangle 5"/>
+          <p:cNvSpPr/>
+          <p:nvPr/>
+        </p:nvSpPr>
+        <p:spPr>
+          <a:xfrm>
+            <a:off x="870204" y="1856232"/>
+            <a:ext cx="1005840" cy="274320"/>
+          </a:xfrm>
+          <a:prstGeom prst="roundRect">
+            <a:avLst>
+              <a:gd name="adj" fmla="val 50000"/>
+            </a:avLst>
+          </a:prstGeom>
+          <a:solidFill>
+            <a:srgbClr val="0F766E"/>
+          </a:solidFill>
+          <a:ln>
+            <a:noFill/>
+          </a:ln>
+        </p:spPr>
+        <p:style>
+          <a:lnRef idx="1">
+            <a:schemeClr val="accent1"/>
+          </a:lnRef>
+          <a:fillRef idx="3">
+            <a:schemeClr val="accent1"/>
+          </a:fillRef>
+          <a:effectRef idx="2">
+            <a:schemeClr val="accent1"/>
+          </a:effectRef>
+          <a:fontRef idx="minor">
+            <a:schemeClr val="lt1"/>
+          </a:fontRef>
+        </p:style>
+        <p:txBody>
+          <a:bodyPr rtlCol="0" anchor="ctr" lIns="73152" rIns="73152" tIns="18288" bIns="18288"/>
+          <a:lstStyle/>
+          <a:p>
+            <a:pPr algn="ctr"/>
+            <a:r>
+              <a:rPr sz="1100" b="1">
+                <a:solidFill>
+                  <a:srgbClr val="FFFFFF"/>
+                </a:solidFill>
+                <a:latin typeface="Helvetica Neue"/>
+              </a:rPr>
+              <a:t>schedule</a:t>
+            </a:r>
+          </a:p>
+        </p:txBody>
+      </p:sp>
+      <p:sp>
+        <p:nvSpPr>
+          <p:cNvPr id="7" name="TextBox 6"/>
+          <p:cNvSpPr txBox="1"/>
+          <p:nvPr/>
+        </p:nvSpPr>
+        <p:spPr>
+          <a:xfrm>
+            <a:off x="870204" y="2286000"/>
+            <a:ext cx="3191256" cy="457200"/>
+          </a:xfrm>
+          <a:prstGeom prst="rect">
+            <a:avLst/>
+          </a:prstGeom>
+          <a:noFill/>
+        </p:spPr>
+        <p:txBody>
+          <a:bodyPr wrap="square" lIns="0" rIns="0" tIns="0" bIns="0">
+            <a:spAutoFit/>
+          </a:bodyPr>
+          <a:lstStyle/>
+          <a:p>
+            <a:pPr algn="l"/>
+            <a:r>
+              <a:rPr sz="1600" b="1" i="0">
+                <a:solidFill>
+                  <a:srgbClr val="1E2A4A"/>
+                </a:solidFill>
+                <a:latin typeface="Helvetica Neue"/>
+              </a:rPr>
+              <a:t>+ Meeting modal</a:t>
+            </a:r>
+          </a:p>
+        </p:txBody>
+      </p:sp>
+      <p:sp>
+        <p:nvSpPr>
+          <p:cNvPr id="8" name="TextBox 7"/>
+          <p:cNvSpPr txBox="1"/>
+          <p:nvPr/>
+        </p:nvSpPr>
+        <p:spPr>
+          <a:xfrm>
+            <a:off x="870204" y="2770632"/>
+            <a:ext cx="3191256" cy="2377440"/>
+          </a:xfrm>
+          <a:prstGeom prst="rect">
+            <a:avLst/>
+          </a:prstGeom>
+          <a:noFill/>
+        </p:spPr>
+        <p:txBody>
+          <a:bodyPr wrap="square" lIns="0" rIns="0" tIns="0" bIns="0">
+            <a:spAutoFit/>
+          </a:bodyPr>
+          <a:lstStyle/>
+          <a:p>
+            <a:pPr algn="l"/>
+            <a:r>
+              <a:rPr sz="1100" b="0" i="0">
+                <a:solidFill>
+                  <a:srgbClr val="1F2937"/>
+                </a:solidFill>
+                <a:latin typeface="Helvetica Neue"/>
+              </a:rPr>
+              <a:t>Pick type (default: table / progress / collaborator; extensible). Datetime, duration, attendees, location, agenda.</a:t>
+            </a:r>
+          </a:p>
+        </p:txBody>
+      </p:sp>
+      <p:sp>
+        <p:nvSpPr>
+          <p:cNvPr id="9" name="Rounded Rectangle 8"/>
+          <p:cNvSpPr/>
+          <p:nvPr/>
+        </p:nvSpPr>
+        <p:spPr>
+          <a:xfrm>
+            <a:off x="4335780" y="1691640"/>
+            <a:ext cx="3520440" cy="3657600"/>
+          </a:xfrm>
+          <a:prstGeom prst="roundRect">
+            <a:avLst>
+              <a:gd name="adj" fmla="val 8000"/>
+            </a:avLst>
+          </a:prstGeom>
+          <a:solidFill>
+            <a:srgbClr val="FFFFFF"/>
+          </a:solidFill>
+          <a:ln w="9525">
+            <a:solidFill>
+              <a:srgbClr val="E5E7EB"/>
+            </a:solidFill>
+          </a:ln>
+          <a:effectLst/>
+        </p:spPr>
+        <p:style>
+          <a:lnRef idx="1">
+            <a:schemeClr val="accent1"/>
+          </a:lnRef>
+          <a:fillRef idx="3">
+            <a:schemeClr val="accent1"/>
+          </a:fillRef>
+          <a:effectRef idx="2">
+            <a:schemeClr val="accent1"/>
+          </a:effectRef>
+          <a:fontRef idx="minor">
+            <a:schemeClr val="lt1"/>
+          </a:fontRef>
+        </p:style>
+        <p:txBody>
+          <a:bodyPr rtlCol="0" anchor="ctr"/>
+          <a:lstStyle/>
+          <a:p>
+            <a:pPr algn="ctr"/>
+          </a:p>
+        </p:txBody>
+      </p:sp>
+      <p:sp>
+        <p:nvSpPr>
+          <p:cNvPr id="10" name="Rounded Rectangle 9"/>
+          <p:cNvSpPr/>
+          <p:nvPr/>
+        </p:nvSpPr>
+        <p:spPr>
+          <a:xfrm>
+            <a:off x="4500372" y="1856232"/>
+            <a:ext cx="1005840" cy="274320"/>
+          </a:xfrm>
+          <a:prstGeom prst="roundRect">
+            <a:avLst>
+              <a:gd name="adj" fmla="val 50000"/>
+            </a:avLst>
+          </a:prstGeom>
+          <a:solidFill>
+            <a:srgbClr val="0F766E"/>
+          </a:solidFill>
+          <a:ln>
+            <a:noFill/>
+          </a:ln>
+        </p:spPr>
+        <p:style>
+          <a:lnRef idx="1">
+            <a:schemeClr val="accent1"/>
+          </a:lnRef>
+          <a:fillRef idx="3">
+            <a:schemeClr val="accent1"/>
+          </a:fillRef>
+          <a:effectRef idx="2">
+            <a:schemeClr val="accent1"/>
+          </a:effectRef>
+          <a:fontRef idx="minor">
+            <a:schemeClr val="lt1"/>
+          </a:fontRef>
+        </p:style>
+        <p:txBody>
+          <a:bodyPr rtlCol="0" anchor="ctr" lIns="73152" rIns="73152" tIns="18288" bIns="18288"/>
+          <a:lstStyle/>
+          <a:p>
+            <a:pPr algn="ctr"/>
+            <a:r>
+              <a:rPr sz="1100" b="1">
+                <a:solidFill>
+                  <a:srgbClr val="FFFFFF"/>
+                </a:solidFill>
+                <a:latin typeface="Helvetica Neue"/>
+              </a:rPr>
+              <a:t>propagate</a:t>
+            </a:r>
+          </a:p>
+        </p:txBody>
+      </p:sp>
+      <p:sp>
+        <p:nvSpPr>
+          <p:cNvPr id="11" name="TextBox 10"/>
+          <p:cNvSpPr txBox="1"/>
+          <p:nvPr/>
+        </p:nvSpPr>
+        <p:spPr>
+          <a:xfrm>
+            <a:off x="4500372" y="2286000"/>
+            <a:ext cx="3191256" cy="457200"/>
+          </a:xfrm>
+          <a:prstGeom prst="rect">
+            <a:avLst/>
+          </a:prstGeom>
+          <a:noFill/>
+        </p:spPr>
+        <p:txBody>
+          <a:bodyPr wrap="square" lIns="0" rIns="0" tIns="0" bIns="0">
+            <a:spAutoFit/>
+          </a:bodyPr>
+          <a:lstStyle/>
+          <a:p>
+            <a:pPr algn="l"/>
+            <a:r>
+              <a:rPr sz="1600" b="1" i="0">
+                <a:solidFill>
+                  <a:srgbClr val="1E2A4A"/>
+                </a:solidFill>
+                <a:latin typeface="Helvetica Neue"/>
+              </a:rPr>
+              <a:t>ICS + Calendar.app</a:t>
+            </a:r>
+          </a:p>
+        </p:txBody>
+      </p:sp>
+      <p:sp>
+        <p:nvSpPr>
+          <p:cNvPr id="12" name="TextBox 11"/>
+          <p:cNvSpPr txBox="1"/>
+          <p:nvPr/>
+        </p:nvSpPr>
+        <p:spPr>
+          <a:xfrm>
+            <a:off x="4500372" y="2770632"/>
+            <a:ext cx="3191256" cy="2377440"/>
+          </a:xfrm>
+          <a:prstGeom prst="rect">
+            <a:avLst/>
+          </a:prstGeom>
+          <a:noFill/>
+        </p:spPr>
+        <p:txBody>
+          <a:bodyPr wrap="square" lIns="0" rIns="0" tIns="0" bIns="0">
+            <a:spAutoFit/>
+          </a:bodyPr>
+          <a:lstStyle/>
+          <a:p>
+            <a:pPr algn="l"/>
+            <a:r>
+              <a:rPr sz="1100" b="0" i="0">
+                <a:solidFill>
+                  <a:srgbClr val="1F2937"/>
+                </a:solidFill>
+                <a:latin typeface="Helvetica Neue"/>
+              </a:rPr>
+              <a:t>RFC-5545 .ics file generated. AppleScript adds the event to default macOS calendar. Mailto opens to attendees.</a:t>
+            </a:r>
+          </a:p>
+        </p:txBody>
+      </p:sp>
+      <p:sp>
+        <p:nvSpPr>
+          <p:cNvPr id="13" name="Rounded Rectangle 12"/>
+          <p:cNvSpPr/>
+          <p:nvPr/>
+        </p:nvSpPr>
+        <p:spPr>
+          <a:xfrm>
+            <a:off x="7965948" y="1691640"/>
+            <a:ext cx="3520440" cy="3657600"/>
+          </a:xfrm>
+          <a:prstGeom prst="roundRect">
+            <a:avLst>
+              <a:gd name="adj" fmla="val 8000"/>
+            </a:avLst>
+          </a:prstGeom>
+          <a:solidFill>
+            <a:srgbClr val="FFFFFF"/>
+          </a:solidFill>
+          <a:ln w="9525">
+            <a:solidFill>
+              <a:srgbClr val="E5E7EB"/>
+            </a:solidFill>
+          </a:ln>
+          <a:effectLst/>
+        </p:spPr>
+        <p:style>
+          <a:lnRef idx="1">
+            <a:schemeClr val="accent1"/>
+          </a:lnRef>
+          <a:fillRef idx="3">
+            <a:schemeClr val="accent1"/>
+          </a:fillRef>
+          <a:effectRef idx="2">
+            <a:schemeClr val="accent1"/>
+          </a:effectRef>
+          <a:fontRef idx="minor">
+            <a:schemeClr val="lt1"/>
+          </a:fontRef>
+        </p:style>
+        <p:txBody>
+          <a:bodyPr rtlCol="0" anchor="ctr"/>
+          <a:lstStyle/>
+          <a:p>
+            <a:pPr algn="ctr"/>
+          </a:p>
+        </p:txBody>
+      </p:sp>
+      <p:sp>
+        <p:nvSpPr>
+          <p:cNvPr id="14" name="Rounded Rectangle 13"/>
+          <p:cNvSpPr/>
+          <p:nvPr/>
+        </p:nvSpPr>
+        <p:spPr>
+          <a:xfrm>
+            <a:off x="8130540" y="1856232"/>
+            <a:ext cx="1005840" cy="274320"/>
+          </a:xfrm>
+          <a:prstGeom prst="roundRect">
+            <a:avLst>
+              <a:gd name="adj" fmla="val 50000"/>
+            </a:avLst>
+          </a:prstGeom>
+          <a:solidFill>
+            <a:srgbClr val="B45309"/>
+          </a:solidFill>
+          <a:ln>
+            <a:noFill/>
+          </a:ln>
+        </p:spPr>
+        <p:style>
+          <a:lnRef idx="1">
+            <a:schemeClr val="accent1"/>
+          </a:lnRef>
+          <a:fillRef idx="3">
+            <a:schemeClr val="accent1"/>
+          </a:fillRef>
+          <a:effectRef idx="2">
+            <a:schemeClr val="accent1"/>
+          </a:effectRef>
+          <a:fontRef idx="minor">
+            <a:schemeClr val="lt1"/>
+          </a:fontRef>
+        </p:style>
+        <p:txBody>
+          <a:bodyPr rtlCol="0" anchor="ctr" lIns="73152" rIns="73152" tIns="18288" bIns="18288"/>
+          <a:lstStyle/>
+          <a:p>
+            <a:pPr algn="ctr"/>
+            <a:r>
+              <a:rPr sz="1100" b="1">
+                <a:solidFill>
+                  <a:srgbClr val="FFFFFF"/>
+                </a:solidFill>
+                <a:latin typeface="Helvetica Neue"/>
+              </a:rPr>
+              <a:t>notes</a:t>
+            </a:r>
+          </a:p>
+        </p:txBody>
+      </p:sp>
+      <p:sp>
+        <p:nvSpPr>
+          <p:cNvPr id="15" name="TextBox 14"/>
+          <p:cNvSpPr txBox="1"/>
+          <p:nvPr/>
+        </p:nvSpPr>
+        <p:spPr>
+          <a:xfrm>
+            <a:off x="8130540" y="2286000"/>
+            <a:ext cx="3191256" cy="457200"/>
+          </a:xfrm>
+          <a:prstGeom prst="rect">
+            <a:avLst/>
+          </a:prstGeom>
+          <a:noFill/>
+        </p:spPr>
+        <p:txBody>
+          <a:bodyPr wrap="square" lIns="0" rIns="0" tIns="0" bIns="0">
+            <a:spAutoFit/>
+          </a:bodyPr>
+          <a:lstStyle/>
+          <a:p>
+            <a:pPr algn="l"/>
+            <a:r>
+              <a:rPr sz="1600" b="1" i="0">
+                <a:solidFill>
+                  <a:srgbClr val="1E2A4A"/>
+                </a:solidFill>
+                <a:latin typeface="Helvetica Neue"/>
+              </a:rPr>
+              <a:t>Append-only notes</a:t>
+            </a:r>
+          </a:p>
+        </p:txBody>
+      </p:sp>
+      <p:sp>
+        <p:nvSpPr>
+          <p:cNvPr id="16" name="TextBox 15"/>
+          <p:cNvSpPr txBox="1"/>
+          <p:nvPr/>
+        </p:nvSpPr>
+        <p:spPr>
+          <a:xfrm>
+            <a:off x="8130540" y="2770632"/>
+            <a:ext cx="3191256" cy="2377440"/>
+          </a:xfrm>
+          <a:prstGeom prst="rect">
+            <a:avLst/>
+          </a:prstGeom>
+          <a:noFill/>
+        </p:spPr>
+        <p:txBody>
+          <a:bodyPr wrap="square" lIns="0" rIns="0" tIns="0" bIns="0">
+            <a:spAutoFit/>
+          </a:bodyPr>
+          <a:lstStyle/>
+          <a:p>
+            <a:pPr algn="l"/>
+            <a:r>
+              <a:rPr sz="1100" b="0" i="0">
+                <a:solidFill>
+                  <a:srgbClr val="1F2937"/>
+                </a:solidFill>
+                <a:latin typeface="Helvetica Neue"/>
+              </a:rPr>
+              <a:t>+ Note button on each meeting row → appended as ### Note — {timestamp} section. The file is the audit log.</a:t>
+            </a:r>
+          </a:p>
+        </p:txBody>
+      </p:sp>
+      <p:sp>
+        <p:nvSpPr>
+          <p:cNvPr id="17" name="TextBox 16"/>
+          <p:cNvSpPr txBox="1"/>
+          <p:nvPr/>
+        </p:nvSpPr>
+        <p:spPr>
+          <a:xfrm>
+            <a:off x="640080" y="5897880"/>
+            <a:ext cx="10515600" cy="365760"/>
+          </a:xfrm>
+          <a:prstGeom prst="rect">
+            <a:avLst/>
+          </a:prstGeom>
+          <a:noFill/>
+        </p:spPr>
+        <p:txBody>
+          <a:bodyPr wrap="square" lIns="0" rIns="0" tIns="0" bIns="0">
+            <a:spAutoFit/>
+          </a:bodyPr>
+          <a:lstStyle/>
+          <a:p>
+            <a:pPr algn="l"/>
+            <a:r>
+              <a:rPr sz="1100" b="0" i="1">
+                <a:solidFill>
+                  <a:srgbClr val="6B7280"/>
+                </a:solidFill>
+                <a:latin typeface="Helvetica Neue"/>
+              </a:rPr>
+              <a:t>Types persisted in _system/admin/meeting_types.json. Files live in projects/{slug}/meetings/.</a:t>
+            </a:r>
+          </a:p>
+        </p:txBody>
+      </p:sp>
+    </p:spTree>
+  </p:cSld>
+  <p:clrMapOvr>
+    <a:masterClrMapping/>
+  </p:clrMapOvr>
+</p:sld>
+</file>
+
+<file path=ppt/slides/slide28.xml><?xml version="1.0" encoding="utf-8"?>
+<p:sld xmlns:a="http://schemas.openxmlformats.org/drawingml/2006/main" xmlns:p="http://schemas.openxmlformats.org/presentationml/2006/main" xmlns:r="http://schemas.openxmlformats.org/officeDocument/2006/relationships">
+  <p:cSld>
+    <p:spTree>
+      <p:nvGrpSpPr>
+        <p:cNvPr id="1" name=""/>
+        <p:cNvGrpSpPr/>
+        <p:nvPr/>
+      </p:nvGrpSpPr>
+      <p:grpSpPr/>
+      <p:sp>
+        <p:nvSpPr>
+          <p:cNvPr id="2" name="Rectangle 1"/>
+          <p:cNvSpPr/>
+          <p:nvPr/>
+        </p:nvSpPr>
+        <p:spPr>
+          <a:xfrm>
+            <a:off x="457200" y="457200"/>
+            <a:ext cx="54864" cy="777240"/>
+          </a:xfrm>
+          <a:prstGeom prst="rect">
+            <a:avLst/>
+          </a:prstGeom>
+          <a:solidFill>
+            <a:srgbClr val="0F766E"/>
+          </a:solidFill>
+          <a:ln>
+            <a:noFill/>
+          </a:ln>
+        </p:spPr>
+        <p:style>
+          <a:lnRef idx="1">
+            <a:schemeClr val="accent1"/>
+          </a:lnRef>
+          <a:fillRef idx="3">
+            <a:schemeClr val="accent1"/>
+          </a:fillRef>
+          <a:effectRef idx="2">
+            <a:schemeClr val="accent1"/>
+          </a:effectRef>
+          <a:fontRef idx="minor">
+            <a:schemeClr val="lt1"/>
+          </a:fontRef>
+        </p:style>
+        <p:txBody>
+          <a:bodyPr rtlCol="0" anchor="ctr"/>
+          <a:lstStyle/>
+          <a:p>
+            <a:pPr algn="ctr"/>
+          </a:p>
+        </p:txBody>
+      </p:sp>
+      <p:sp>
+        <p:nvSpPr>
+          <p:cNvPr id="3" name="TextBox 2"/>
+          <p:cNvSpPr txBox="1"/>
+          <p:nvPr/>
+        </p:nvSpPr>
+        <p:spPr>
+          <a:xfrm>
+            <a:off x="640080" y="411480"/>
+            <a:ext cx="10058400" cy="292608"/>
+          </a:xfrm>
+          <a:prstGeom prst="rect">
+            <a:avLst/>
+          </a:prstGeom>
+          <a:noFill/>
+        </p:spPr>
+        <p:txBody>
+          <a:bodyPr wrap="square" lIns="0" rIns="0" tIns="0" bIns="0">
+            <a:spAutoFit/>
+          </a:bodyPr>
+          <a:lstStyle/>
+          <a:p>
+            <a:pPr algn="l"/>
+            <a:r>
+              <a:rPr sz="1100" b="1" i="0">
+                <a:solidFill>
+                  <a:srgbClr val="0F766E"/>
+                </a:solidFill>
+                <a:latin typeface="Helvetica Neue"/>
+              </a:rPr>
+              <a:t>09 · Phase 3 · Approval workflow</a:t>
+            </a:r>
+          </a:p>
+        </p:txBody>
+      </p:sp>
+      <p:sp>
+        <p:nvSpPr>
+          <p:cNvPr id="4" name="TextBox 3"/>
+          <p:cNvSpPr txBox="1"/>
+          <p:nvPr/>
+        </p:nvSpPr>
+        <p:spPr>
+          <a:xfrm>
+            <a:off x="640080" y="685800"/>
+            <a:ext cx="10058400" cy="640080"/>
+          </a:xfrm>
+          <a:prstGeom prst="rect">
+            <a:avLst/>
+          </a:prstGeom>
+          <a:noFill/>
+        </p:spPr>
+        <p:txBody>
+          <a:bodyPr wrap="square" lIns="0" rIns="0" tIns="0" bIns="0">
+            <a:spAutoFit/>
+          </a:bodyPr>
+          <a:lstStyle/>
+          <a:p>
+            <a:pPr algn="l"/>
+            <a:r>
+              <a:rPr sz="2800" b="1" i="0">
+                <a:solidFill>
+                  <a:srgbClr val="1E2A4A"/>
+                </a:solidFill>
+                <a:latin typeface="Helvetica Neue"/>
+              </a:rPr>
+              <a:t>LLM sync proposals</a:t>
+            </a:r>
+          </a:p>
+        </p:txBody>
+      </p:sp>
+      <p:sp>
+        <p:nvSpPr>
+          <p:cNvPr id="5" name="Rounded Rectangle 4"/>
+          <p:cNvSpPr/>
+          <p:nvPr/>
+        </p:nvSpPr>
+        <p:spPr>
+          <a:xfrm>
+            <a:off x="705612" y="1691640"/>
+            <a:ext cx="3520440" cy="3657600"/>
+          </a:xfrm>
+          <a:prstGeom prst="roundRect">
+            <a:avLst>
+              <a:gd name="adj" fmla="val 8000"/>
+            </a:avLst>
+          </a:prstGeom>
+          <a:solidFill>
+            <a:srgbClr val="FFFFFF"/>
+          </a:solidFill>
+          <a:ln w="9525">
+            <a:solidFill>
+              <a:srgbClr val="E5E7EB"/>
+            </a:solidFill>
+          </a:ln>
+          <a:effectLst/>
+        </p:spPr>
+        <p:style>
+          <a:lnRef idx="1">
+            <a:schemeClr val="accent1"/>
+          </a:lnRef>
+          <a:fillRef idx="3">
+            <a:schemeClr val="accent1"/>
+          </a:fillRef>
+          <a:effectRef idx="2">
+            <a:schemeClr val="accent1"/>
+          </a:effectRef>
+          <a:fontRef idx="minor">
+            <a:schemeClr val="lt1"/>
+          </a:fontRef>
+        </p:style>
+        <p:txBody>
+          <a:bodyPr rtlCol="0" anchor="ctr"/>
+          <a:lstStyle/>
+          <a:p>
+            <a:pPr algn="ctr"/>
+          </a:p>
+        </p:txBody>
+      </p:sp>
+      <p:sp>
+        <p:nvSpPr>
+          <p:cNvPr id="6" name="Rounded Rectangle 5"/>
+          <p:cNvSpPr/>
+          <p:nvPr/>
+        </p:nvSpPr>
+        <p:spPr>
+          <a:xfrm>
+            <a:off x="870204" y="1856232"/>
+            <a:ext cx="1005840" cy="274320"/>
+          </a:xfrm>
+          <a:prstGeom prst="roundRect">
+            <a:avLst>
+              <a:gd name="adj" fmla="val 50000"/>
+            </a:avLst>
+          </a:prstGeom>
+          <a:solidFill>
+            <a:srgbClr val="B91C1C"/>
+          </a:solidFill>
+          <a:ln>
+            <a:noFill/>
+          </a:ln>
+        </p:spPr>
+        <p:style>
+          <a:lnRef idx="1">
+            <a:schemeClr val="accent1"/>
+          </a:lnRef>
+          <a:fillRef idx="3">
+            <a:schemeClr val="accent1"/>
+          </a:fillRef>
+          <a:effectRef idx="2">
+            <a:schemeClr val="accent1"/>
+          </a:effectRef>
+          <a:fontRef idx="minor">
+            <a:schemeClr val="lt1"/>
+          </a:fontRef>
+        </p:style>
+        <p:txBody>
+          <a:bodyPr rtlCol="0" anchor="ctr" lIns="73152" rIns="73152" tIns="18288" bIns="18288"/>
+          <a:lstStyle/>
+          <a:p>
+            <a:pPr algn="ctr"/>
+            <a:r>
+              <a:rPr sz="1100" b="1">
+                <a:solidFill>
+                  <a:srgbClr val="FFFFFF"/>
+                </a:solidFill>
+                <a:latin typeface="Helvetica Neue"/>
+              </a:rPr>
+              <a:t>local-only</a:t>
+            </a:r>
+          </a:p>
+        </p:txBody>
+      </p:sp>
+      <p:sp>
+        <p:nvSpPr>
+          <p:cNvPr id="7" name="TextBox 6"/>
+          <p:cNvSpPr txBox="1"/>
+          <p:nvPr/>
+        </p:nvSpPr>
+        <p:spPr>
+          <a:xfrm>
+            <a:off x="870204" y="2286000"/>
+            <a:ext cx="3191256" cy="457200"/>
+          </a:xfrm>
+          <a:prstGeom prst="rect">
+            <a:avLst/>
+          </a:prstGeom>
+          <a:noFill/>
+        </p:spPr>
+        <p:txBody>
+          <a:bodyPr wrap="square" lIns="0" rIns="0" tIns="0" bIns="0">
+            <a:spAutoFit/>
+          </a:bodyPr>
+          <a:lstStyle/>
+          <a:p>
+            <a:pPr algn="l"/>
+            <a:r>
+              <a:rPr sz="1600" b="1" i="0">
+                <a:solidFill>
+                  <a:srgbClr val="1E2A4A"/>
+                </a:solidFill>
+                <a:latin typeface="Helvetica Neue"/>
+              </a:rPr>
+              <a:t>🤖 data-sync</a:t>
+            </a:r>
+          </a:p>
+        </p:txBody>
+      </p:sp>
+      <p:sp>
+        <p:nvSpPr>
+          <p:cNvPr id="8" name="TextBox 7"/>
+          <p:cNvSpPr txBox="1"/>
+          <p:nvPr/>
+        </p:nvSpPr>
+        <p:spPr>
+          <a:xfrm>
+            <a:off x="870204" y="2770632"/>
+            <a:ext cx="3191256" cy="2377440"/>
+          </a:xfrm>
+          <a:prstGeom prst="rect">
+            <a:avLst/>
+          </a:prstGeom>
+          <a:noFill/>
+        </p:spPr>
+        <p:txBody>
+          <a:bodyPr wrap="square" lIns="0" rIns="0" tIns="0" bIns="0">
+            <a:spAutoFit/>
+          </a:bodyPr>
+          <a:lstStyle/>
+          <a:p>
+            <a:pPr algn="l"/>
+            <a:r>
+              <a:rPr sz="1100" b="0" i="0">
+                <a:solidFill>
+                  <a:srgbClr val="1F2937"/>
+                </a:solidFill>
+                <a:latin typeface="Helvetica Neue"/>
+              </a:rPr>
+              <a:t>Reads recent data-updates + planning artifacts. Proposes figure-plan status updates, Decision_Log entries, notes.</a:t>
+            </a:r>
+          </a:p>
+        </p:txBody>
+      </p:sp>
+      <p:sp>
+        <p:nvSpPr>
+          <p:cNvPr id="9" name="Rounded Rectangle 8"/>
+          <p:cNvSpPr/>
+          <p:nvPr/>
+        </p:nvSpPr>
+        <p:spPr>
+          <a:xfrm>
+            <a:off x="4335780" y="1691640"/>
+            <a:ext cx="3520440" cy="3657600"/>
+          </a:xfrm>
+          <a:prstGeom prst="roundRect">
+            <a:avLst>
+              <a:gd name="adj" fmla="val 8000"/>
+            </a:avLst>
+          </a:prstGeom>
+          <a:solidFill>
+            <a:srgbClr val="FFFFFF"/>
+          </a:solidFill>
+          <a:ln w="9525">
+            <a:solidFill>
+              <a:srgbClr val="E5E7EB"/>
+            </a:solidFill>
+          </a:ln>
+          <a:effectLst/>
+        </p:spPr>
+        <p:style>
+          <a:lnRef idx="1">
+            <a:schemeClr val="accent1"/>
+          </a:lnRef>
+          <a:fillRef idx="3">
+            <a:schemeClr val="accent1"/>
+          </a:fillRef>
+          <a:effectRef idx="2">
+            <a:schemeClr val="accent1"/>
+          </a:effectRef>
+          <a:fontRef idx="minor">
+            <a:schemeClr val="lt1"/>
+          </a:fontRef>
+        </p:style>
+        <p:txBody>
+          <a:bodyPr rtlCol="0" anchor="ctr"/>
+          <a:lstStyle/>
+          <a:p>
+            <a:pPr algn="ctr"/>
+          </a:p>
+        </p:txBody>
+      </p:sp>
+      <p:sp>
+        <p:nvSpPr>
+          <p:cNvPr id="10" name="Rounded Rectangle 9"/>
+          <p:cNvSpPr/>
+          <p:nvPr/>
+        </p:nvSpPr>
+        <p:spPr>
+          <a:xfrm>
+            <a:off x="4500372" y="1856232"/>
+            <a:ext cx="1005840" cy="274320"/>
+          </a:xfrm>
+          <a:prstGeom prst="roundRect">
+            <a:avLst>
+              <a:gd name="adj" fmla="val 50000"/>
+            </a:avLst>
+          </a:prstGeom>
+          <a:solidFill>
+            <a:srgbClr val="B91C1C"/>
+          </a:solidFill>
+          <a:ln>
+            <a:noFill/>
+          </a:ln>
+        </p:spPr>
+        <p:style>
+          <a:lnRef idx="1">
+            <a:schemeClr val="accent1"/>
+          </a:lnRef>
+          <a:fillRef idx="3">
+            <a:schemeClr val="accent1"/>
+          </a:fillRef>
+          <a:effectRef idx="2">
+            <a:schemeClr val="accent1"/>
+          </a:effectRef>
+          <a:fontRef idx="minor">
+            <a:schemeClr val="lt1"/>
+          </a:fontRef>
+        </p:style>
+        <p:txBody>
+          <a:bodyPr rtlCol="0" anchor="ctr" lIns="73152" rIns="73152" tIns="18288" bIns="18288"/>
+          <a:lstStyle/>
+          <a:p>
+            <a:pPr algn="ctr"/>
+            <a:r>
+              <a:rPr sz="1100" b="1">
+                <a:solidFill>
+                  <a:srgbClr val="FFFFFF"/>
+                </a:solidFill>
+                <a:latin typeface="Helvetica Neue"/>
+              </a:rPr>
+              <a:t>local-only</a:t>
+            </a:r>
+          </a:p>
+        </p:txBody>
+      </p:sp>
+      <p:sp>
+        <p:nvSpPr>
+          <p:cNvPr id="11" name="TextBox 10"/>
+          <p:cNvSpPr txBox="1"/>
+          <p:nvPr/>
+        </p:nvSpPr>
+        <p:spPr>
+          <a:xfrm>
+            <a:off x="4500372" y="2286000"/>
+            <a:ext cx="3191256" cy="457200"/>
+          </a:xfrm>
+          <a:prstGeom prst="rect">
+            <a:avLst/>
+          </a:prstGeom>
+          <a:noFill/>
+        </p:spPr>
+        <p:txBody>
+          <a:bodyPr wrap="square" lIns="0" rIns="0" tIns="0" bIns="0">
+            <a:spAutoFit/>
+          </a:bodyPr>
+          <a:lstStyle/>
+          <a:p>
+            <a:pPr algn="l"/>
+            <a:r>
+              <a:rPr sz="1600" b="1" i="0">
+                <a:solidFill>
+                  <a:srgbClr val="1E2A4A"/>
+                </a:solidFill>
+                <a:latin typeface="Helvetica Neue"/>
+              </a:rPr>
+              <a:t>🤖 meeting-sync</a:t>
+            </a:r>
+          </a:p>
+        </p:txBody>
+      </p:sp>
+      <p:sp>
+        <p:nvSpPr>
+          <p:cNvPr id="12" name="TextBox 11"/>
+          <p:cNvSpPr txBox="1"/>
+          <p:nvPr/>
+        </p:nvSpPr>
+        <p:spPr>
+          <a:xfrm>
+            <a:off x="4500372" y="2770632"/>
+            <a:ext cx="3191256" cy="2377440"/>
+          </a:xfrm>
+          <a:prstGeom prst="rect">
+            <a:avLst/>
+          </a:prstGeom>
+          <a:noFill/>
+        </p:spPr>
+        <p:txBody>
+          <a:bodyPr wrap="square" lIns="0" rIns="0" tIns="0" bIns="0">
+            <a:spAutoFit/>
+          </a:bodyPr>
+          <a:lstStyle/>
+          <a:p>
+            <a:pPr algn="l"/>
+            <a:r>
+              <a:rPr sz="1100" b="0" i="0">
+                <a:solidFill>
+                  <a:srgbClr val="1F2937"/>
+                </a:solidFill>
+                <a:latin typeface="Helvetica Neue"/>
+              </a:rPr>
+              <a:t>Reads recent meetings + planning artifacts. Proposes decisions logged, figure / experiment shifts, notes.</a:t>
+            </a:r>
+          </a:p>
+        </p:txBody>
+      </p:sp>
+      <p:sp>
+        <p:nvSpPr>
+          <p:cNvPr id="13" name="Rounded Rectangle 12"/>
+          <p:cNvSpPr/>
+          <p:nvPr/>
+        </p:nvSpPr>
+        <p:spPr>
+          <a:xfrm>
+            <a:off x="7965948" y="1691640"/>
+            <a:ext cx="3520440" cy="3657600"/>
+          </a:xfrm>
+          <a:prstGeom prst="roundRect">
+            <a:avLst>
+              <a:gd name="adj" fmla="val 8000"/>
+            </a:avLst>
+          </a:prstGeom>
+          <a:solidFill>
+            <a:srgbClr val="FFFFFF"/>
+          </a:solidFill>
+          <a:ln w="9525">
+            <a:solidFill>
+              <a:srgbClr val="E5E7EB"/>
+            </a:solidFill>
+          </a:ln>
+          <a:effectLst/>
+        </p:spPr>
+        <p:style>
+          <a:lnRef idx="1">
+            <a:schemeClr val="accent1"/>
+          </a:lnRef>
+          <a:fillRef idx="3">
+            <a:schemeClr val="accent1"/>
+          </a:fillRef>
+          <a:effectRef idx="2">
+            <a:schemeClr val="accent1"/>
+          </a:effectRef>
+          <a:fontRef idx="minor">
+            <a:schemeClr val="lt1"/>
+          </a:fontRef>
+        </p:style>
+        <p:txBody>
+          <a:bodyPr rtlCol="0" anchor="ctr"/>
+          <a:lstStyle/>
+          <a:p>
+            <a:pPr algn="ctr"/>
+          </a:p>
+        </p:txBody>
+      </p:sp>
+      <p:sp>
+        <p:nvSpPr>
+          <p:cNvPr id="14" name="Rounded Rectangle 13"/>
+          <p:cNvSpPr/>
+          <p:nvPr/>
+        </p:nvSpPr>
+        <p:spPr>
+          <a:xfrm>
+            <a:off x="8130540" y="1856232"/>
+            <a:ext cx="1005840" cy="274320"/>
+          </a:xfrm>
+          <a:prstGeom prst="roundRect">
+            <a:avLst>
+              <a:gd name="adj" fmla="val 50000"/>
+            </a:avLst>
+          </a:prstGeom>
+          <a:solidFill>
+            <a:srgbClr val="B45309"/>
+          </a:solidFill>
+          <a:ln>
+            <a:noFill/>
+          </a:ln>
+        </p:spPr>
+        <p:style>
+          <a:lnRef idx="1">
+            <a:schemeClr val="accent1"/>
+          </a:lnRef>
+          <a:fillRef idx="3">
+            <a:schemeClr val="accent1"/>
+          </a:fillRef>
+          <a:effectRef idx="2">
+            <a:schemeClr val="accent1"/>
+          </a:effectRef>
+          <a:fontRef idx="minor">
+            <a:schemeClr val="lt1"/>
+          </a:fontRef>
+        </p:style>
+        <p:txBody>
+          <a:bodyPr rtlCol="0" anchor="ctr" lIns="73152" rIns="73152" tIns="18288" bIns="18288"/>
+          <a:lstStyle/>
+          <a:p>
+            <a:pPr algn="ctr"/>
+            <a:r>
+              <a:rPr sz="1100" b="1">
+                <a:solidFill>
+                  <a:srgbClr val="FFFFFF"/>
+                </a:solidFill>
+                <a:latin typeface="Helvetica Neue"/>
+              </a:rPr>
+              <a:t>safety</a:t>
+            </a:r>
+          </a:p>
+        </p:txBody>
+      </p:sp>
+      <p:sp>
+        <p:nvSpPr>
+          <p:cNvPr id="15" name="TextBox 14"/>
+          <p:cNvSpPr txBox="1"/>
+          <p:nvPr/>
+        </p:nvSpPr>
+        <p:spPr>
+          <a:xfrm>
+            <a:off x="8130540" y="2286000"/>
+            <a:ext cx="3191256" cy="457200"/>
+          </a:xfrm>
+          <a:prstGeom prst="rect">
+            <a:avLst/>
+          </a:prstGeom>
+          <a:noFill/>
+        </p:spPr>
+        <p:txBody>
+          <a:bodyPr wrap="square" lIns="0" rIns="0" tIns="0" bIns="0">
+            <a:spAutoFit/>
+          </a:bodyPr>
+          <a:lstStyle/>
+          <a:p>
+            <a:pPr algn="l"/>
+            <a:r>
+              <a:rPr sz="1600" b="1" i="0">
+                <a:solidFill>
+                  <a:srgbClr val="1E2A4A"/>
+                </a:solidFill>
+                <a:latin typeface="Helvetica Neue"/>
+              </a:rPr>
+              <a:t>Apply with checkboxes</a:t>
+            </a:r>
+          </a:p>
+        </p:txBody>
+      </p:sp>
+      <p:sp>
+        <p:nvSpPr>
+          <p:cNvPr id="16" name="TextBox 15"/>
+          <p:cNvSpPr txBox="1"/>
+          <p:nvPr/>
+        </p:nvSpPr>
+        <p:spPr>
+          <a:xfrm>
+            <a:off x="8130540" y="2770632"/>
+            <a:ext cx="3191256" cy="2377440"/>
+          </a:xfrm>
+          <a:prstGeom prst="rect">
+            <a:avLst/>
+          </a:prstGeom>
+          <a:noFill/>
+        </p:spPr>
+        <p:txBody>
+          <a:bodyPr wrap="square" lIns="0" rIns="0" tIns="0" bIns="0">
+            <a:spAutoFit/>
+          </a:bodyPr>
+          <a:lstStyle/>
+          <a:p>
+            <a:pPr algn="l"/>
+            <a:r>
+              <a:rPr sz="1100" b="0" i="0">
+                <a:solidFill>
+                  <a:srgbClr val="1F2937"/>
+                </a:solidFill>
+                <a:latin typeface="Helvetica Neue"/>
+              </a:rPr>
+              <a:t>Proposals button → cards with per-action checkboxes. Server applies mechanically (regex / YAML), not via LLM.</a:t>
+            </a:r>
+          </a:p>
+        </p:txBody>
+      </p:sp>
+      <p:sp>
+        <p:nvSpPr>
+          <p:cNvPr id="17" name="TextBox 16"/>
+          <p:cNvSpPr txBox="1"/>
+          <p:nvPr/>
+        </p:nvSpPr>
+        <p:spPr>
+          <a:xfrm>
+            <a:off x="640080" y="5897880"/>
+            <a:ext cx="10515600" cy="365760"/>
+          </a:xfrm>
+          <a:prstGeom prst="rect">
+            <a:avLst/>
+          </a:prstGeom>
+          <a:noFill/>
+        </p:spPr>
+        <p:txBody>
+          <a:bodyPr wrap="square" lIns="0" rIns="0" tIns="0" bIns="0">
+            <a:spAutoFit/>
+          </a:bodyPr>
+          <a:lstStyle/>
+          <a:p>
+            <a:pPr algn="l"/>
+            <a:r>
+              <a:rPr sz="1100" b="0" i="1">
+                <a:solidFill>
+                  <a:srgbClr val="6B7280"/>
+                </a:solidFill>
+                <a:latin typeface="Helvetica Neue"/>
+              </a:rPr>
+              <a:t>LLM proposes; user approves; server executes. Apply can never itself hallucinate.</a:t>
+            </a:r>
+          </a:p>
+        </p:txBody>
+      </p:sp>
+    </p:spTree>
+  </p:cSld>
+  <p:clrMapOvr>
+    <a:masterClrMapping/>
+  </p:clrMapOvr>
+</p:sld>
+</file>
+
+<file path=ppt/slides/slide29.xml><?xml version="1.0" encoding="utf-8"?>
+<p:sld xmlns:a="http://schemas.openxmlformats.org/drawingml/2006/main" xmlns:p="http://schemas.openxmlformats.org/presentationml/2006/main" xmlns:r="http://schemas.openxmlformats.org/officeDocument/2006/relationships">
+  <p:cSld>
+    <p:spTree>
+      <p:nvGrpSpPr>
+        <p:cNvPr id="1" name=""/>
+        <p:cNvGrpSpPr/>
+        <p:nvPr/>
+      </p:nvGrpSpPr>
+      <p:grpSpPr/>
+      <p:sp>
+        <p:nvSpPr>
+          <p:cNvPr id="2" name="Rectangle 1"/>
+          <p:cNvSpPr/>
+          <p:nvPr/>
+        </p:nvSpPr>
+        <p:spPr>
+          <a:xfrm>
+            <a:off x="457200" y="457200"/>
+            <a:ext cx="54864" cy="777240"/>
+          </a:xfrm>
+          <a:prstGeom prst="rect">
+            <a:avLst/>
+          </a:prstGeom>
+          <a:solidFill>
+            <a:srgbClr val="0F766E"/>
+          </a:solidFill>
+          <a:ln>
+            <a:noFill/>
+          </a:ln>
+        </p:spPr>
+        <p:style>
+          <a:lnRef idx="1">
+            <a:schemeClr val="accent1"/>
+          </a:lnRef>
+          <a:fillRef idx="3">
+            <a:schemeClr val="accent1"/>
+          </a:fillRef>
+          <a:effectRef idx="2">
+            <a:schemeClr val="accent1"/>
+          </a:effectRef>
+          <a:fontRef idx="minor">
+            <a:schemeClr val="lt1"/>
+          </a:fontRef>
+        </p:style>
+        <p:txBody>
+          <a:bodyPr rtlCol="0" anchor="ctr"/>
+          <a:lstStyle/>
+          <a:p>
+            <a:pPr algn="ctr"/>
+          </a:p>
+        </p:txBody>
+      </p:sp>
+      <p:sp>
+        <p:nvSpPr>
+          <p:cNvPr id="3" name="TextBox 2"/>
+          <p:cNvSpPr txBox="1"/>
+          <p:nvPr/>
+        </p:nvSpPr>
+        <p:spPr>
+          <a:xfrm>
+            <a:off x="640080" y="411480"/>
+            <a:ext cx="10058400" cy="292608"/>
+          </a:xfrm>
+          <a:prstGeom prst="rect">
+            <a:avLst/>
+          </a:prstGeom>
+          <a:noFill/>
+        </p:spPr>
+        <p:txBody>
+          <a:bodyPr wrap="square" lIns="0" rIns="0" tIns="0" bIns="0">
+            <a:spAutoFit/>
+          </a:bodyPr>
+          <a:lstStyle/>
+          <a:p>
+            <a:pPr algn="l"/>
+            <a:r>
+              <a:rPr sz="1100" b="1" i="0">
+                <a:solidFill>
+                  <a:srgbClr val="0F766E"/>
+                </a:solidFill>
+                <a:latin typeface="Helvetica Neue"/>
+              </a:rPr>
+              <a:t>09 · Action vocabulary</a:t>
+            </a:r>
+          </a:p>
+        </p:txBody>
+      </p:sp>
+      <p:sp>
+        <p:nvSpPr>
+          <p:cNvPr id="4" name="TextBox 3"/>
+          <p:cNvSpPr txBox="1"/>
+          <p:nvPr/>
+        </p:nvSpPr>
+        <p:spPr>
+          <a:xfrm>
+            <a:off x="640080" y="685800"/>
+            <a:ext cx="10058400" cy="640080"/>
+          </a:xfrm>
+          <a:prstGeom prst="rect">
+            <a:avLst/>
+          </a:prstGeom>
+          <a:noFill/>
+        </p:spPr>
+        <p:txBody>
+          <a:bodyPr wrap="square" lIns="0" rIns="0" tIns="0" bIns="0">
+            <a:spAutoFit/>
+          </a:bodyPr>
+          <a:lstStyle/>
+          <a:p>
+            <a:pPr algn="l"/>
+            <a:r>
+              <a:rPr sz="2800" b="1" i="0">
+                <a:solidFill>
+                  <a:srgbClr val="1E2A4A"/>
+                </a:solidFill>
+                <a:latin typeface="Helvetica Neue"/>
+              </a:rPr>
+              <a:t>Proposal JSON schema</a:t>
+            </a:r>
+          </a:p>
+        </p:txBody>
+      </p:sp>
+      <p:sp>
+        <p:nvSpPr>
+          <p:cNvPr id="5" name="TextBox 4"/>
+          <p:cNvSpPr txBox="1"/>
+          <p:nvPr/>
+        </p:nvSpPr>
+        <p:spPr>
+          <a:xfrm>
+            <a:off x="640080" y="1554480"/>
+            <a:ext cx="10515600" cy="640080"/>
+          </a:xfrm>
+          <a:prstGeom prst="rect">
+            <a:avLst/>
+          </a:prstGeom>
+          <a:noFill/>
+        </p:spPr>
+        <p:txBody>
+          <a:bodyPr wrap="square" lIns="0" rIns="0" tIns="0" bIns="0">
+            <a:spAutoFit/>
+          </a:bodyPr>
+          <a:lstStyle/>
+          <a:p>
+            <a:pPr algn="l"/>
+            <a:r>
+              <a:rPr sz="1400" b="0" i="0">
+                <a:solidFill>
+                  <a:srgbClr val="1F2937"/>
+                </a:solidFill>
+                <a:latin typeface="Helvetica Neue"/>
+              </a:rPr>
+              <a:t>Every action carries source_files for traceability. Supported actions: figure_plan_status_update, experiment_roadmap_status_update, figure_plan_add_row, experiment_roadmap_add_row, decision_log_append, note.</a:t>
+            </a:r>
+          </a:p>
+        </p:txBody>
+      </p:sp>
+      <p:sp>
+        <p:nvSpPr>
+          <p:cNvPr id="6" name="Rounded Rectangle 5"/>
+          <p:cNvSpPr/>
+          <p:nvPr/>
+        </p:nvSpPr>
+        <p:spPr>
+          <a:xfrm>
+            <a:off x="640080" y="2286000"/>
+            <a:ext cx="10515600" cy="3840480"/>
+          </a:xfrm>
+          <a:prstGeom prst="roundRect">
+            <a:avLst>
+              <a:gd name="adj" fmla="val 8000"/>
+            </a:avLst>
+          </a:prstGeom>
+          <a:solidFill>
+            <a:srgbClr val="F3F4F6"/>
+          </a:solidFill>
+          <a:ln w="9525">
+            <a:solidFill>
+              <a:srgbClr val="E5E7EB"/>
+            </a:solidFill>
+          </a:ln>
+          <a:effectLst/>
+        </p:spPr>
+        <p:style>
+          <a:lnRef idx="1">
+            <a:schemeClr val="accent1"/>
+          </a:lnRef>
+          <a:fillRef idx="3">
+            <a:schemeClr val="accent1"/>
+          </a:fillRef>
+          <a:effectRef idx="2">
+            <a:schemeClr val="accent1"/>
+          </a:effectRef>
+          <a:fontRef idx="minor">
+            <a:schemeClr val="lt1"/>
+          </a:fontRef>
+        </p:style>
+        <p:txBody>
+          <a:bodyPr rtlCol="0" anchor="ctr"/>
+          <a:lstStyle/>
+          <a:p>
+            <a:pPr algn="ctr"/>
+          </a:p>
+        </p:txBody>
+      </p:sp>
+      <p:sp>
+        <p:nvSpPr>
+          <p:cNvPr id="7" name="TextBox 6"/>
+          <p:cNvSpPr txBox="1"/>
+          <p:nvPr/>
+        </p:nvSpPr>
+        <p:spPr>
+          <a:xfrm>
+            <a:off x="868680" y="2423160"/>
+            <a:ext cx="10058400" cy="3566160"/>
+          </a:xfrm>
+          <a:prstGeom prst="rect">
+            <a:avLst/>
+          </a:prstGeom>
+          <a:noFill/>
+        </p:spPr>
+        <p:txBody>
+          <a:bodyPr wrap="square">
+            <a:spAutoFit/>
+          </a:bodyPr>
+          <a:lstStyle/>
+          <a:p>
+            <a:pPr algn="l"/>
+            <a:r>
+              <a:rPr sz="1100">
+                <a:solidFill>
+                  <a:srgbClr val="1F2937"/>
+                </a:solidFill>
+                <a:latin typeface="Menlo"/>
+              </a:rPr>
+              <a:t>[</a:t>
+            </a:r>
+          </a:p>
+          <a:p>
+            <a:pPr algn="l"/>
+            <a:r>
+              <a:rPr sz="1100">
+                <a:solidFill>
+                  <a:srgbClr val="1F2937"/>
+                </a:solidFill>
+                <a:latin typeface="Menlo"/>
+              </a:rPr>
+              <a:t>  { "id": "p1",</a:t>
+            </a:r>
+          </a:p>
+          <a:p>
+            <a:pPr algn="l"/>
+            <a:r>
+              <a:rPr sz="1100">
+                <a:solidFill>
+                  <a:srgbClr val="1F2937"/>
+                </a:solidFill>
+                <a:latin typeface="Menlo"/>
+              </a:rPr>
+              <a:t>    "action": "figure_plan_status_update",</a:t>
+            </a:r>
+          </a:p>
+          <a:p>
+            <a:pPr algn="l"/>
+            <a:r>
+              <a:rPr sz="1100">
+                <a:solidFill>
+                  <a:srgbClr val="1F2937"/>
+                </a:solidFill>
+                <a:latin typeface="Menlo"/>
+              </a:rPr>
+              <a:t>    "figure": "Fig 2", "panel": "A",</a:t>
+            </a:r>
+          </a:p>
+          <a:p>
+            <a:pPr algn="l"/>
+            <a:r>
+              <a:rPr sz="1100">
+                <a:solidFill>
+                  <a:srgbClr val="1F2937"/>
+                </a:solidFill>
+                <a:latin typeface="Menlo"/>
+              </a:rPr>
+              <a:t>    "new_status": "analyzed",</a:t>
+            </a:r>
+          </a:p>
+          <a:p>
+            <a:pPr algn="l"/>
+            <a:r>
+              <a:rPr sz="1100">
+                <a:solidFill>
+                  <a:srgbClr val="1F2937"/>
+                </a:solidFill>
+                <a:latin typeface="Menlo"/>
+              </a:rPr>
+              <a:t>    "reason": "data-update added n=5 wt + 5 ko with significance test",</a:t>
+            </a:r>
+          </a:p>
+          <a:p>
+            <a:pPr algn="l"/>
+            <a:r>
+              <a:rPr sz="1100">
+                <a:solidFill>
+                  <a:srgbClr val="1F2937"/>
+                </a:solidFill>
+                <a:latin typeface="Menlo"/>
+              </a:rPr>
+              <a:t>    "source_files": ["projects/foo/data-updates/2026-05-12-fig-2a_wt-ko.md"]</a:t>
+            </a:r>
+          </a:p>
+          <a:p>
+            <a:pPr algn="l"/>
+            <a:r>
+              <a:rPr sz="1100">
+                <a:solidFill>
+                  <a:srgbClr val="1F2937"/>
+                </a:solidFill>
+                <a:latin typeface="Menlo"/>
+              </a:rPr>
+              <a:t>  },</a:t>
+            </a:r>
+          </a:p>
+          <a:p>
+            <a:pPr algn="l"/>
+            <a:r>
+              <a:rPr sz="1100">
+                <a:solidFill>
+                  <a:srgbClr val="1F2937"/>
+                </a:solidFill>
+                <a:latin typeface="Menlo"/>
+              </a:rPr>
+              <a:t>  { "id": "p2",</a:t>
+            </a:r>
+          </a:p>
+          <a:p>
+            <a:pPr algn="l"/>
+            <a:r>
+              <a:rPr sz="1100">
+                <a:solidFill>
+                  <a:srgbClr val="1F2937"/>
+                </a:solidFill>
+                <a:latin typeface="Menlo"/>
+              </a:rPr>
+              <a:t>    "action": "decision_log_append",</a:t>
+            </a:r>
+          </a:p>
+          <a:p>
+            <a:pPr algn="l"/>
+            <a:r>
+              <a:rPr sz="1100">
+                <a:solidFill>
+                  <a:srgbClr val="1F2937"/>
+                </a:solidFill>
+                <a:latin typeface="Menlo"/>
+              </a:rPr>
+              <a:t>    "entry": "Drop Fig 3B (insufficient effect size, n=4)",</a:t>
+            </a:r>
+          </a:p>
+          <a:p>
+            <a:pPr algn="l"/>
+            <a:r>
+              <a:rPr sz="1100">
+                <a:solidFill>
+                  <a:srgbClr val="1F2937"/>
+                </a:solidFill>
+                <a:latin typeface="Menlo"/>
+              </a:rPr>
+              <a:t>    "source_files": ["projects/foo/meetings/2026-05-14-progress.md"]</a:t>
+            </a:r>
+          </a:p>
+          <a:p>
+            <a:pPr algn="l"/>
+            <a:r>
+              <a:rPr sz="1100">
+                <a:solidFill>
+                  <a:srgbClr val="1F2937"/>
+                </a:solidFill>
+                <a:latin typeface="Menlo"/>
+              </a:rPr>
+              <a:t>  }</a:t>
+            </a:r>
+          </a:p>
+          <a:p>
+            <a:pPr algn="l"/>
+            <a:r>
+              <a:rPr sz="1100">
+                <a:solidFill>
+                  <a:srgbClr val="1F2937"/>
+                </a:solidFill>
+                <a:latin typeface="Menlo"/>
+              </a:rPr>
+              <a:t>]</a:t>
+            </a:r>
           </a:p>
         </p:txBody>
       </p:sp>
@@ -11522,6 +18590,268 @@
               <a:t>"I don't have a paper on this — please give me the PDF." No improvising. No making up sources.</a:t>
             </a:r>
             <a:endParaRPr lang="en-US" sz="1200" dirty="0"/>
+          </a:p>
+        </p:txBody>
+      </p:sp>
+    </p:spTree>
+  </p:cSld>
+  <p:clrMapOvr>
+    <a:masterClrMapping/>
+  </p:clrMapOvr>
+</p:sld>
+</file>
+
+<file path=ppt/slides/slide30.xml><?xml version="1.0" encoding="utf-8"?>
+<p:sld xmlns:a="http://schemas.openxmlformats.org/drawingml/2006/main" xmlns:p="http://schemas.openxmlformats.org/presentationml/2006/main" xmlns:r="http://schemas.openxmlformats.org/officeDocument/2006/relationships">
+  <p:cSld>
+    <p:spTree>
+      <p:nvGrpSpPr>
+        <p:cNvPr id="1" name=""/>
+        <p:cNvGrpSpPr/>
+        <p:nvPr/>
+      </p:nvGrpSpPr>
+      <p:grpSpPr/>
+      <p:sp>
+        <p:nvSpPr>
+          <p:cNvPr id="2" name="Rectangle 1"/>
+          <p:cNvSpPr/>
+          <p:nvPr/>
+        </p:nvSpPr>
+        <p:spPr>
+          <a:xfrm>
+            <a:off x="0" y="0"/>
+            <a:ext cx="12192000" cy="6858000"/>
+          </a:xfrm>
+          <a:prstGeom prst="rect">
+            <a:avLst/>
+          </a:prstGeom>
+          <a:solidFill>
+            <a:srgbClr val="1E2A4A"/>
+          </a:solidFill>
+          <a:ln>
+            <a:noFill/>
+          </a:ln>
+        </p:spPr>
+        <p:style>
+          <a:lnRef idx="1">
+            <a:schemeClr val="accent1"/>
+          </a:lnRef>
+          <a:fillRef idx="3">
+            <a:schemeClr val="accent1"/>
+          </a:fillRef>
+          <a:effectRef idx="2">
+            <a:schemeClr val="accent1"/>
+          </a:effectRef>
+          <a:fontRef idx="minor">
+            <a:schemeClr val="lt1"/>
+          </a:fontRef>
+        </p:style>
+        <p:txBody>
+          <a:bodyPr rtlCol="0" anchor="ctr"/>
+          <a:lstStyle/>
+          <a:p>
+            <a:pPr algn="ctr"/>
+          </a:p>
+        </p:txBody>
+      </p:sp>
+      <p:sp>
+        <p:nvSpPr>
+          <p:cNvPr id="3" name="TextBox 2"/>
+          <p:cNvSpPr txBox="1"/>
+          <p:nvPr/>
+        </p:nvSpPr>
+        <p:spPr>
+          <a:xfrm>
+            <a:off x="640080" y="2011680"/>
+            <a:ext cx="10515600" cy="457200"/>
+          </a:xfrm>
+          <a:prstGeom prst="rect">
+            <a:avLst/>
+          </a:prstGeom>
+          <a:noFill/>
+        </p:spPr>
+        <p:txBody>
+          <a:bodyPr wrap="square" lIns="0" rIns="0" tIns="0" bIns="0">
+            <a:spAutoFit/>
+          </a:bodyPr>
+          <a:lstStyle/>
+          <a:p>
+            <a:pPr algn="l"/>
+            <a:r>
+              <a:rPr sz="1800" b="0" i="0">
+                <a:solidFill>
+                  <a:srgbClr val="A7F3D0"/>
+                </a:solidFill>
+                <a:latin typeface="Helvetica Neue"/>
+              </a:rPr>
+              <a:t>For full reference</a:t>
+            </a:r>
+          </a:p>
+        </p:txBody>
+      </p:sp>
+      <p:sp>
+        <p:nvSpPr>
+          <p:cNvPr id="4" name="TextBox 3"/>
+          <p:cNvSpPr txBox="1"/>
+          <p:nvPr/>
+        </p:nvSpPr>
+        <p:spPr>
+          <a:xfrm>
+            <a:off x="640080" y="2468880"/>
+            <a:ext cx="10515600" cy="914400"/>
+          </a:xfrm>
+          <a:prstGeom prst="rect">
+            <a:avLst/>
+          </a:prstGeom>
+          <a:noFill/>
+        </p:spPr>
+        <p:txBody>
+          <a:bodyPr wrap="square" lIns="0" rIns="0" tIns="0" bIns="0">
+            <a:spAutoFit/>
+          </a:bodyPr>
+          <a:lstStyle/>
+          <a:p>
+            <a:pPr algn="l"/>
+            <a:r>
+              <a:rPr sz="3400" b="1" i="0">
+                <a:solidFill>
+                  <a:srgbClr val="FFFFFF"/>
+                </a:solidFill>
+                <a:latin typeface="Helvetica Neue"/>
+              </a:rPr>
+              <a:t>_system/docs/features/</a:t>
+            </a:r>
+          </a:p>
+        </p:txBody>
+      </p:sp>
+      <p:sp>
+        <p:nvSpPr>
+          <p:cNvPr id="5" name="TextBox 4"/>
+          <p:cNvSpPr txBox="1"/>
+          <p:nvPr/>
+        </p:nvSpPr>
+        <p:spPr>
+          <a:xfrm>
+            <a:off x="640080" y="3474720"/>
+            <a:ext cx="10515600" cy="1828800"/>
+          </a:xfrm>
+          <a:prstGeom prst="rect">
+            <a:avLst/>
+          </a:prstGeom>
+          <a:noFill/>
+        </p:spPr>
+        <p:txBody>
+          <a:bodyPr wrap="square" lIns="0" rIns="0" tIns="0" bIns="0">
+            <a:spAutoFit/>
+          </a:bodyPr>
+          <a:lstStyle/>
+          <a:p>
+            <a:pPr algn="l"/>
+            <a:r>
+              <a:rPr sz="1400" b="0" i="0">
+                <a:solidFill>
+                  <a:srgbClr val="D1D5DB"/>
+                </a:solidFill>
+                <a:latin typeface="Helvetica Neue"/>
+              </a:rPr>
+              <a:t>01 — Layout refresh</a:t>
+            </a:r>
+          </a:p>
+          <a:p>
+            <a:pPr algn="l"/>
+            <a:r>
+              <a:rPr sz="1400" b="0" i="0">
+                <a:solidFill>
+                  <a:srgbClr val="D1D5DB"/>
+                </a:solidFill>
+                <a:latin typeface="Helvetica Neue"/>
+              </a:rPr>
+              <a:t>02 — Project managers</a:t>
+            </a:r>
+          </a:p>
+          <a:p>
+            <a:pPr algn="l"/>
+            <a:r>
+              <a:rPr sz="1400" b="0" i="0">
+                <a:solidFill>
+                  <a:srgbClr val="D1D5DB"/>
+                </a:solidFill>
+                <a:latin typeface="Helvetica Neue"/>
+              </a:rPr>
+              <a:t>03 — Admin PIN mode</a:t>
+            </a:r>
+          </a:p>
+          <a:p>
+            <a:pPr algn="l"/>
+            <a:r>
+              <a:rPr sz="1400" b="0" i="0">
+                <a:solidFill>
+                  <a:srgbClr val="D1D5DB"/>
+                </a:solidFill>
+                <a:latin typeface="Helvetica Neue"/>
+              </a:rPr>
+              <a:t>04 — Count-chip popup</a:t>
+            </a:r>
+          </a:p>
+          <a:p>
+            <a:pPr algn="l"/>
+            <a:r>
+              <a:rPr sz="1400" b="0" i="0">
+                <a:solidFill>
+                  <a:srgbClr val="D1D5DB"/>
+                </a:solidFill>
+                <a:latin typeface="Helvetica Neue"/>
+              </a:rPr>
+              <a:t>05 — Data updates</a:t>
+            </a:r>
+          </a:p>
+          <a:p>
+            <a:pPr algn="l"/>
+            <a:r>
+              <a:rPr sz="1400" b="0" i="0">
+                <a:solidFill>
+                  <a:srgbClr val="D1D5DB"/>
+                </a:solidFill>
+                <a:latin typeface="Helvetica Neue"/>
+              </a:rPr>
+              <a:t>06 — Reassign &amp; renumber</a:t>
+            </a:r>
+          </a:p>
+          <a:p>
+            <a:pPr algn="l"/>
+            <a:r>
+              <a:rPr sz="1400" b="0" i="0">
+                <a:solidFill>
+                  <a:srgbClr val="D1D5DB"/>
+                </a:solidFill>
+                <a:latin typeface="Helvetica Neue"/>
+              </a:rPr>
+              <a:t>07 — Archive &amp; restore</a:t>
+            </a:r>
+          </a:p>
+          <a:p>
+            <a:pPr algn="l"/>
+            <a:r>
+              <a:rPr sz="1400" b="0" i="0">
+                <a:solidFill>
+                  <a:srgbClr val="D1D5DB"/>
+                </a:solidFill>
+                <a:latin typeface="Helvetica Neue"/>
+              </a:rPr>
+              <a:t>08 — Meeting system</a:t>
+            </a:r>
+          </a:p>
+          <a:p>
+            <a:pPr algn="l"/>
+            <a:r>
+              <a:rPr sz="1400" b="0" i="0">
+                <a:solidFill>
+                  <a:srgbClr val="D1D5DB"/>
+                </a:solidFill>
+                <a:latin typeface="Helvetica Neue"/>
+              </a:rPr>
+              <a:t>09 — LLM sync proposals</a:t>
+            </a:r>
           </a:p>
         </p:txBody>
       </p:sp>
